--- a/FE_SR/Paper_repo/Discussion_key_points.pptx
+++ b/FE_SR/Paper_repo/Discussion_key_points.pptx
@@ -1,26 +1,1104 @@
 
 <file path=ppt/presentation.xml><?xml version="1.0" encoding="utf-8"?>
-<p:presentation xmlns:a="http://schemas.openxmlformats.org/drawingml/2006/main" xmlns:p="http://schemas.openxmlformats.org/presentationml/2006/main" xmlns:r="http://schemas.openxmlformats.org/officeDocument/2006/relationships" xmlns:p14="http://schemas.microsoft.com/office/powerpoint/2010/main" xmlns:p15="http://schemas.microsoft.com/office/powerpoint/2012/main" xmlns:mc="http://schemas.openxmlformats.org/markup-compatibility/2006">
+<p:presentation xmlns:a="http://schemas.openxmlformats.org/drawingml/2006/main" xmlns:r="http://schemas.openxmlformats.org/officeDocument/2006/relationships" xmlns:p="http://schemas.openxmlformats.org/presentationml/2006/main">
   <p:sldMasterIdLst>
-    <p:sldMasterId id="2147483648" r:id="rId2"/>
-    <p:sldMasterId id="2147483661" r:id="rId3"/>
+    <p:sldMasterId id="2147483648" r:id="rId1"/>
+    <p:sldMasterId id="2147483661" r:id="rId2"/>
   </p:sldMasterIdLst>
+  <p:notesMasterIdLst>
+    <p:notesMasterId r:id="rId16"/>
+  </p:notesMasterIdLst>
   <p:sldIdLst>
-    <p:sldId id="256" r:id="rId4"/>
-    <p:sldId id="257" r:id="rId5"/>
-    <p:sldId id="258" r:id="rId6"/>
-    <p:sldId id="259" r:id="rId7"/>
-    <p:sldId id="260" r:id="rId8"/>
-    <p:sldId id="261" r:id="rId9"/>
-    <p:sldId id="262" r:id="rId10"/>
+    <p:sldId id="256" r:id="rId3"/>
+    <p:sldId id="257" r:id="rId4"/>
+    <p:sldId id="258" r:id="rId5"/>
+    <p:sldId id="259" r:id="rId6"/>
+    <p:sldId id="260" r:id="rId7"/>
+    <p:sldId id="261" r:id="rId8"/>
+    <p:sldId id="262" r:id="rId9"/>
+    <p:sldId id="263" r:id="rId10"/>
+    <p:sldId id="264" r:id="rId11"/>
+    <p:sldId id="268" r:id="rId12"/>
+    <p:sldId id="265" r:id="rId13"/>
+    <p:sldId id="266" r:id="rId14"/>
+    <p:sldId id="267" r:id="rId15"/>
   </p:sldIdLst>
   <p:sldSz cx="12192000" cy="6858000"/>
   <p:notesSz cx="7559675" cy="10691813"/>
+  <p:defaultTextStyle>
+    <a:defPPr>
+      <a:defRPr lang="en-US"/>
+    </a:defPPr>
+    <a:lvl1pPr marL="0" algn="l" defTabSz="914400" rtl="0" eaLnBrk="1" latinLnBrk="0" hangingPunct="1">
+      <a:defRPr sz="1800" kern="1200">
+        <a:solidFill>
+          <a:schemeClr val="tx1"/>
+        </a:solidFill>
+        <a:latin typeface="+mn-lt"/>
+        <a:ea typeface="+mn-ea"/>
+        <a:cs typeface="+mn-cs"/>
+      </a:defRPr>
+    </a:lvl1pPr>
+    <a:lvl2pPr marL="457200" algn="l" defTabSz="914400" rtl="0" eaLnBrk="1" latinLnBrk="0" hangingPunct="1">
+      <a:defRPr sz="1800" kern="1200">
+        <a:solidFill>
+          <a:schemeClr val="tx1"/>
+        </a:solidFill>
+        <a:latin typeface="+mn-lt"/>
+        <a:ea typeface="+mn-ea"/>
+        <a:cs typeface="+mn-cs"/>
+      </a:defRPr>
+    </a:lvl2pPr>
+    <a:lvl3pPr marL="914400" algn="l" defTabSz="914400" rtl="0" eaLnBrk="1" latinLnBrk="0" hangingPunct="1">
+      <a:defRPr sz="1800" kern="1200">
+        <a:solidFill>
+          <a:schemeClr val="tx1"/>
+        </a:solidFill>
+        <a:latin typeface="+mn-lt"/>
+        <a:ea typeface="+mn-ea"/>
+        <a:cs typeface="+mn-cs"/>
+      </a:defRPr>
+    </a:lvl3pPr>
+    <a:lvl4pPr marL="1371600" algn="l" defTabSz="914400" rtl="0" eaLnBrk="1" latinLnBrk="0" hangingPunct="1">
+      <a:defRPr sz="1800" kern="1200">
+        <a:solidFill>
+          <a:schemeClr val="tx1"/>
+        </a:solidFill>
+        <a:latin typeface="+mn-lt"/>
+        <a:ea typeface="+mn-ea"/>
+        <a:cs typeface="+mn-cs"/>
+      </a:defRPr>
+    </a:lvl4pPr>
+    <a:lvl5pPr marL="1828800" algn="l" defTabSz="914400" rtl="0" eaLnBrk="1" latinLnBrk="0" hangingPunct="1">
+      <a:defRPr sz="1800" kern="1200">
+        <a:solidFill>
+          <a:schemeClr val="tx1"/>
+        </a:solidFill>
+        <a:latin typeface="+mn-lt"/>
+        <a:ea typeface="+mn-ea"/>
+        <a:cs typeface="+mn-cs"/>
+      </a:defRPr>
+    </a:lvl5pPr>
+    <a:lvl6pPr marL="2286000" algn="l" defTabSz="914400" rtl="0" eaLnBrk="1" latinLnBrk="0" hangingPunct="1">
+      <a:defRPr sz="1800" kern="1200">
+        <a:solidFill>
+          <a:schemeClr val="tx1"/>
+        </a:solidFill>
+        <a:latin typeface="+mn-lt"/>
+        <a:ea typeface="+mn-ea"/>
+        <a:cs typeface="+mn-cs"/>
+      </a:defRPr>
+    </a:lvl6pPr>
+    <a:lvl7pPr marL="2743200" algn="l" defTabSz="914400" rtl="0" eaLnBrk="1" latinLnBrk="0" hangingPunct="1">
+      <a:defRPr sz="1800" kern="1200">
+        <a:solidFill>
+          <a:schemeClr val="tx1"/>
+        </a:solidFill>
+        <a:latin typeface="+mn-lt"/>
+        <a:ea typeface="+mn-ea"/>
+        <a:cs typeface="+mn-cs"/>
+      </a:defRPr>
+    </a:lvl7pPr>
+    <a:lvl8pPr marL="3200400" algn="l" defTabSz="914400" rtl="0" eaLnBrk="1" latinLnBrk="0" hangingPunct="1">
+      <a:defRPr sz="1800" kern="1200">
+        <a:solidFill>
+          <a:schemeClr val="tx1"/>
+        </a:solidFill>
+        <a:latin typeface="+mn-lt"/>
+        <a:ea typeface="+mn-ea"/>
+        <a:cs typeface="+mn-cs"/>
+      </a:defRPr>
+    </a:lvl8pPr>
+    <a:lvl9pPr marL="3657600" algn="l" defTabSz="914400" rtl="0" eaLnBrk="1" latinLnBrk="0" hangingPunct="1">
+      <a:defRPr sz="1800" kern="1200">
+        <a:solidFill>
+          <a:schemeClr val="tx1"/>
+        </a:solidFill>
+        <a:latin typeface="+mn-lt"/>
+        <a:ea typeface="+mn-ea"/>
+        <a:cs typeface="+mn-cs"/>
+      </a:defRPr>
+    </a:lvl9pPr>
+  </p:defaultTextStyle>
 </p:presentation>
 </file>
 
+<file path=ppt/notesMasters/notesMaster1.xml><?xml version="1.0" encoding="utf-8"?>
+<p:notesMaster xmlns:a="http://schemas.openxmlformats.org/drawingml/2006/main" xmlns:r="http://schemas.openxmlformats.org/officeDocument/2006/relationships" xmlns:p="http://schemas.openxmlformats.org/presentationml/2006/main">
+  <p:cSld>
+    <p:bg>
+      <p:bgRef idx="1001">
+        <a:schemeClr val="bg1"/>
+      </p:bgRef>
+    </p:bg>
+    <p:spTree>
+      <p:nvGrpSpPr>
+        <p:cNvPr id="1" name=""/>
+        <p:cNvGrpSpPr/>
+        <p:nvPr/>
+      </p:nvGrpSpPr>
+      <p:grpSpPr>
+        <a:xfrm>
+          <a:off x="0" y="0"/>
+          <a:ext cx="0" cy="0"/>
+          <a:chOff x="0" y="0"/>
+          <a:chExt cx="0" cy="0"/>
+        </a:xfrm>
+      </p:grpSpPr>
+      <p:sp>
+        <p:nvSpPr>
+          <p:cNvPr id="2" name="Header Placeholder 1"/>
+          <p:cNvSpPr>
+            <a:spLocks noGrp="1"/>
+          </p:cNvSpPr>
+          <p:nvPr>
+            <p:ph type="hdr" sz="quarter"/>
+          </p:nvPr>
+        </p:nvSpPr>
+        <p:spPr>
+          <a:xfrm>
+            <a:off x="0" y="0"/>
+            <a:ext cx="3276600" cy="536575"/>
+          </a:xfrm>
+          <a:prstGeom prst="rect">
+            <a:avLst/>
+          </a:prstGeom>
+        </p:spPr>
+        <p:txBody>
+          <a:bodyPr vert="horz" lIns="91440" tIns="45720" rIns="91440" bIns="45720" rtlCol="0"/>
+          <a:lstStyle>
+            <a:lvl1pPr algn="l">
+              <a:defRPr sz="1200"/>
+            </a:lvl1pPr>
+          </a:lstStyle>
+          <a:p>
+            <a:endParaRPr lang="en-IN"/>
+          </a:p>
+        </p:txBody>
+      </p:sp>
+      <p:sp>
+        <p:nvSpPr>
+          <p:cNvPr id="3" name="Date Placeholder 2"/>
+          <p:cNvSpPr>
+            <a:spLocks noGrp="1"/>
+          </p:cNvSpPr>
+          <p:nvPr>
+            <p:ph type="dt" idx="1"/>
+          </p:nvPr>
+        </p:nvSpPr>
+        <p:spPr>
+          <a:xfrm>
+            <a:off x="4281488" y="0"/>
+            <a:ext cx="3276600" cy="536575"/>
+          </a:xfrm>
+          <a:prstGeom prst="rect">
+            <a:avLst/>
+          </a:prstGeom>
+        </p:spPr>
+        <p:txBody>
+          <a:bodyPr vert="horz" lIns="91440" tIns="45720" rIns="91440" bIns="45720" rtlCol="0"/>
+          <a:lstStyle>
+            <a:lvl1pPr algn="r">
+              <a:defRPr sz="1200"/>
+            </a:lvl1pPr>
+          </a:lstStyle>
+          <a:p>
+            <a:fld id="{2FB7F358-B218-4A13-8D16-02EB9C006E16}" type="datetimeFigureOut">
+              <a:rPr lang="en-IN" smtClean="0"/>
+              <a:t>11-12-2025</a:t>
+            </a:fld>
+            <a:endParaRPr lang="en-IN"/>
+          </a:p>
+        </p:txBody>
+      </p:sp>
+      <p:sp>
+        <p:nvSpPr>
+          <p:cNvPr id="4" name="Slide Image Placeholder 3"/>
+          <p:cNvSpPr>
+            <a:spLocks noGrp="1" noRot="1" noChangeAspect="1"/>
+          </p:cNvSpPr>
+          <p:nvPr>
+            <p:ph type="sldImg" idx="2"/>
+          </p:nvPr>
+        </p:nvSpPr>
+        <p:spPr>
+          <a:xfrm>
+            <a:off x="573088" y="1336675"/>
+            <a:ext cx="6413500" cy="3608388"/>
+          </a:xfrm>
+          <a:prstGeom prst="rect">
+            <a:avLst/>
+          </a:prstGeom>
+          <a:noFill/>
+          <a:ln w="12700">
+            <a:solidFill>
+              <a:prstClr val="black"/>
+            </a:solidFill>
+          </a:ln>
+        </p:spPr>
+        <p:txBody>
+          <a:bodyPr vert="horz" lIns="91440" tIns="45720" rIns="91440" bIns="45720" rtlCol="0" anchor="ctr"/>
+          <a:lstStyle/>
+          <a:p>
+            <a:endParaRPr lang="en-IN"/>
+          </a:p>
+        </p:txBody>
+      </p:sp>
+      <p:sp>
+        <p:nvSpPr>
+          <p:cNvPr id="5" name="Notes Placeholder 4"/>
+          <p:cNvSpPr>
+            <a:spLocks noGrp="1"/>
+          </p:cNvSpPr>
+          <p:nvPr>
+            <p:ph type="body" sz="quarter" idx="3"/>
+          </p:nvPr>
+        </p:nvSpPr>
+        <p:spPr>
+          <a:xfrm>
+            <a:off x="755650" y="5145088"/>
+            <a:ext cx="6048375" cy="4210050"/>
+          </a:xfrm>
+          <a:prstGeom prst="rect">
+            <a:avLst/>
+          </a:prstGeom>
+        </p:spPr>
+        <p:txBody>
+          <a:bodyPr vert="horz" lIns="91440" tIns="45720" rIns="91440" bIns="45720" rtlCol="0"/>
+          <a:lstStyle/>
+          <a:p>
+            <a:pPr lvl="0"/>
+            <a:r>
+              <a:rPr lang="en-US"/>
+              <a:t>Click to edit Master text styles</a:t>
+            </a:r>
+          </a:p>
+          <a:p>
+            <a:pPr lvl="1"/>
+            <a:r>
+              <a:rPr lang="en-US"/>
+              <a:t>Second level</a:t>
+            </a:r>
+          </a:p>
+          <a:p>
+            <a:pPr lvl="2"/>
+            <a:r>
+              <a:rPr lang="en-US"/>
+              <a:t>Third level</a:t>
+            </a:r>
+          </a:p>
+          <a:p>
+            <a:pPr lvl="3"/>
+            <a:r>
+              <a:rPr lang="en-US"/>
+              <a:t>Fourth level</a:t>
+            </a:r>
+          </a:p>
+          <a:p>
+            <a:pPr lvl="4"/>
+            <a:r>
+              <a:rPr lang="en-US"/>
+              <a:t>Fifth level</a:t>
+            </a:r>
+            <a:endParaRPr lang="en-IN"/>
+          </a:p>
+        </p:txBody>
+      </p:sp>
+      <p:sp>
+        <p:nvSpPr>
+          <p:cNvPr id="6" name="Footer Placeholder 5"/>
+          <p:cNvSpPr>
+            <a:spLocks noGrp="1"/>
+          </p:cNvSpPr>
+          <p:nvPr>
+            <p:ph type="ftr" sz="quarter" idx="4"/>
+          </p:nvPr>
+        </p:nvSpPr>
+        <p:spPr>
+          <a:xfrm>
+            <a:off x="0" y="10155238"/>
+            <a:ext cx="3276600" cy="536575"/>
+          </a:xfrm>
+          <a:prstGeom prst="rect">
+            <a:avLst/>
+          </a:prstGeom>
+        </p:spPr>
+        <p:txBody>
+          <a:bodyPr vert="horz" lIns="91440" tIns="45720" rIns="91440" bIns="45720" rtlCol="0" anchor="b"/>
+          <a:lstStyle>
+            <a:lvl1pPr algn="l">
+              <a:defRPr sz="1200"/>
+            </a:lvl1pPr>
+          </a:lstStyle>
+          <a:p>
+            <a:endParaRPr lang="en-IN"/>
+          </a:p>
+        </p:txBody>
+      </p:sp>
+      <p:sp>
+        <p:nvSpPr>
+          <p:cNvPr id="7" name="Slide Number Placeholder 6"/>
+          <p:cNvSpPr>
+            <a:spLocks noGrp="1"/>
+          </p:cNvSpPr>
+          <p:nvPr>
+            <p:ph type="sldNum" sz="quarter" idx="5"/>
+          </p:nvPr>
+        </p:nvSpPr>
+        <p:spPr>
+          <a:xfrm>
+            <a:off x="4281488" y="10155238"/>
+            <a:ext cx="3276600" cy="536575"/>
+          </a:xfrm>
+          <a:prstGeom prst="rect">
+            <a:avLst/>
+          </a:prstGeom>
+        </p:spPr>
+        <p:txBody>
+          <a:bodyPr vert="horz" lIns="91440" tIns="45720" rIns="91440" bIns="45720" rtlCol="0" anchor="b"/>
+          <a:lstStyle>
+            <a:lvl1pPr algn="r">
+              <a:defRPr sz="1200"/>
+            </a:lvl1pPr>
+          </a:lstStyle>
+          <a:p>
+            <a:fld id="{3370B2EB-05B8-40B2-AB6A-6DA96447B179}" type="slidenum">
+              <a:rPr lang="en-IN" smtClean="0"/>
+              <a:t>‹#›</a:t>
+            </a:fld>
+            <a:endParaRPr lang="en-IN"/>
+          </a:p>
+        </p:txBody>
+      </p:sp>
+    </p:spTree>
+    <p:extLst>
+      <p:ext uri="{BB962C8B-B14F-4D97-AF65-F5344CB8AC3E}">
+        <p14:creationId xmlns:p14="http://schemas.microsoft.com/office/powerpoint/2010/main" val="1693062070"/>
+      </p:ext>
+    </p:extLst>
+  </p:cSld>
+  <p:clrMap bg1="lt1" tx1="dk1" bg2="lt2" tx2="dk2" accent1="accent1" accent2="accent2" accent3="accent3" accent4="accent4" accent5="accent5" accent6="accent6" hlink="hlink" folHlink="folHlink"/>
+  <p:notesStyle>
+    <a:lvl1pPr marL="0" algn="l" defTabSz="914400" rtl="0" eaLnBrk="1" latinLnBrk="0" hangingPunct="1">
+      <a:defRPr sz="1200" kern="1200">
+        <a:solidFill>
+          <a:schemeClr val="tx1"/>
+        </a:solidFill>
+        <a:latin typeface="+mn-lt"/>
+        <a:ea typeface="+mn-ea"/>
+        <a:cs typeface="+mn-cs"/>
+      </a:defRPr>
+    </a:lvl1pPr>
+    <a:lvl2pPr marL="457200" algn="l" defTabSz="914400" rtl="0" eaLnBrk="1" latinLnBrk="0" hangingPunct="1">
+      <a:defRPr sz="1200" kern="1200">
+        <a:solidFill>
+          <a:schemeClr val="tx1"/>
+        </a:solidFill>
+        <a:latin typeface="+mn-lt"/>
+        <a:ea typeface="+mn-ea"/>
+        <a:cs typeface="+mn-cs"/>
+      </a:defRPr>
+    </a:lvl2pPr>
+    <a:lvl3pPr marL="914400" algn="l" defTabSz="914400" rtl="0" eaLnBrk="1" latinLnBrk="0" hangingPunct="1">
+      <a:defRPr sz="1200" kern="1200">
+        <a:solidFill>
+          <a:schemeClr val="tx1"/>
+        </a:solidFill>
+        <a:latin typeface="+mn-lt"/>
+        <a:ea typeface="+mn-ea"/>
+        <a:cs typeface="+mn-cs"/>
+      </a:defRPr>
+    </a:lvl3pPr>
+    <a:lvl4pPr marL="1371600" algn="l" defTabSz="914400" rtl="0" eaLnBrk="1" latinLnBrk="0" hangingPunct="1">
+      <a:defRPr sz="1200" kern="1200">
+        <a:solidFill>
+          <a:schemeClr val="tx1"/>
+        </a:solidFill>
+        <a:latin typeface="+mn-lt"/>
+        <a:ea typeface="+mn-ea"/>
+        <a:cs typeface="+mn-cs"/>
+      </a:defRPr>
+    </a:lvl4pPr>
+    <a:lvl5pPr marL="1828800" algn="l" defTabSz="914400" rtl="0" eaLnBrk="1" latinLnBrk="0" hangingPunct="1">
+      <a:defRPr sz="1200" kern="1200">
+        <a:solidFill>
+          <a:schemeClr val="tx1"/>
+        </a:solidFill>
+        <a:latin typeface="+mn-lt"/>
+        <a:ea typeface="+mn-ea"/>
+        <a:cs typeface="+mn-cs"/>
+      </a:defRPr>
+    </a:lvl5pPr>
+    <a:lvl6pPr marL="2286000" algn="l" defTabSz="914400" rtl="0" eaLnBrk="1" latinLnBrk="0" hangingPunct="1">
+      <a:defRPr sz="1200" kern="1200">
+        <a:solidFill>
+          <a:schemeClr val="tx1"/>
+        </a:solidFill>
+        <a:latin typeface="+mn-lt"/>
+        <a:ea typeface="+mn-ea"/>
+        <a:cs typeface="+mn-cs"/>
+      </a:defRPr>
+    </a:lvl6pPr>
+    <a:lvl7pPr marL="2743200" algn="l" defTabSz="914400" rtl="0" eaLnBrk="1" latinLnBrk="0" hangingPunct="1">
+      <a:defRPr sz="1200" kern="1200">
+        <a:solidFill>
+          <a:schemeClr val="tx1"/>
+        </a:solidFill>
+        <a:latin typeface="+mn-lt"/>
+        <a:ea typeface="+mn-ea"/>
+        <a:cs typeface="+mn-cs"/>
+      </a:defRPr>
+    </a:lvl7pPr>
+    <a:lvl8pPr marL="3200400" algn="l" defTabSz="914400" rtl="0" eaLnBrk="1" latinLnBrk="0" hangingPunct="1">
+      <a:defRPr sz="1200" kern="1200">
+        <a:solidFill>
+          <a:schemeClr val="tx1"/>
+        </a:solidFill>
+        <a:latin typeface="+mn-lt"/>
+        <a:ea typeface="+mn-ea"/>
+        <a:cs typeface="+mn-cs"/>
+      </a:defRPr>
+    </a:lvl8pPr>
+    <a:lvl9pPr marL="3657600" algn="l" defTabSz="914400" rtl="0" eaLnBrk="1" latinLnBrk="0" hangingPunct="1">
+      <a:defRPr sz="1200" kern="1200">
+        <a:solidFill>
+          <a:schemeClr val="tx1"/>
+        </a:solidFill>
+        <a:latin typeface="+mn-lt"/>
+        <a:ea typeface="+mn-ea"/>
+        <a:cs typeface="+mn-cs"/>
+      </a:defRPr>
+    </a:lvl9pPr>
+  </p:notesStyle>
+</p:notesMaster>
+</file>
+
+<file path=ppt/notesSlides/notesSlide1.xml><?xml version="1.0" encoding="utf-8"?>
+<p:notes xmlns:a="http://schemas.openxmlformats.org/drawingml/2006/main" xmlns:r="http://schemas.openxmlformats.org/officeDocument/2006/relationships" xmlns:p="http://schemas.openxmlformats.org/presentationml/2006/main">
+  <p:cSld>
+    <p:spTree>
+      <p:nvGrpSpPr>
+        <p:cNvPr id="1" name=""/>
+        <p:cNvGrpSpPr/>
+        <p:nvPr/>
+      </p:nvGrpSpPr>
+      <p:grpSpPr>
+        <a:xfrm>
+          <a:off x="0" y="0"/>
+          <a:ext cx="0" cy="0"/>
+          <a:chOff x="0" y="0"/>
+          <a:chExt cx="0" cy="0"/>
+        </a:xfrm>
+      </p:grpSpPr>
+      <p:sp>
+        <p:nvSpPr>
+          <p:cNvPr id="2" name="Slide Image Placeholder 1"/>
+          <p:cNvSpPr>
+            <a:spLocks noGrp="1" noRot="1" noChangeAspect="1"/>
+          </p:cNvSpPr>
+          <p:nvPr>
+            <p:ph type="sldImg"/>
+          </p:nvPr>
+        </p:nvSpPr>
+        <p:spPr/>
+      </p:sp>
+      <p:sp>
+        <p:nvSpPr>
+          <p:cNvPr id="3" name="Notes Placeholder 2"/>
+          <p:cNvSpPr>
+            <a:spLocks noGrp="1"/>
+          </p:cNvSpPr>
+          <p:nvPr>
+            <p:ph type="body" idx="1"/>
+          </p:nvPr>
+        </p:nvSpPr>
+        <p:spPr/>
+        <p:txBody>
+          <a:bodyPr/>
+          <a:lstStyle/>
+          <a:p>
+            <a:endParaRPr lang="en-IN" dirty="0"/>
+          </a:p>
+        </p:txBody>
+      </p:sp>
+      <p:sp>
+        <p:nvSpPr>
+          <p:cNvPr id="4" name="Slide Number Placeholder 3"/>
+          <p:cNvSpPr>
+            <a:spLocks noGrp="1"/>
+          </p:cNvSpPr>
+          <p:nvPr>
+            <p:ph type="sldNum" sz="quarter" idx="5"/>
+          </p:nvPr>
+        </p:nvSpPr>
+        <p:spPr/>
+        <p:txBody>
+          <a:bodyPr/>
+          <a:lstStyle/>
+          <a:p>
+            <a:fld id="{3370B2EB-05B8-40B2-AB6A-6DA96447B179}" type="slidenum">
+              <a:rPr lang="en-IN" smtClean="0"/>
+              <a:t>8</a:t>
+            </a:fld>
+            <a:endParaRPr lang="en-IN"/>
+          </a:p>
+        </p:txBody>
+      </p:sp>
+    </p:spTree>
+    <p:extLst>
+      <p:ext uri="{BB962C8B-B14F-4D97-AF65-F5344CB8AC3E}">
+        <p14:creationId xmlns:p14="http://schemas.microsoft.com/office/powerpoint/2010/main" val="366818242"/>
+      </p:ext>
+    </p:extLst>
+  </p:cSld>
+  <p:clrMapOvr>
+    <a:masterClrMapping/>
+  </p:clrMapOvr>
+</p:notes>
+</file>
+
+<file path=ppt/notesSlides/notesSlide2.xml><?xml version="1.0" encoding="utf-8"?>
+<p:notes xmlns:a="http://schemas.openxmlformats.org/drawingml/2006/main" xmlns:r="http://schemas.openxmlformats.org/officeDocument/2006/relationships" xmlns:p="http://schemas.openxmlformats.org/presentationml/2006/main">
+  <p:cSld>
+    <p:spTree>
+      <p:nvGrpSpPr>
+        <p:cNvPr id="1" name="">
+          <a:extLst>
+            <a:ext uri="{FF2B5EF4-FFF2-40B4-BE49-F238E27FC236}">
+              <a16:creationId xmlns:a16="http://schemas.microsoft.com/office/drawing/2014/main" id="{448028E1-F19A-3291-9CCD-3DCB7D32A0CC}"/>
+            </a:ext>
+          </a:extLst>
+        </p:cNvPr>
+        <p:cNvGrpSpPr/>
+        <p:nvPr/>
+      </p:nvGrpSpPr>
+      <p:grpSpPr>
+        <a:xfrm>
+          <a:off x="0" y="0"/>
+          <a:ext cx="0" cy="0"/>
+          <a:chOff x="0" y="0"/>
+          <a:chExt cx="0" cy="0"/>
+        </a:xfrm>
+      </p:grpSpPr>
+      <p:sp>
+        <p:nvSpPr>
+          <p:cNvPr id="2" name="Slide Image Placeholder 1">
+            <a:extLst>
+              <a:ext uri="{FF2B5EF4-FFF2-40B4-BE49-F238E27FC236}">
+                <a16:creationId xmlns:a16="http://schemas.microsoft.com/office/drawing/2014/main" id="{D61BE87E-C1D1-CF51-E1A0-E02272DDE398}"/>
+              </a:ext>
+            </a:extLst>
+          </p:cNvPr>
+          <p:cNvSpPr>
+            <a:spLocks noGrp="1" noRot="1" noChangeAspect="1"/>
+          </p:cNvSpPr>
+          <p:nvPr>
+            <p:ph type="sldImg"/>
+          </p:nvPr>
+        </p:nvSpPr>
+        <p:spPr/>
+      </p:sp>
+      <p:sp>
+        <p:nvSpPr>
+          <p:cNvPr id="3" name="Notes Placeholder 2">
+            <a:extLst>
+              <a:ext uri="{FF2B5EF4-FFF2-40B4-BE49-F238E27FC236}">
+                <a16:creationId xmlns:a16="http://schemas.microsoft.com/office/drawing/2014/main" id="{0B83F323-BF99-0EDA-51B9-F5C7EBEEAC26}"/>
+              </a:ext>
+            </a:extLst>
+          </p:cNvPr>
+          <p:cNvSpPr>
+            <a:spLocks noGrp="1"/>
+          </p:cNvSpPr>
+          <p:nvPr>
+            <p:ph type="body" idx="1"/>
+          </p:nvPr>
+        </p:nvSpPr>
+        <p:spPr/>
+        <p:txBody>
+          <a:bodyPr/>
+          <a:lstStyle/>
+          <a:p>
+            <a:endParaRPr lang="en-IN" dirty="0"/>
+          </a:p>
+        </p:txBody>
+      </p:sp>
+      <p:sp>
+        <p:nvSpPr>
+          <p:cNvPr id="4" name="Slide Number Placeholder 3">
+            <a:extLst>
+              <a:ext uri="{FF2B5EF4-FFF2-40B4-BE49-F238E27FC236}">
+                <a16:creationId xmlns:a16="http://schemas.microsoft.com/office/drawing/2014/main" id="{678AB17D-8AFC-B7CB-2472-455EF99F0872}"/>
+              </a:ext>
+            </a:extLst>
+          </p:cNvPr>
+          <p:cNvSpPr>
+            <a:spLocks noGrp="1"/>
+          </p:cNvSpPr>
+          <p:nvPr>
+            <p:ph type="sldNum" sz="quarter" idx="5"/>
+          </p:nvPr>
+        </p:nvSpPr>
+        <p:spPr/>
+        <p:txBody>
+          <a:bodyPr/>
+          <a:lstStyle/>
+          <a:p>
+            <a:fld id="{3370B2EB-05B8-40B2-AB6A-6DA96447B179}" type="slidenum">
+              <a:rPr lang="en-IN" smtClean="0"/>
+              <a:t>9</a:t>
+            </a:fld>
+            <a:endParaRPr lang="en-IN"/>
+          </a:p>
+        </p:txBody>
+      </p:sp>
+    </p:spTree>
+    <p:extLst>
+      <p:ext uri="{BB962C8B-B14F-4D97-AF65-F5344CB8AC3E}">
+        <p14:creationId xmlns:p14="http://schemas.microsoft.com/office/powerpoint/2010/main" val="1590222570"/>
+      </p:ext>
+    </p:extLst>
+  </p:cSld>
+  <p:clrMapOvr>
+    <a:masterClrMapping/>
+  </p:clrMapOvr>
+</p:notes>
+</file>
+
+<file path=ppt/notesSlides/notesSlide3.xml><?xml version="1.0" encoding="utf-8"?>
+<p:notes xmlns:a="http://schemas.openxmlformats.org/drawingml/2006/main" xmlns:r="http://schemas.openxmlformats.org/officeDocument/2006/relationships" xmlns:p="http://schemas.openxmlformats.org/presentationml/2006/main">
+  <p:cSld>
+    <p:spTree>
+      <p:nvGrpSpPr>
+        <p:cNvPr id="1" name="">
+          <a:extLst>
+            <a:ext uri="{FF2B5EF4-FFF2-40B4-BE49-F238E27FC236}">
+              <a16:creationId xmlns:a16="http://schemas.microsoft.com/office/drawing/2014/main" id="{0EE88E43-BB3C-EDC3-186E-B2DCB9872602}"/>
+            </a:ext>
+          </a:extLst>
+        </p:cNvPr>
+        <p:cNvGrpSpPr/>
+        <p:nvPr/>
+      </p:nvGrpSpPr>
+      <p:grpSpPr>
+        <a:xfrm>
+          <a:off x="0" y="0"/>
+          <a:ext cx="0" cy="0"/>
+          <a:chOff x="0" y="0"/>
+          <a:chExt cx="0" cy="0"/>
+        </a:xfrm>
+      </p:grpSpPr>
+      <p:sp>
+        <p:nvSpPr>
+          <p:cNvPr id="2" name="Slide Image Placeholder 1">
+            <a:extLst>
+              <a:ext uri="{FF2B5EF4-FFF2-40B4-BE49-F238E27FC236}">
+                <a16:creationId xmlns:a16="http://schemas.microsoft.com/office/drawing/2014/main" id="{33FC359A-14CD-3898-3A01-55EC7E052C56}"/>
+              </a:ext>
+            </a:extLst>
+          </p:cNvPr>
+          <p:cNvSpPr>
+            <a:spLocks noGrp="1" noRot="1" noChangeAspect="1"/>
+          </p:cNvSpPr>
+          <p:nvPr>
+            <p:ph type="sldImg"/>
+          </p:nvPr>
+        </p:nvSpPr>
+        <p:spPr/>
+      </p:sp>
+      <p:sp>
+        <p:nvSpPr>
+          <p:cNvPr id="3" name="Notes Placeholder 2">
+            <a:extLst>
+              <a:ext uri="{FF2B5EF4-FFF2-40B4-BE49-F238E27FC236}">
+                <a16:creationId xmlns:a16="http://schemas.microsoft.com/office/drawing/2014/main" id="{DF102DFA-9D12-EA72-A857-D8E0D55BC2D3}"/>
+              </a:ext>
+            </a:extLst>
+          </p:cNvPr>
+          <p:cNvSpPr>
+            <a:spLocks noGrp="1"/>
+          </p:cNvSpPr>
+          <p:nvPr>
+            <p:ph type="body" idx="1"/>
+          </p:nvPr>
+        </p:nvSpPr>
+        <p:spPr/>
+        <p:txBody>
+          <a:bodyPr/>
+          <a:lstStyle/>
+          <a:p>
+            <a:endParaRPr lang="en-IN" dirty="0"/>
+          </a:p>
+        </p:txBody>
+      </p:sp>
+      <p:sp>
+        <p:nvSpPr>
+          <p:cNvPr id="4" name="Slide Number Placeholder 3">
+            <a:extLst>
+              <a:ext uri="{FF2B5EF4-FFF2-40B4-BE49-F238E27FC236}">
+                <a16:creationId xmlns:a16="http://schemas.microsoft.com/office/drawing/2014/main" id="{15E8D9EE-0126-FC9C-9F4D-5CF838FC6BD2}"/>
+              </a:ext>
+            </a:extLst>
+          </p:cNvPr>
+          <p:cNvSpPr>
+            <a:spLocks noGrp="1"/>
+          </p:cNvSpPr>
+          <p:nvPr>
+            <p:ph type="sldNum" sz="quarter" idx="5"/>
+          </p:nvPr>
+        </p:nvSpPr>
+        <p:spPr/>
+        <p:txBody>
+          <a:bodyPr/>
+          <a:lstStyle/>
+          <a:p>
+            <a:fld id="{3370B2EB-05B8-40B2-AB6A-6DA96447B179}" type="slidenum">
+              <a:rPr lang="en-IN" smtClean="0"/>
+              <a:t>10</a:t>
+            </a:fld>
+            <a:endParaRPr lang="en-IN"/>
+          </a:p>
+        </p:txBody>
+      </p:sp>
+    </p:spTree>
+    <p:extLst>
+      <p:ext uri="{BB962C8B-B14F-4D97-AF65-F5344CB8AC3E}">
+        <p14:creationId xmlns:p14="http://schemas.microsoft.com/office/powerpoint/2010/main" val="4274510311"/>
+      </p:ext>
+    </p:extLst>
+  </p:cSld>
+  <p:clrMapOvr>
+    <a:masterClrMapping/>
+  </p:clrMapOvr>
+</p:notes>
+</file>
+
+<file path=ppt/notesSlides/notesSlide4.xml><?xml version="1.0" encoding="utf-8"?>
+<p:notes xmlns:a="http://schemas.openxmlformats.org/drawingml/2006/main" xmlns:r="http://schemas.openxmlformats.org/officeDocument/2006/relationships" xmlns:p="http://schemas.openxmlformats.org/presentationml/2006/main">
+  <p:cSld>
+    <p:spTree>
+      <p:nvGrpSpPr>
+        <p:cNvPr id="1" name="">
+          <a:extLst>
+            <a:ext uri="{FF2B5EF4-FFF2-40B4-BE49-F238E27FC236}">
+              <a16:creationId xmlns:a16="http://schemas.microsoft.com/office/drawing/2014/main" id="{446FAFBF-2FEB-54A0-D6EB-FD24350C377C}"/>
+            </a:ext>
+          </a:extLst>
+        </p:cNvPr>
+        <p:cNvGrpSpPr/>
+        <p:nvPr/>
+      </p:nvGrpSpPr>
+      <p:grpSpPr>
+        <a:xfrm>
+          <a:off x="0" y="0"/>
+          <a:ext cx="0" cy="0"/>
+          <a:chOff x="0" y="0"/>
+          <a:chExt cx="0" cy="0"/>
+        </a:xfrm>
+      </p:grpSpPr>
+      <p:sp>
+        <p:nvSpPr>
+          <p:cNvPr id="2" name="Slide Image Placeholder 1">
+            <a:extLst>
+              <a:ext uri="{FF2B5EF4-FFF2-40B4-BE49-F238E27FC236}">
+                <a16:creationId xmlns:a16="http://schemas.microsoft.com/office/drawing/2014/main" id="{AFEAD510-0BAC-E1DD-CE5E-336FE5800D29}"/>
+              </a:ext>
+            </a:extLst>
+          </p:cNvPr>
+          <p:cNvSpPr>
+            <a:spLocks noGrp="1" noRot="1" noChangeAspect="1"/>
+          </p:cNvSpPr>
+          <p:nvPr>
+            <p:ph type="sldImg"/>
+          </p:nvPr>
+        </p:nvSpPr>
+        <p:spPr/>
+      </p:sp>
+      <p:sp>
+        <p:nvSpPr>
+          <p:cNvPr id="3" name="Notes Placeholder 2">
+            <a:extLst>
+              <a:ext uri="{FF2B5EF4-FFF2-40B4-BE49-F238E27FC236}">
+                <a16:creationId xmlns:a16="http://schemas.microsoft.com/office/drawing/2014/main" id="{08BE7524-B82C-FB43-EC2A-292A22339C48}"/>
+              </a:ext>
+            </a:extLst>
+          </p:cNvPr>
+          <p:cNvSpPr>
+            <a:spLocks noGrp="1"/>
+          </p:cNvSpPr>
+          <p:nvPr>
+            <p:ph type="body" idx="1"/>
+          </p:nvPr>
+        </p:nvSpPr>
+        <p:spPr/>
+        <p:txBody>
+          <a:bodyPr/>
+          <a:lstStyle/>
+          <a:p>
+            <a:endParaRPr lang="en-IN" dirty="0"/>
+          </a:p>
+        </p:txBody>
+      </p:sp>
+      <p:sp>
+        <p:nvSpPr>
+          <p:cNvPr id="4" name="Slide Number Placeholder 3">
+            <a:extLst>
+              <a:ext uri="{FF2B5EF4-FFF2-40B4-BE49-F238E27FC236}">
+                <a16:creationId xmlns:a16="http://schemas.microsoft.com/office/drawing/2014/main" id="{6FCA5E68-63B9-DC46-8244-F082C0FFD064}"/>
+              </a:ext>
+            </a:extLst>
+          </p:cNvPr>
+          <p:cNvSpPr>
+            <a:spLocks noGrp="1"/>
+          </p:cNvSpPr>
+          <p:nvPr>
+            <p:ph type="sldNum" sz="quarter" idx="5"/>
+          </p:nvPr>
+        </p:nvSpPr>
+        <p:spPr/>
+        <p:txBody>
+          <a:bodyPr/>
+          <a:lstStyle/>
+          <a:p>
+            <a:fld id="{3370B2EB-05B8-40B2-AB6A-6DA96447B179}" type="slidenum">
+              <a:rPr lang="en-IN" smtClean="0"/>
+              <a:t>11</a:t>
+            </a:fld>
+            <a:endParaRPr lang="en-IN"/>
+          </a:p>
+        </p:txBody>
+      </p:sp>
+    </p:spTree>
+    <p:extLst>
+      <p:ext uri="{BB962C8B-B14F-4D97-AF65-F5344CB8AC3E}">
+        <p14:creationId xmlns:p14="http://schemas.microsoft.com/office/powerpoint/2010/main" val="4212042444"/>
+      </p:ext>
+    </p:extLst>
+  </p:cSld>
+  <p:clrMapOvr>
+    <a:masterClrMapping/>
+  </p:clrMapOvr>
+</p:notes>
+</file>
+
+<file path=ppt/notesSlides/notesSlide5.xml><?xml version="1.0" encoding="utf-8"?>
+<p:notes xmlns:a="http://schemas.openxmlformats.org/drawingml/2006/main" xmlns:r="http://schemas.openxmlformats.org/officeDocument/2006/relationships" xmlns:p="http://schemas.openxmlformats.org/presentationml/2006/main">
+  <p:cSld>
+    <p:spTree>
+      <p:nvGrpSpPr>
+        <p:cNvPr id="1" name="">
+          <a:extLst>
+            <a:ext uri="{FF2B5EF4-FFF2-40B4-BE49-F238E27FC236}">
+              <a16:creationId xmlns:a16="http://schemas.microsoft.com/office/drawing/2014/main" id="{B86DD6F4-870B-91B6-404C-02E2AED5D254}"/>
+            </a:ext>
+          </a:extLst>
+        </p:cNvPr>
+        <p:cNvGrpSpPr/>
+        <p:nvPr/>
+      </p:nvGrpSpPr>
+      <p:grpSpPr>
+        <a:xfrm>
+          <a:off x="0" y="0"/>
+          <a:ext cx="0" cy="0"/>
+          <a:chOff x="0" y="0"/>
+          <a:chExt cx="0" cy="0"/>
+        </a:xfrm>
+      </p:grpSpPr>
+      <p:sp>
+        <p:nvSpPr>
+          <p:cNvPr id="2" name="Slide Image Placeholder 1">
+            <a:extLst>
+              <a:ext uri="{FF2B5EF4-FFF2-40B4-BE49-F238E27FC236}">
+                <a16:creationId xmlns:a16="http://schemas.microsoft.com/office/drawing/2014/main" id="{FF2D2D29-302F-AD49-58A9-1081557A2E76}"/>
+              </a:ext>
+            </a:extLst>
+          </p:cNvPr>
+          <p:cNvSpPr>
+            <a:spLocks noGrp="1" noRot="1" noChangeAspect="1"/>
+          </p:cNvSpPr>
+          <p:nvPr>
+            <p:ph type="sldImg"/>
+          </p:nvPr>
+        </p:nvSpPr>
+        <p:spPr/>
+      </p:sp>
+      <p:sp>
+        <p:nvSpPr>
+          <p:cNvPr id="3" name="Notes Placeholder 2">
+            <a:extLst>
+              <a:ext uri="{FF2B5EF4-FFF2-40B4-BE49-F238E27FC236}">
+                <a16:creationId xmlns:a16="http://schemas.microsoft.com/office/drawing/2014/main" id="{D007A4EE-3D31-6887-6C5D-A12726679484}"/>
+              </a:ext>
+            </a:extLst>
+          </p:cNvPr>
+          <p:cNvSpPr>
+            <a:spLocks noGrp="1"/>
+          </p:cNvSpPr>
+          <p:nvPr>
+            <p:ph type="body" idx="1"/>
+          </p:nvPr>
+        </p:nvSpPr>
+        <p:spPr/>
+        <p:txBody>
+          <a:bodyPr/>
+          <a:lstStyle/>
+          <a:p>
+            <a:endParaRPr lang="en-IN" dirty="0"/>
+          </a:p>
+        </p:txBody>
+      </p:sp>
+      <p:sp>
+        <p:nvSpPr>
+          <p:cNvPr id="4" name="Slide Number Placeholder 3">
+            <a:extLst>
+              <a:ext uri="{FF2B5EF4-FFF2-40B4-BE49-F238E27FC236}">
+                <a16:creationId xmlns:a16="http://schemas.microsoft.com/office/drawing/2014/main" id="{BCC672DF-C3BF-1DCA-2E4B-557202C9E4B9}"/>
+              </a:ext>
+            </a:extLst>
+          </p:cNvPr>
+          <p:cNvSpPr>
+            <a:spLocks noGrp="1"/>
+          </p:cNvSpPr>
+          <p:nvPr>
+            <p:ph type="sldNum" sz="quarter" idx="5"/>
+          </p:nvPr>
+        </p:nvSpPr>
+        <p:spPr/>
+        <p:txBody>
+          <a:bodyPr/>
+          <a:lstStyle/>
+          <a:p>
+            <a:fld id="{3370B2EB-05B8-40B2-AB6A-6DA96447B179}" type="slidenum">
+              <a:rPr lang="en-IN" smtClean="0"/>
+              <a:t>12</a:t>
+            </a:fld>
+            <a:endParaRPr lang="en-IN"/>
+          </a:p>
+        </p:txBody>
+      </p:sp>
+    </p:spTree>
+    <p:extLst>
+      <p:ext uri="{BB962C8B-B14F-4D97-AF65-F5344CB8AC3E}">
+        <p14:creationId xmlns:p14="http://schemas.microsoft.com/office/powerpoint/2010/main" val="825401209"/>
+      </p:ext>
+    </p:extLst>
+  </p:cSld>
+  <p:clrMapOvr>
+    <a:masterClrMapping/>
+  </p:clrMapOvr>
+</p:notes>
+</file>
+
+<file path=ppt/notesSlides/notesSlide6.xml><?xml version="1.0" encoding="utf-8"?>
+<p:notes xmlns:a="http://schemas.openxmlformats.org/drawingml/2006/main" xmlns:r="http://schemas.openxmlformats.org/officeDocument/2006/relationships" xmlns:p="http://schemas.openxmlformats.org/presentationml/2006/main">
+  <p:cSld>
+    <p:spTree>
+      <p:nvGrpSpPr>
+        <p:cNvPr id="1" name="">
+          <a:extLst>
+            <a:ext uri="{FF2B5EF4-FFF2-40B4-BE49-F238E27FC236}">
+              <a16:creationId xmlns:a16="http://schemas.microsoft.com/office/drawing/2014/main" id="{1335369D-2E54-3278-C10D-CA739C227D94}"/>
+            </a:ext>
+          </a:extLst>
+        </p:cNvPr>
+        <p:cNvGrpSpPr/>
+        <p:nvPr/>
+      </p:nvGrpSpPr>
+      <p:grpSpPr>
+        <a:xfrm>
+          <a:off x="0" y="0"/>
+          <a:ext cx="0" cy="0"/>
+          <a:chOff x="0" y="0"/>
+          <a:chExt cx="0" cy="0"/>
+        </a:xfrm>
+      </p:grpSpPr>
+      <p:sp>
+        <p:nvSpPr>
+          <p:cNvPr id="2" name="Slide Image Placeholder 1">
+            <a:extLst>
+              <a:ext uri="{FF2B5EF4-FFF2-40B4-BE49-F238E27FC236}">
+                <a16:creationId xmlns:a16="http://schemas.microsoft.com/office/drawing/2014/main" id="{E4D7B1C3-2813-37EF-0F47-8BCB1A3444E6}"/>
+              </a:ext>
+            </a:extLst>
+          </p:cNvPr>
+          <p:cNvSpPr>
+            <a:spLocks noGrp="1" noRot="1" noChangeAspect="1"/>
+          </p:cNvSpPr>
+          <p:nvPr>
+            <p:ph type="sldImg"/>
+          </p:nvPr>
+        </p:nvSpPr>
+        <p:spPr/>
+      </p:sp>
+      <p:sp>
+        <p:nvSpPr>
+          <p:cNvPr id="3" name="Notes Placeholder 2">
+            <a:extLst>
+              <a:ext uri="{FF2B5EF4-FFF2-40B4-BE49-F238E27FC236}">
+                <a16:creationId xmlns:a16="http://schemas.microsoft.com/office/drawing/2014/main" id="{099DFE68-AC40-71BA-1927-8A85B0ECF99E}"/>
+              </a:ext>
+            </a:extLst>
+          </p:cNvPr>
+          <p:cNvSpPr>
+            <a:spLocks noGrp="1"/>
+          </p:cNvSpPr>
+          <p:nvPr>
+            <p:ph type="body" idx="1"/>
+          </p:nvPr>
+        </p:nvSpPr>
+        <p:spPr/>
+        <p:txBody>
+          <a:bodyPr/>
+          <a:lstStyle/>
+          <a:p>
+            <a:endParaRPr lang="en-IN" dirty="0"/>
+          </a:p>
+        </p:txBody>
+      </p:sp>
+      <p:sp>
+        <p:nvSpPr>
+          <p:cNvPr id="4" name="Slide Number Placeholder 3">
+            <a:extLst>
+              <a:ext uri="{FF2B5EF4-FFF2-40B4-BE49-F238E27FC236}">
+                <a16:creationId xmlns:a16="http://schemas.microsoft.com/office/drawing/2014/main" id="{9EB18E8D-6F50-721A-7565-C46EF9B68306}"/>
+              </a:ext>
+            </a:extLst>
+          </p:cNvPr>
+          <p:cNvSpPr>
+            <a:spLocks noGrp="1"/>
+          </p:cNvSpPr>
+          <p:nvPr>
+            <p:ph type="sldNum" sz="quarter" idx="5"/>
+          </p:nvPr>
+        </p:nvSpPr>
+        <p:spPr/>
+        <p:txBody>
+          <a:bodyPr/>
+          <a:lstStyle/>
+          <a:p>
+            <a:fld id="{3370B2EB-05B8-40B2-AB6A-6DA96447B179}" type="slidenum">
+              <a:rPr lang="en-IN" smtClean="0"/>
+              <a:t>13</a:t>
+            </a:fld>
+            <a:endParaRPr lang="en-IN"/>
+          </a:p>
+        </p:txBody>
+      </p:sp>
+    </p:spTree>
+    <p:extLst>
+      <p:ext uri="{BB962C8B-B14F-4D97-AF65-F5344CB8AC3E}">
+        <p14:creationId xmlns:p14="http://schemas.microsoft.com/office/powerpoint/2010/main" val="1708430113"/>
+      </p:ext>
+    </p:extLst>
+  </p:cSld>
+  <p:clrMapOvr>
+    <a:masterClrMapping/>
+  </p:clrMapOvr>
+</p:notes>
+</file>
+
 <file path=ppt/slideLayouts/slideLayout1.xml><?xml version="1.0" encoding="utf-8"?>
-<p:sldLayout xmlns:a="http://schemas.openxmlformats.org/drawingml/2006/main" xmlns:p="http://schemas.openxmlformats.org/presentationml/2006/main" xmlns:r="http://schemas.openxmlformats.org/officeDocument/2006/relationships" xmlns:p14="http://schemas.microsoft.com/office/powerpoint/2010/main" xmlns:p15="http://schemas.microsoft.com/office/powerpoint/2012/main" xmlns:mc="http://schemas.openxmlformats.org/markup-compatibility/2006" type="blank" preserve="1">
+<p:sldLayout xmlns:a="http://schemas.openxmlformats.org/drawingml/2006/main" xmlns:r="http://schemas.openxmlformats.org/officeDocument/2006/relationships" xmlns:p="http://schemas.openxmlformats.org/presentationml/2006/main" type="blank" preserve="1">
   <p:cSld name="Blank Slide">
     <p:spTree>
       <p:nvGrpSpPr>
@@ -49,6 +1127,7 @@
         <p:spPr/>
         <p:txBody>
           <a:bodyPr/>
+          <a:lstStyle/>
           <a:p>
             <a:r>
               <a:t>Footer</a:t>
@@ -69,10 +1148,12 @@
         <p:spPr/>
         <p:txBody>
           <a:bodyPr/>
+          <a:lstStyle/>
           <a:p>
             <a:fld id="{152DC99A-1A72-4A18-BE85-CC6D954C8A6A}" type="slidenum">
-              <a:t>&lt;#&gt;</a:t>
+              <a:t>‹#›</a:t>
             </a:fld>
+            <a:endParaRPr/>
           </a:p>
         </p:txBody>
       </p:sp>
@@ -89,21 +1170,22 @@
         <p:spPr/>
         <p:txBody>
           <a:bodyPr/>
-          <a:p>
-            <a:r>
-              <a:rPr lang="en-IN"/>
-              <a:t/>
-            </a:r>
+          <a:lstStyle/>
+          <a:p>
+            <a:endParaRPr/>
           </a:p>
         </p:txBody>
       </p:sp>
     </p:spTree>
   </p:cSld>
+  <p:clrMapOvr>
+    <a:masterClrMapping/>
+  </p:clrMapOvr>
 </p:sldLayout>
 </file>
 
 <file path=ppt/slideLayouts/slideLayout10.xml><?xml version="1.0" encoding="utf-8"?>
-<p:sldLayout xmlns:a="http://schemas.openxmlformats.org/drawingml/2006/main" xmlns:p="http://schemas.openxmlformats.org/presentationml/2006/main" xmlns:r="http://schemas.openxmlformats.org/officeDocument/2006/relationships" xmlns:p14="http://schemas.microsoft.com/office/powerpoint/2010/main" xmlns:p15="http://schemas.microsoft.com/office/powerpoint/2012/main" xmlns:mc="http://schemas.openxmlformats.org/markup-compatibility/2006" type="objOverTx" preserve="1">
+<p:sldLayout xmlns:a="http://schemas.openxmlformats.org/drawingml/2006/main" xmlns:r="http://schemas.openxmlformats.org/officeDocument/2006/relationships" xmlns:p="http://schemas.openxmlformats.org/presentationml/2006/main" type="objOverTx" preserve="1">
   <p:cSld name="Title, Content over Content">
     <p:spTree>
       <p:nvGrpSpPr>
@@ -143,14 +1225,15 @@
           </a:ln>
         </p:spPr>
         <p:txBody>
-          <a:bodyPr lIns="0" rIns="0" tIns="0" bIns="0" anchor="ctr">
+          <a:bodyPr lIns="0" tIns="0" rIns="0" bIns="0" anchor="ctr">
             <a:noAutofit/>
           </a:bodyPr>
+          <a:lstStyle/>
           <a:p>
             <a:pPr indent="0">
               <a:buNone/>
             </a:pPr>
-            <a:endParaRPr b="0" lang="en-US" sz="1800" spc="-1" strike="noStrike">
+            <a:endParaRPr lang="en-US" sz="1800" b="0" strike="noStrike" spc="-1">
               <a:solidFill>
                 <a:srgbClr val="000000"/>
               </a:solidFill>
@@ -183,9 +1266,10 @@
           </a:ln>
         </p:spPr>
         <p:txBody>
-          <a:bodyPr lIns="0" rIns="0" tIns="0" bIns="0" anchor="t">
+          <a:bodyPr lIns="0" tIns="0" rIns="0" bIns="0" anchor="t">
             <a:normAutofit/>
           </a:bodyPr>
+          <a:lstStyle/>
           <a:p>
             <a:pPr indent="0">
               <a:lnSpc>
@@ -196,7 +1280,7 @@
               </a:spcBef>
               <a:buNone/>
             </a:pPr>
-            <a:endParaRPr b="0" lang="en-US" sz="2800" spc="-1" strike="noStrike">
+            <a:endParaRPr lang="en-US" sz="2800" b="0" strike="noStrike" spc="-1">
               <a:solidFill>
                 <a:srgbClr val="000000"/>
               </a:solidFill>
@@ -229,9 +1313,10 @@
           </a:ln>
         </p:spPr>
         <p:txBody>
-          <a:bodyPr lIns="0" rIns="0" tIns="0" bIns="0" anchor="t">
+          <a:bodyPr lIns="0" tIns="0" rIns="0" bIns="0" anchor="t">
             <a:normAutofit/>
           </a:bodyPr>
+          <a:lstStyle/>
           <a:p>
             <a:pPr indent="0">
               <a:lnSpc>
@@ -242,7 +1327,7 @@
               </a:spcBef>
               <a:buNone/>
             </a:pPr>
-            <a:endParaRPr b="0" lang="en-US" sz="2800" spc="-1" strike="noStrike">
+            <a:endParaRPr lang="en-US" sz="2800" b="0" strike="noStrike" spc="-1">
               <a:solidFill>
                 <a:srgbClr val="000000"/>
               </a:solidFill>
@@ -264,6 +1349,7 @@
         <p:spPr/>
         <p:txBody>
           <a:bodyPr/>
+          <a:lstStyle/>
           <a:p>
             <a:r>
               <a:t>Footer</a:t>
@@ -284,10 +1370,12 @@
         <p:spPr/>
         <p:txBody>
           <a:bodyPr/>
+          <a:lstStyle/>
           <a:p>
             <a:fld id="{587B7B58-91DA-4249-9F6D-3A7D97B3B79C}" type="slidenum">
-              <a:t>&lt;#&gt;</a:t>
+              <a:t>‹#›</a:t>
             </a:fld>
+            <a:endParaRPr/>
           </a:p>
         </p:txBody>
       </p:sp>
@@ -304,21 +1392,22 @@
         <p:spPr/>
         <p:txBody>
           <a:bodyPr/>
-          <a:p>
-            <a:r>
-              <a:rPr lang="en-IN"/>
-              <a:t/>
-            </a:r>
+          <a:lstStyle/>
+          <a:p>
+            <a:endParaRPr/>
           </a:p>
         </p:txBody>
       </p:sp>
     </p:spTree>
   </p:cSld>
+  <p:clrMapOvr>
+    <a:masterClrMapping/>
+  </p:clrMapOvr>
 </p:sldLayout>
 </file>
 
 <file path=ppt/slideLayouts/slideLayout11.xml><?xml version="1.0" encoding="utf-8"?>
-<p:sldLayout xmlns:a="http://schemas.openxmlformats.org/drawingml/2006/main" xmlns:p="http://schemas.openxmlformats.org/presentationml/2006/main" xmlns:r="http://schemas.openxmlformats.org/officeDocument/2006/relationships" xmlns:p14="http://schemas.microsoft.com/office/powerpoint/2010/main" xmlns:p15="http://schemas.microsoft.com/office/powerpoint/2012/main" xmlns:mc="http://schemas.openxmlformats.org/markup-compatibility/2006" type="fourObj" preserve="1">
+<p:sldLayout xmlns:a="http://schemas.openxmlformats.org/drawingml/2006/main" xmlns:r="http://schemas.openxmlformats.org/officeDocument/2006/relationships" xmlns:p="http://schemas.openxmlformats.org/presentationml/2006/main" type="fourObj" preserve="1">
   <p:cSld name="Title, 4 Content">
     <p:spTree>
       <p:nvGrpSpPr>
@@ -358,14 +1447,15 @@
           </a:ln>
         </p:spPr>
         <p:txBody>
-          <a:bodyPr lIns="0" rIns="0" tIns="0" bIns="0" anchor="ctr">
+          <a:bodyPr lIns="0" tIns="0" rIns="0" bIns="0" anchor="ctr">
             <a:noAutofit/>
           </a:bodyPr>
+          <a:lstStyle/>
           <a:p>
             <a:pPr indent="0">
               <a:buNone/>
             </a:pPr>
-            <a:endParaRPr b="0" lang="en-US" sz="1800" spc="-1" strike="noStrike">
+            <a:endParaRPr lang="en-US" sz="1800" b="0" strike="noStrike" spc="-1">
               <a:solidFill>
                 <a:srgbClr val="000000"/>
               </a:solidFill>
@@ -398,9 +1488,10 @@
           </a:ln>
         </p:spPr>
         <p:txBody>
-          <a:bodyPr lIns="0" rIns="0" tIns="0" bIns="0" anchor="t">
+          <a:bodyPr lIns="0" tIns="0" rIns="0" bIns="0" anchor="t">
             <a:normAutofit/>
           </a:bodyPr>
+          <a:lstStyle/>
           <a:p>
             <a:pPr indent="0">
               <a:lnSpc>
@@ -411,7 +1502,7 @@
               </a:spcBef>
               <a:buNone/>
             </a:pPr>
-            <a:endParaRPr b="0" lang="en-US" sz="2800" spc="-1" strike="noStrike">
+            <a:endParaRPr lang="en-US" sz="2800" b="0" strike="noStrike" spc="-1">
               <a:solidFill>
                 <a:srgbClr val="000000"/>
               </a:solidFill>
@@ -444,9 +1535,10 @@
           </a:ln>
         </p:spPr>
         <p:txBody>
-          <a:bodyPr lIns="0" rIns="0" tIns="0" bIns="0" anchor="t">
+          <a:bodyPr lIns="0" tIns="0" rIns="0" bIns="0" anchor="t">
             <a:normAutofit/>
           </a:bodyPr>
+          <a:lstStyle/>
           <a:p>
             <a:pPr indent="0">
               <a:lnSpc>
@@ -457,7 +1549,7 @@
               </a:spcBef>
               <a:buNone/>
             </a:pPr>
-            <a:endParaRPr b="0" lang="en-US" sz="2800" spc="-1" strike="noStrike">
+            <a:endParaRPr lang="en-US" sz="2800" b="0" strike="noStrike" spc="-1">
               <a:solidFill>
                 <a:srgbClr val="000000"/>
               </a:solidFill>
@@ -490,9 +1582,10 @@
           </a:ln>
         </p:spPr>
         <p:txBody>
-          <a:bodyPr lIns="0" rIns="0" tIns="0" bIns="0" anchor="t">
+          <a:bodyPr lIns="0" tIns="0" rIns="0" bIns="0" anchor="t">
             <a:normAutofit/>
           </a:bodyPr>
+          <a:lstStyle/>
           <a:p>
             <a:pPr indent="0">
               <a:lnSpc>
@@ -503,7 +1596,7 @@
               </a:spcBef>
               <a:buNone/>
             </a:pPr>
-            <a:endParaRPr b="0" lang="en-US" sz="2800" spc="-1" strike="noStrike">
+            <a:endParaRPr lang="en-US" sz="2800" b="0" strike="noStrike" spc="-1">
               <a:solidFill>
                 <a:srgbClr val="000000"/>
               </a:solidFill>
@@ -536,9 +1629,10 @@
           </a:ln>
         </p:spPr>
         <p:txBody>
-          <a:bodyPr lIns="0" rIns="0" tIns="0" bIns="0" anchor="t">
+          <a:bodyPr lIns="0" tIns="0" rIns="0" bIns="0" anchor="t">
             <a:normAutofit/>
           </a:bodyPr>
+          <a:lstStyle/>
           <a:p>
             <a:pPr indent="0">
               <a:lnSpc>
@@ -549,7 +1643,7 @@
               </a:spcBef>
               <a:buNone/>
             </a:pPr>
-            <a:endParaRPr b="0" lang="en-US" sz="2800" spc="-1" strike="noStrike">
+            <a:endParaRPr lang="en-US" sz="2800" b="0" strike="noStrike" spc="-1">
               <a:solidFill>
                 <a:srgbClr val="000000"/>
               </a:solidFill>
@@ -571,6 +1665,7 @@
         <p:spPr/>
         <p:txBody>
           <a:bodyPr/>
+          <a:lstStyle/>
           <a:p>
             <a:r>
               <a:t>Footer</a:t>
@@ -591,10 +1686,12 @@
         <p:spPr/>
         <p:txBody>
           <a:bodyPr/>
+          <a:lstStyle/>
           <a:p>
             <a:fld id="{C57D9059-8FB2-4906-A46A-933480FFE6B6}" type="slidenum">
-              <a:t>&lt;#&gt;</a:t>
+              <a:t>‹#›</a:t>
             </a:fld>
+            <a:endParaRPr/>
           </a:p>
         </p:txBody>
       </p:sp>
@@ -611,21 +1708,22 @@
         <p:spPr/>
         <p:txBody>
           <a:bodyPr/>
-          <a:p>
-            <a:r>
-              <a:rPr lang="en-IN"/>
-              <a:t/>
-            </a:r>
+          <a:lstStyle/>
+          <a:p>
+            <a:endParaRPr/>
           </a:p>
         </p:txBody>
       </p:sp>
     </p:spTree>
   </p:cSld>
+  <p:clrMapOvr>
+    <a:masterClrMapping/>
+  </p:clrMapOvr>
 </p:sldLayout>
 </file>
 
 <file path=ppt/slideLayouts/slideLayout12.xml><?xml version="1.0" encoding="utf-8"?>
-<p:sldLayout xmlns:a="http://schemas.openxmlformats.org/drawingml/2006/main" xmlns:p="http://schemas.openxmlformats.org/presentationml/2006/main" xmlns:r="http://schemas.openxmlformats.org/officeDocument/2006/relationships" xmlns:p14="http://schemas.microsoft.com/office/powerpoint/2010/main" xmlns:p15="http://schemas.microsoft.com/office/powerpoint/2012/main" xmlns:mc="http://schemas.openxmlformats.org/markup-compatibility/2006" type="blank" preserve="1">
+<p:sldLayout xmlns:a="http://schemas.openxmlformats.org/drawingml/2006/main" xmlns:r="http://schemas.openxmlformats.org/officeDocument/2006/relationships" xmlns:p="http://schemas.openxmlformats.org/presentationml/2006/main" type="blank" preserve="1">
   <p:cSld name="Title, 6 Content">
     <p:spTree>
       <p:nvGrpSpPr>
@@ -665,14 +1763,15 @@
           </a:ln>
         </p:spPr>
         <p:txBody>
-          <a:bodyPr lIns="0" rIns="0" tIns="0" bIns="0" anchor="ctr">
+          <a:bodyPr lIns="0" tIns="0" rIns="0" bIns="0" anchor="ctr">
             <a:noAutofit/>
           </a:bodyPr>
+          <a:lstStyle/>
           <a:p>
             <a:pPr indent="0">
               <a:buNone/>
             </a:pPr>
-            <a:endParaRPr b="0" lang="en-US" sz="1800" spc="-1" strike="noStrike">
+            <a:endParaRPr lang="en-US" sz="1800" b="0" strike="noStrike" spc="-1">
               <a:solidFill>
                 <a:srgbClr val="000000"/>
               </a:solidFill>
@@ -705,9 +1804,10 @@
           </a:ln>
         </p:spPr>
         <p:txBody>
-          <a:bodyPr lIns="0" rIns="0" tIns="0" bIns="0" anchor="t">
+          <a:bodyPr lIns="0" tIns="0" rIns="0" bIns="0" anchor="t">
             <a:normAutofit/>
           </a:bodyPr>
+          <a:lstStyle/>
           <a:p>
             <a:pPr indent="0">
               <a:lnSpc>
@@ -718,7 +1818,7 @@
               </a:spcBef>
               <a:buNone/>
             </a:pPr>
-            <a:endParaRPr b="0" lang="en-US" sz="2800" spc="-1" strike="noStrike">
+            <a:endParaRPr lang="en-US" sz="2800" b="0" strike="noStrike" spc="-1">
               <a:solidFill>
                 <a:srgbClr val="000000"/>
               </a:solidFill>
@@ -751,9 +1851,10 @@
           </a:ln>
         </p:spPr>
         <p:txBody>
-          <a:bodyPr lIns="0" rIns="0" tIns="0" bIns="0" anchor="t">
+          <a:bodyPr lIns="0" tIns="0" rIns="0" bIns="0" anchor="t">
             <a:normAutofit/>
           </a:bodyPr>
+          <a:lstStyle/>
           <a:p>
             <a:pPr indent="0">
               <a:lnSpc>
@@ -764,7 +1865,7 @@
               </a:spcBef>
               <a:buNone/>
             </a:pPr>
-            <a:endParaRPr b="0" lang="en-US" sz="2800" spc="-1" strike="noStrike">
+            <a:endParaRPr lang="en-US" sz="2800" b="0" strike="noStrike" spc="-1">
               <a:solidFill>
                 <a:srgbClr val="000000"/>
               </a:solidFill>
@@ -797,9 +1898,10 @@
           </a:ln>
         </p:spPr>
         <p:txBody>
-          <a:bodyPr lIns="0" rIns="0" tIns="0" bIns="0" anchor="t">
+          <a:bodyPr lIns="0" tIns="0" rIns="0" bIns="0" anchor="t">
             <a:normAutofit/>
           </a:bodyPr>
+          <a:lstStyle/>
           <a:p>
             <a:pPr indent="0">
               <a:lnSpc>
@@ -810,7 +1912,7 @@
               </a:spcBef>
               <a:buNone/>
             </a:pPr>
-            <a:endParaRPr b="0" lang="en-US" sz="2800" spc="-1" strike="noStrike">
+            <a:endParaRPr lang="en-US" sz="2800" b="0" strike="noStrike" spc="-1">
               <a:solidFill>
                 <a:srgbClr val="000000"/>
               </a:solidFill>
@@ -843,9 +1945,10 @@
           </a:ln>
         </p:spPr>
         <p:txBody>
-          <a:bodyPr lIns="0" rIns="0" tIns="0" bIns="0" anchor="t">
+          <a:bodyPr lIns="0" tIns="0" rIns="0" bIns="0" anchor="t">
             <a:normAutofit/>
           </a:bodyPr>
+          <a:lstStyle/>
           <a:p>
             <a:pPr indent="0">
               <a:lnSpc>
@@ -856,7 +1959,7 @@
               </a:spcBef>
               <a:buNone/>
             </a:pPr>
-            <a:endParaRPr b="0" lang="en-US" sz="2800" spc="-1" strike="noStrike">
+            <a:endParaRPr lang="en-US" sz="2800" b="0" strike="noStrike" spc="-1">
               <a:solidFill>
                 <a:srgbClr val="000000"/>
               </a:solidFill>
@@ -889,9 +1992,10 @@
           </a:ln>
         </p:spPr>
         <p:txBody>
-          <a:bodyPr lIns="0" rIns="0" tIns="0" bIns="0" anchor="t">
+          <a:bodyPr lIns="0" tIns="0" rIns="0" bIns="0" anchor="t">
             <a:normAutofit/>
           </a:bodyPr>
+          <a:lstStyle/>
           <a:p>
             <a:pPr indent="0">
               <a:lnSpc>
@@ -902,7 +2006,7 @@
               </a:spcBef>
               <a:buNone/>
             </a:pPr>
-            <a:endParaRPr b="0" lang="en-US" sz="2800" spc="-1" strike="noStrike">
+            <a:endParaRPr lang="en-US" sz="2800" b="0" strike="noStrike" spc="-1">
               <a:solidFill>
                 <a:srgbClr val="000000"/>
               </a:solidFill>
@@ -935,9 +2039,10 @@
           </a:ln>
         </p:spPr>
         <p:txBody>
-          <a:bodyPr lIns="0" rIns="0" tIns="0" bIns="0" anchor="t">
+          <a:bodyPr lIns="0" tIns="0" rIns="0" bIns="0" anchor="t">
             <a:normAutofit/>
           </a:bodyPr>
+          <a:lstStyle/>
           <a:p>
             <a:pPr indent="0">
               <a:lnSpc>
@@ -948,7 +2053,7 @@
               </a:spcBef>
               <a:buNone/>
             </a:pPr>
-            <a:endParaRPr b="0" lang="en-US" sz="2800" spc="-1" strike="noStrike">
+            <a:endParaRPr lang="en-US" sz="2800" b="0" strike="noStrike" spc="-1">
               <a:solidFill>
                 <a:srgbClr val="000000"/>
               </a:solidFill>
@@ -970,6 +2075,7 @@
         <p:spPr/>
         <p:txBody>
           <a:bodyPr/>
+          <a:lstStyle/>
           <a:p>
             <a:r>
               <a:t>Footer</a:t>
@@ -990,10 +2096,12 @@
         <p:spPr/>
         <p:txBody>
           <a:bodyPr/>
+          <a:lstStyle/>
           <a:p>
             <a:fld id="{E7659115-0745-41B2-BC4C-78215F3CCC50}" type="slidenum">
-              <a:t>&lt;#&gt;</a:t>
+              <a:t>‹#›</a:t>
             </a:fld>
+            <a:endParaRPr/>
           </a:p>
         </p:txBody>
       </p:sp>
@@ -1010,21 +2118,22 @@
         <p:spPr/>
         <p:txBody>
           <a:bodyPr/>
-          <a:p>
-            <a:r>
-              <a:rPr lang="en-IN"/>
-              <a:t/>
-            </a:r>
+          <a:lstStyle/>
+          <a:p>
+            <a:endParaRPr/>
           </a:p>
         </p:txBody>
       </p:sp>
     </p:spTree>
   </p:cSld>
+  <p:clrMapOvr>
+    <a:masterClrMapping/>
+  </p:clrMapOvr>
 </p:sldLayout>
 </file>
 
 <file path=ppt/slideLayouts/slideLayout13.xml><?xml version="1.0" encoding="utf-8"?>
-<p:sldLayout xmlns:a="http://schemas.openxmlformats.org/drawingml/2006/main" xmlns:p="http://schemas.openxmlformats.org/presentationml/2006/main" xmlns:r="http://schemas.openxmlformats.org/officeDocument/2006/relationships" xmlns:p14="http://schemas.microsoft.com/office/powerpoint/2010/main" xmlns:p15="http://schemas.microsoft.com/office/powerpoint/2012/main" xmlns:mc="http://schemas.openxmlformats.org/markup-compatibility/2006" type="blank" preserve="1">
+<p:sldLayout xmlns:a="http://schemas.openxmlformats.org/drawingml/2006/main" xmlns:r="http://schemas.openxmlformats.org/officeDocument/2006/relationships" xmlns:p="http://schemas.openxmlformats.org/presentationml/2006/main" type="blank" preserve="1">
   <p:cSld name="Blank Slide">
     <p:spTree>
       <p:nvGrpSpPr>
@@ -1053,6 +2162,7 @@
         <p:spPr/>
         <p:txBody>
           <a:bodyPr/>
+          <a:lstStyle/>
           <a:p>
             <a:r>
               <a:t>Footer</a:t>
@@ -1073,10 +2183,12 @@
         <p:spPr/>
         <p:txBody>
           <a:bodyPr/>
+          <a:lstStyle/>
           <a:p>
             <a:fld id="{1568D07C-8E3A-4DDD-851E-D1739F1EB092}" type="slidenum">
-              <a:t>&lt;#&gt;</a:t>
+              <a:t>‹#›</a:t>
             </a:fld>
+            <a:endParaRPr/>
           </a:p>
         </p:txBody>
       </p:sp>
@@ -1093,21 +2205,22 @@
         <p:spPr/>
         <p:txBody>
           <a:bodyPr/>
-          <a:p>
-            <a:r>
-              <a:rPr lang="en-IN"/>
-              <a:t/>
-            </a:r>
+          <a:lstStyle/>
+          <a:p>
+            <a:endParaRPr/>
           </a:p>
         </p:txBody>
       </p:sp>
     </p:spTree>
   </p:cSld>
+  <p:clrMapOvr>
+    <a:masterClrMapping/>
+  </p:clrMapOvr>
 </p:sldLayout>
 </file>
 
 <file path=ppt/slideLayouts/slideLayout14.xml><?xml version="1.0" encoding="utf-8"?>
-<p:sldLayout xmlns:a="http://schemas.openxmlformats.org/drawingml/2006/main" xmlns:p="http://schemas.openxmlformats.org/presentationml/2006/main" xmlns:r="http://schemas.openxmlformats.org/officeDocument/2006/relationships" xmlns:p14="http://schemas.microsoft.com/office/powerpoint/2010/main" xmlns:p15="http://schemas.microsoft.com/office/powerpoint/2012/main" xmlns:mc="http://schemas.openxmlformats.org/markup-compatibility/2006" type="tx" preserve="1">
+<p:sldLayout xmlns:a="http://schemas.openxmlformats.org/drawingml/2006/main" xmlns:r="http://schemas.openxmlformats.org/officeDocument/2006/relationships" xmlns:p="http://schemas.openxmlformats.org/presentationml/2006/main" type="tx" preserve="1">
   <p:cSld name="Title Slide">
     <p:spTree>
       <p:nvGrpSpPr>
@@ -1147,14 +2260,15 @@
           </a:ln>
         </p:spPr>
         <p:txBody>
-          <a:bodyPr lIns="0" rIns="0" tIns="0" bIns="0" anchor="ctr">
+          <a:bodyPr lIns="0" tIns="0" rIns="0" bIns="0" anchor="ctr">
             <a:noAutofit/>
           </a:bodyPr>
+          <a:lstStyle/>
           <a:p>
             <a:pPr indent="0">
               <a:buNone/>
             </a:pPr>
-            <a:endParaRPr b="0" lang="en-US" sz="1800" spc="-1" strike="noStrike">
+            <a:endParaRPr lang="en-US" sz="1800" b="0" strike="noStrike" spc="-1">
               <a:solidFill>
                 <a:srgbClr val="000000"/>
               </a:solidFill>
@@ -1187,14 +2301,15 @@
           </a:ln>
         </p:spPr>
         <p:txBody>
-          <a:bodyPr lIns="0" rIns="0" tIns="0" bIns="0" anchor="ctr">
+          <a:bodyPr lIns="0" tIns="0" rIns="0" bIns="0" anchor="ctr">
             <a:noAutofit/>
           </a:bodyPr>
+          <a:lstStyle/>
           <a:p>
             <a:pPr indent="0" algn="ctr">
               <a:buNone/>
             </a:pPr>
-            <a:endParaRPr b="0" lang="en-IN" sz="3200" spc="-1" strike="noStrike">
+            <a:endParaRPr lang="en-IN" sz="3200" b="0" strike="noStrike" spc="-1">
               <a:solidFill>
                 <a:srgbClr val="000000"/>
               </a:solidFill>
@@ -1216,6 +2331,7 @@
         <p:spPr/>
         <p:txBody>
           <a:bodyPr/>
+          <a:lstStyle/>
           <a:p>
             <a:r>
               <a:t>Footer</a:t>
@@ -1236,10 +2352,12 @@
         <p:spPr/>
         <p:txBody>
           <a:bodyPr/>
+          <a:lstStyle/>
           <a:p>
             <a:fld id="{74B14560-4581-4305-BCD8-681818EAC534}" type="slidenum">
-              <a:t>&lt;#&gt;</a:t>
+              <a:t>‹#›</a:t>
             </a:fld>
+            <a:endParaRPr/>
           </a:p>
         </p:txBody>
       </p:sp>
@@ -1256,21 +2374,22 @@
         <p:spPr/>
         <p:txBody>
           <a:bodyPr/>
-          <a:p>
-            <a:r>
-              <a:rPr lang="en-IN"/>
-              <a:t/>
-            </a:r>
+          <a:lstStyle/>
+          <a:p>
+            <a:endParaRPr/>
           </a:p>
         </p:txBody>
       </p:sp>
     </p:spTree>
   </p:cSld>
+  <p:clrMapOvr>
+    <a:masterClrMapping/>
+  </p:clrMapOvr>
 </p:sldLayout>
 </file>
 
 <file path=ppt/slideLayouts/slideLayout15.xml><?xml version="1.0" encoding="utf-8"?>
-<p:sldLayout xmlns:a="http://schemas.openxmlformats.org/drawingml/2006/main" xmlns:p="http://schemas.openxmlformats.org/presentationml/2006/main" xmlns:r="http://schemas.openxmlformats.org/officeDocument/2006/relationships" xmlns:p14="http://schemas.microsoft.com/office/powerpoint/2010/main" xmlns:p15="http://schemas.microsoft.com/office/powerpoint/2012/main" xmlns:mc="http://schemas.openxmlformats.org/markup-compatibility/2006" type="obj" preserve="1">
+<p:sldLayout xmlns:a="http://schemas.openxmlformats.org/drawingml/2006/main" xmlns:r="http://schemas.openxmlformats.org/officeDocument/2006/relationships" xmlns:p="http://schemas.openxmlformats.org/presentationml/2006/main" type="obj" preserve="1">
   <p:cSld name="Title, Content">
     <p:spTree>
       <p:nvGrpSpPr>
@@ -1310,14 +2429,15 @@
           </a:ln>
         </p:spPr>
         <p:txBody>
-          <a:bodyPr lIns="0" rIns="0" tIns="0" bIns="0" anchor="ctr">
+          <a:bodyPr lIns="0" tIns="0" rIns="0" bIns="0" anchor="ctr">
             <a:noAutofit/>
           </a:bodyPr>
+          <a:lstStyle/>
           <a:p>
             <a:pPr indent="0">
               <a:buNone/>
             </a:pPr>
-            <a:endParaRPr b="0" lang="en-US" sz="1800" spc="-1" strike="noStrike">
+            <a:endParaRPr lang="en-US" sz="1800" b="0" strike="noStrike" spc="-1">
               <a:solidFill>
                 <a:srgbClr val="000000"/>
               </a:solidFill>
@@ -1350,9 +2470,10 @@
           </a:ln>
         </p:spPr>
         <p:txBody>
-          <a:bodyPr lIns="0" rIns="0" tIns="0" bIns="0" anchor="t">
+          <a:bodyPr lIns="0" tIns="0" rIns="0" bIns="0" anchor="t">
             <a:normAutofit/>
           </a:bodyPr>
+          <a:lstStyle/>
           <a:p>
             <a:pPr indent="0">
               <a:lnSpc>
@@ -1363,7 +2484,7 @@
               </a:spcBef>
               <a:buNone/>
             </a:pPr>
-            <a:endParaRPr b="0" lang="en-US" sz="2800" spc="-1" strike="noStrike">
+            <a:endParaRPr lang="en-US" sz="2800" b="0" strike="noStrike" spc="-1">
               <a:solidFill>
                 <a:srgbClr val="000000"/>
               </a:solidFill>
@@ -1385,6 +2506,7 @@
         <p:spPr/>
         <p:txBody>
           <a:bodyPr/>
+          <a:lstStyle/>
           <a:p>
             <a:r>
               <a:t>Footer</a:t>
@@ -1405,10 +2527,12 @@
         <p:spPr/>
         <p:txBody>
           <a:bodyPr/>
+          <a:lstStyle/>
           <a:p>
             <a:fld id="{88D9A71D-5953-4E79-BC69-FF01B8DDB537}" type="slidenum">
-              <a:t>&lt;#&gt;</a:t>
+              <a:t>‹#›</a:t>
             </a:fld>
+            <a:endParaRPr/>
           </a:p>
         </p:txBody>
       </p:sp>
@@ -1425,21 +2549,22 @@
         <p:spPr/>
         <p:txBody>
           <a:bodyPr/>
-          <a:p>
-            <a:r>
-              <a:rPr lang="en-IN"/>
-              <a:t/>
-            </a:r>
+          <a:lstStyle/>
+          <a:p>
+            <a:endParaRPr/>
           </a:p>
         </p:txBody>
       </p:sp>
     </p:spTree>
   </p:cSld>
+  <p:clrMapOvr>
+    <a:masterClrMapping/>
+  </p:clrMapOvr>
 </p:sldLayout>
 </file>
 
 <file path=ppt/slideLayouts/slideLayout16.xml><?xml version="1.0" encoding="utf-8"?>
-<p:sldLayout xmlns:a="http://schemas.openxmlformats.org/drawingml/2006/main" xmlns:p="http://schemas.openxmlformats.org/presentationml/2006/main" xmlns:r="http://schemas.openxmlformats.org/officeDocument/2006/relationships" xmlns:p14="http://schemas.microsoft.com/office/powerpoint/2010/main" xmlns:p15="http://schemas.microsoft.com/office/powerpoint/2012/main" xmlns:mc="http://schemas.openxmlformats.org/markup-compatibility/2006" type="twoObj" preserve="1">
+<p:sldLayout xmlns:a="http://schemas.openxmlformats.org/drawingml/2006/main" xmlns:r="http://schemas.openxmlformats.org/officeDocument/2006/relationships" xmlns:p="http://schemas.openxmlformats.org/presentationml/2006/main" type="twoObj" preserve="1">
   <p:cSld name="Title, 2 Content">
     <p:spTree>
       <p:nvGrpSpPr>
@@ -1479,14 +2604,15 @@
           </a:ln>
         </p:spPr>
         <p:txBody>
-          <a:bodyPr lIns="0" rIns="0" tIns="0" bIns="0" anchor="ctr">
+          <a:bodyPr lIns="0" tIns="0" rIns="0" bIns="0" anchor="ctr">
             <a:noAutofit/>
           </a:bodyPr>
+          <a:lstStyle/>
           <a:p>
             <a:pPr indent="0">
               <a:buNone/>
             </a:pPr>
-            <a:endParaRPr b="0" lang="en-US" sz="1800" spc="-1" strike="noStrike">
+            <a:endParaRPr lang="en-US" sz="1800" b="0" strike="noStrike" spc="-1">
               <a:solidFill>
                 <a:srgbClr val="000000"/>
               </a:solidFill>
@@ -1519,9 +2645,10 @@
           </a:ln>
         </p:spPr>
         <p:txBody>
-          <a:bodyPr lIns="0" rIns="0" tIns="0" bIns="0" anchor="t">
+          <a:bodyPr lIns="0" tIns="0" rIns="0" bIns="0" anchor="t">
             <a:normAutofit/>
           </a:bodyPr>
+          <a:lstStyle/>
           <a:p>
             <a:pPr indent="0">
               <a:lnSpc>
@@ -1532,7 +2659,7 @@
               </a:spcBef>
               <a:buNone/>
             </a:pPr>
-            <a:endParaRPr b="0" lang="en-US" sz="2800" spc="-1" strike="noStrike">
+            <a:endParaRPr lang="en-US" sz="2800" b="0" strike="noStrike" spc="-1">
               <a:solidFill>
                 <a:srgbClr val="000000"/>
               </a:solidFill>
@@ -1565,9 +2692,10 @@
           </a:ln>
         </p:spPr>
         <p:txBody>
-          <a:bodyPr lIns="0" rIns="0" tIns="0" bIns="0" anchor="t">
+          <a:bodyPr lIns="0" tIns="0" rIns="0" bIns="0" anchor="t">
             <a:normAutofit/>
           </a:bodyPr>
+          <a:lstStyle/>
           <a:p>
             <a:pPr indent="0">
               <a:lnSpc>
@@ -1578,7 +2706,7 @@
               </a:spcBef>
               <a:buNone/>
             </a:pPr>
-            <a:endParaRPr b="0" lang="en-US" sz="2800" spc="-1" strike="noStrike">
+            <a:endParaRPr lang="en-US" sz="2800" b="0" strike="noStrike" spc="-1">
               <a:solidFill>
                 <a:srgbClr val="000000"/>
               </a:solidFill>
@@ -1600,6 +2728,7 @@
         <p:spPr/>
         <p:txBody>
           <a:bodyPr/>
+          <a:lstStyle/>
           <a:p>
             <a:r>
               <a:t>Footer</a:t>
@@ -1620,10 +2749,12 @@
         <p:spPr/>
         <p:txBody>
           <a:bodyPr/>
+          <a:lstStyle/>
           <a:p>
             <a:fld id="{1D4F0E64-FA37-4E0F-9FF9-1E1CDA9BDE77}" type="slidenum">
-              <a:t>&lt;#&gt;</a:t>
+              <a:t>‹#›</a:t>
             </a:fld>
+            <a:endParaRPr/>
           </a:p>
         </p:txBody>
       </p:sp>
@@ -1640,21 +2771,22 @@
         <p:spPr/>
         <p:txBody>
           <a:bodyPr/>
-          <a:p>
-            <a:r>
-              <a:rPr lang="en-IN"/>
-              <a:t/>
-            </a:r>
+          <a:lstStyle/>
+          <a:p>
+            <a:endParaRPr/>
           </a:p>
         </p:txBody>
       </p:sp>
     </p:spTree>
   </p:cSld>
+  <p:clrMapOvr>
+    <a:masterClrMapping/>
+  </p:clrMapOvr>
 </p:sldLayout>
 </file>
 
 <file path=ppt/slideLayouts/slideLayout17.xml><?xml version="1.0" encoding="utf-8"?>
-<p:sldLayout xmlns:a="http://schemas.openxmlformats.org/drawingml/2006/main" xmlns:p="http://schemas.openxmlformats.org/presentationml/2006/main" xmlns:r="http://schemas.openxmlformats.org/officeDocument/2006/relationships" xmlns:p14="http://schemas.microsoft.com/office/powerpoint/2010/main" xmlns:p15="http://schemas.microsoft.com/office/powerpoint/2012/main" xmlns:mc="http://schemas.openxmlformats.org/markup-compatibility/2006" type="titleOnly" preserve="1">
+<p:sldLayout xmlns:a="http://schemas.openxmlformats.org/drawingml/2006/main" xmlns:r="http://schemas.openxmlformats.org/officeDocument/2006/relationships" xmlns:p="http://schemas.openxmlformats.org/presentationml/2006/main" type="titleOnly" preserve="1">
   <p:cSld name="Title Only">
     <p:spTree>
       <p:nvGrpSpPr>
@@ -1694,14 +2826,15 @@
           </a:ln>
         </p:spPr>
         <p:txBody>
-          <a:bodyPr lIns="0" rIns="0" tIns="0" bIns="0" anchor="ctr">
+          <a:bodyPr lIns="0" tIns="0" rIns="0" bIns="0" anchor="ctr">
             <a:noAutofit/>
           </a:bodyPr>
+          <a:lstStyle/>
           <a:p>
             <a:pPr indent="0">
               <a:buNone/>
             </a:pPr>
-            <a:endParaRPr b="0" lang="en-US" sz="1800" spc="-1" strike="noStrike">
+            <a:endParaRPr lang="en-US" sz="1800" b="0" strike="noStrike" spc="-1">
               <a:solidFill>
                 <a:srgbClr val="000000"/>
               </a:solidFill>
@@ -1723,6 +2856,7 @@
         <p:spPr/>
         <p:txBody>
           <a:bodyPr/>
+          <a:lstStyle/>
           <a:p>
             <a:r>
               <a:t>Footer</a:t>
@@ -1743,10 +2877,12 @@
         <p:spPr/>
         <p:txBody>
           <a:bodyPr/>
+          <a:lstStyle/>
           <a:p>
             <a:fld id="{86D2787E-6BC2-4C70-A86C-B961FBF3C304}" type="slidenum">
-              <a:t>&lt;#&gt;</a:t>
+              <a:t>‹#›</a:t>
             </a:fld>
+            <a:endParaRPr/>
           </a:p>
         </p:txBody>
       </p:sp>
@@ -1763,21 +2899,22 @@
         <p:spPr/>
         <p:txBody>
           <a:bodyPr/>
-          <a:p>
-            <a:r>
-              <a:rPr lang="en-IN"/>
-              <a:t/>
-            </a:r>
+          <a:lstStyle/>
+          <a:p>
+            <a:endParaRPr/>
           </a:p>
         </p:txBody>
       </p:sp>
     </p:spTree>
   </p:cSld>
+  <p:clrMapOvr>
+    <a:masterClrMapping/>
+  </p:clrMapOvr>
 </p:sldLayout>
 </file>
 
 <file path=ppt/slideLayouts/slideLayout18.xml><?xml version="1.0" encoding="utf-8"?>
-<p:sldLayout xmlns:a="http://schemas.openxmlformats.org/drawingml/2006/main" xmlns:p="http://schemas.openxmlformats.org/presentationml/2006/main" xmlns:r="http://schemas.openxmlformats.org/officeDocument/2006/relationships" xmlns:p14="http://schemas.microsoft.com/office/powerpoint/2010/main" xmlns:p15="http://schemas.microsoft.com/office/powerpoint/2012/main" xmlns:mc="http://schemas.openxmlformats.org/markup-compatibility/2006" type="objOnly" preserve="1">
+<p:sldLayout xmlns:a="http://schemas.openxmlformats.org/drawingml/2006/main" xmlns:r="http://schemas.openxmlformats.org/officeDocument/2006/relationships" xmlns:p="http://schemas.openxmlformats.org/presentationml/2006/main" type="objOnly" preserve="1">
   <p:cSld name="Centered Text">
     <p:spTree>
       <p:nvGrpSpPr>
@@ -1817,12 +2954,13 @@
           </a:ln>
         </p:spPr>
         <p:txBody>
-          <a:bodyPr lIns="0" rIns="0" tIns="0" bIns="0" anchor="ctr">
+          <a:bodyPr lIns="0" tIns="0" rIns="0" bIns="0" anchor="ctr">
             <a:noAutofit/>
           </a:bodyPr>
+          <a:lstStyle/>
           <a:p>
             <a:pPr algn="ctr"/>
-            <a:endParaRPr b="0" lang="en-IN" sz="3200" spc="-1" strike="noStrike">
+            <a:endParaRPr lang="en-IN" sz="3200" b="0" strike="noStrike" spc="-1">
               <a:solidFill>
                 <a:srgbClr val="000000"/>
               </a:solidFill>
@@ -1844,6 +2982,7 @@
         <p:spPr/>
         <p:txBody>
           <a:bodyPr/>
+          <a:lstStyle/>
           <a:p>
             <a:r>
               <a:t>Footer</a:t>
@@ -1864,10 +3003,12 @@
         <p:spPr/>
         <p:txBody>
           <a:bodyPr/>
+          <a:lstStyle/>
           <a:p>
             <a:fld id="{F53F496E-2341-4F33-93D1-3B15F8B22CA9}" type="slidenum">
-              <a:t>&lt;#&gt;</a:t>
+              <a:t>‹#›</a:t>
             </a:fld>
+            <a:endParaRPr/>
           </a:p>
         </p:txBody>
       </p:sp>
@@ -1884,21 +3025,22 @@
         <p:spPr/>
         <p:txBody>
           <a:bodyPr/>
-          <a:p>
-            <a:r>
-              <a:rPr lang="en-IN"/>
-              <a:t/>
-            </a:r>
+          <a:lstStyle/>
+          <a:p>
+            <a:endParaRPr/>
           </a:p>
         </p:txBody>
       </p:sp>
     </p:spTree>
   </p:cSld>
+  <p:clrMapOvr>
+    <a:masterClrMapping/>
+  </p:clrMapOvr>
 </p:sldLayout>
 </file>
 
 <file path=ppt/slideLayouts/slideLayout19.xml><?xml version="1.0" encoding="utf-8"?>
-<p:sldLayout xmlns:a="http://schemas.openxmlformats.org/drawingml/2006/main" xmlns:p="http://schemas.openxmlformats.org/presentationml/2006/main" xmlns:r="http://schemas.openxmlformats.org/officeDocument/2006/relationships" xmlns:p14="http://schemas.microsoft.com/office/powerpoint/2010/main" xmlns:p15="http://schemas.microsoft.com/office/powerpoint/2012/main" xmlns:mc="http://schemas.openxmlformats.org/markup-compatibility/2006" type="twoObjAndObj" preserve="1">
+<p:sldLayout xmlns:a="http://schemas.openxmlformats.org/drawingml/2006/main" xmlns:r="http://schemas.openxmlformats.org/officeDocument/2006/relationships" xmlns:p="http://schemas.openxmlformats.org/presentationml/2006/main" type="twoObjAndObj" preserve="1">
   <p:cSld name="Title, 2 Content and Content">
     <p:spTree>
       <p:nvGrpSpPr>
@@ -1938,14 +3080,15 @@
           </a:ln>
         </p:spPr>
         <p:txBody>
-          <a:bodyPr lIns="0" rIns="0" tIns="0" bIns="0" anchor="ctr">
+          <a:bodyPr lIns="0" tIns="0" rIns="0" bIns="0" anchor="ctr">
             <a:noAutofit/>
           </a:bodyPr>
+          <a:lstStyle/>
           <a:p>
             <a:pPr indent="0">
               <a:buNone/>
             </a:pPr>
-            <a:endParaRPr b="0" lang="en-US" sz="1800" spc="-1" strike="noStrike">
+            <a:endParaRPr lang="en-US" sz="1800" b="0" strike="noStrike" spc="-1">
               <a:solidFill>
                 <a:srgbClr val="000000"/>
               </a:solidFill>
@@ -1978,9 +3121,10 @@
           </a:ln>
         </p:spPr>
         <p:txBody>
-          <a:bodyPr lIns="0" rIns="0" tIns="0" bIns="0" anchor="t">
+          <a:bodyPr lIns="0" tIns="0" rIns="0" bIns="0" anchor="t">
             <a:normAutofit/>
           </a:bodyPr>
+          <a:lstStyle/>
           <a:p>
             <a:pPr indent="0">
               <a:lnSpc>
@@ -1991,7 +3135,7 @@
               </a:spcBef>
               <a:buNone/>
             </a:pPr>
-            <a:endParaRPr b="0" lang="en-US" sz="2800" spc="-1" strike="noStrike">
+            <a:endParaRPr lang="en-US" sz="2800" b="0" strike="noStrike" spc="-1">
               <a:solidFill>
                 <a:srgbClr val="000000"/>
               </a:solidFill>
@@ -2024,9 +3168,10 @@
           </a:ln>
         </p:spPr>
         <p:txBody>
-          <a:bodyPr lIns="0" rIns="0" tIns="0" bIns="0" anchor="t">
+          <a:bodyPr lIns="0" tIns="0" rIns="0" bIns="0" anchor="t">
             <a:normAutofit/>
           </a:bodyPr>
+          <a:lstStyle/>
           <a:p>
             <a:pPr indent="0">
               <a:lnSpc>
@@ -2037,7 +3182,7 @@
               </a:spcBef>
               <a:buNone/>
             </a:pPr>
-            <a:endParaRPr b="0" lang="en-US" sz="2800" spc="-1" strike="noStrike">
+            <a:endParaRPr lang="en-US" sz="2800" b="0" strike="noStrike" spc="-1">
               <a:solidFill>
                 <a:srgbClr val="000000"/>
               </a:solidFill>
@@ -2070,9 +3215,10 @@
           </a:ln>
         </p:spPr>
         <p:txBody>
-          <a:bodyPr lIns="0" rIns="0" tIns="0" bIns="0" anchor="t">
+          <a:bodyPr lIns="0" tIns="0" rIns="0" bIns="0" anchor="t">
             <a:normAutofit/>
           </a:bodyPr>
+          <a:lstStyle/>
           <a:p>
             <a:pPr indent="0">
               <a:lnSpc>
@@ -2083,7 +3229,7 @@
               </a:spcBef>
               <a:buNone/>
             </a:pPr>
-            <a:endParaRPr b="0" lang="en-US" sz="2800" spc="-1" strike="noStrike">
+            <a:endParaRPr lang="en-US" sz="2800" b="0" strike="noStrike" spc="-1">
               <a:solidFill>
                 <a:srgbClr val="000000"/>
               </a:solidFill>
@@ -2105,6 +3251,7 @@
         <p:spPr/>
         <p:txBody>
           <a:bodyPr/>
+          <a:lstStyle/>
           <a:p>
             <a:r>
               <a:t>Footer</a:t>
@@ -2125,10 +3272,12 @@
         <p:spPr/>
         <p:txBody>
           <a:bodyPr/>
+          <a:lstStyle/>
           <a:p>
             <a:fld id="{3E3AD47A-A371-41E9-B912-B386967BA5D7}" type="slidenum">
-              <a:t>&lt;#&gt;</a:t>
+              <a:t>‹#›</a:t>
             </a:fld>
+            <a:endParaRPr/>
           </a:p>
         </p:txBody>
       </p:sp>
@@ -2145,21 +3294,22 @@
         <p:spPr/>
         <p:txBody>
           <a:bodyPr/>
-          <a:p>
-            <a:r>
-              <a:rPr lang="en-IN"/>
-              <a:t/>
-            </a:r>
+          <a:lstStyle/>
+          <a:p>
+            <a:endParaRPr/>
           </a:p>
         </p:txBody>
       </p:sp>
     </p:spTree>
   </p:cSld>
+  <p:clrMapOvr>
+    <a:masterClrMapping/>
+  </p:clrMapOvr>
 </p:sldLayout>
 </file>
 
 <file path=ppt/slideLayouts/slideLayout2.xml><?xml version="1.0" encoding="utf-8"?>
-<p:sldLayout xmlns:a="http://schemas.openxmlformats.org/drawingml/2006/main" xmlns:p="http://schemas.openxmlformats.org/presentationml/2006/main" xmlns:r="http://schemas.openxmlformats.org/officeDocument/2006/relationships" xmlns:p14="http://schemas.microsoft.com/office/powerpoint/2010/main" xmlns:p15="http://schemas.microsoft.com/office/powerpoint/2012/main" xmlns:mc="http://schemas.openxmlformats.org/markup-compatibility/2006" type="tx" preserve="1">
+<p:sldLayout xmlns:a="http://schemas.openxmlformats.org/drawingml/2006/main" xmlns:r="http://schemas.openxmlformats.org/officeDocument/2006/relationships" xmlns:p="http://schemas.openxmlformats.org/presentationml/2006/main" type="tx" preserve="1">
   <p:cSld name="Title Slide">
     <p:spTree>
       <p:nvGrpSpPr>
@@ -2199,14 +3349,15 @@
           </a:ln>
         </p:spPr>
         <p:txBody>
-          <a:bodyPr lIns="0" rIns="0" tIns="0" bIns="0" anchor="ctr">
+          <a:bodyPr lIns="0" tIns="0" rIns="0" bIns="0" anchor="ctr">
             <a:noAutofit/>
           </a:bodyPr>
+          <a:lstStyle/>
           <a:p>
             <a:pPr indent="0">
               <a:buNone/>
             </a:pPr>
-            <a:endParaRPr b="0" lang="en-US" sz="1800" spc="-1" strike="noStrike">
+            <a:endParaRPr lang="en-US" sz="1800" b="0" strike="noStrike" spc="-1">
               <a:solidFill>
                 <a:srgbClr val="000000"/>
               </a:solidFill>
@@ -2239,14 +3390,15 @@
           </a:ln>
         </p:spPr>
         <p:txBody>
-          <a:bodyPr lIns="0" rIns="0" tIns="0" bIns="0" anchor="ctr">
+          <a:bodyPr lIns="0" tIns="0" rIns="0" bIns="0" anchor="ctr">
             <a:noAutofit/>
           </a:bodyPr>
+          <a:lstStyle/>
           <a:p>
             <a:pPr indent="0" algn="ctr">
               <a:buNone/>
             </a:pPr>
-            <a:endParaRPr b="0" lang="en-IN" sz="3200" spc="-1" strike="noStrike">
+            <a:endParaRPr lang="en-IN" sz="3200" b="0" strike="noStrike" spc="-1">
               <a:solidFill>
                 <a:srgbClr val="000000"/>
               </a:solidFill>
@@ -2268,6 +3420,7 @@
         <p:spPr/>
         <p:txBody>
           <a:bodyPr/>
+          <a:lstStyle/>
           <a:p>
             <a:r>
               <a:t>Footer</a:t>
@@ -2277,7 +3430,7 @@
       </p:sp>
       <p:sp>
         <p:nvSpPr>
-          <p:cNvPr id="5" name="PlaceHolder 4"/>
+          <p:cNvPr id="2" name="PlaceHolder 4"/>
           <p:cNvSpPr>
             <a:spLocks noGrp="1"/>
           </p:cNvSpPr>
@@ -2288,16 +3441,18 @@
         <p:spPr/>
         <p:txBody>
           <a:bodyPr/>
+          <a:lstStyle/>
           <a:p>
             <a:fld id="{393DAB42-4219-4C7A-9CF4-3C3865DCA23E}" type="slidenum">
-              <a:t>&lt;#&gt;</a:t>
+              <a:t>‹#›</a:t>
             </a:fld>
-          </a:p>
-        </p:txBody>
-      </p:sp>
-      <p:sp>
-        <p:nvSpPr>
-          <p:cNvPr id="6" name="PlaceHolder 5"/>
+            <a:endParaRPr/>
+          </a:p>
+        </p:txBody>
+      </p:sp>
+      <p:sp>
+        <p:nvSpPr>
+          <p:cNvPr id="3" name="PlaceHolder 5"/>
           <p:cNvSpPr>
             <a:spLocks noGrp="1"/>
           </p:cNvSpPr>
@@ -2308,21 +3463,22 @@
         <p:spPr/>
         <p:txBody>
           <a:bodyPr/>
-          <a:p>
-            <a:r>
-              <a:rPr lang="en-IN"/>
-              <a:t/>
-            </a:r>
+          <a:lstStyle/>
+          <a:p>
+            <a:endParaRPr/>
           </a:p>
         </p:txBody>
       </p:sp>
     </p:spTree>
   </p:cSld>
+  <p:clrMapOvr>
+    <a:masterClrMapping/>
+  </p:clrMapOvr>
 </p:sldLayout>
 </file>
 
 <file path=ppt/slideLayouts/slideLayout20.xml><?xml version="1.0" encoding="utf-8"?>
-<p:sldLayout xmlns:a="http://schemas.openxmlformats.org/drawingml/2006/main" xmlns:p="http://schemas.openxmlformats.org/presentationml/2006/main" xmlns:r="http://schemas.openxmlformats.org/officeDocument/2006/relationships" xmlns:p14="http://schemas.microsoft.com/office/powerpoint/2010/main" xmlns:p15="http://schemas.microsoft.com/office/powerpoint/2012/main" xmlns:mc="http://schemas.openxmlformats.org/markup-compatibility/2006" type="objAndTwoObj" preserve="1">
+<p:sldLayout xmlns:a="http://schemas.openxmlformats.org/drawingml/2006/main" xmlns:r="http://schemas.openxmlformats.org/officeDocument/2006/relationships" xmlns:p="http://schemas.openxmlformats.org/presentationml/2006/main" type="objAndTwoObj" preserve="1">
   <p:cSld name="Title Content and 2 Content">
     <p:spTree>
       <p:nvGrpSpPr>
@@ -2362,14 +3518,15 @@
           </a:ln>
         </p:spPr>
         <p:txBody>
-          <a:bodyPr lIns="0" rIns="0" tIns="0" bIns="0" anchor="ctr">
+          <a:bodyPr lIns="0" tIns="0" rIns="0" bIns="0" anchor="ctr">
             <a:noAutofit/>
           </a:bodyPr>
+          <a:lstStyle/>
           <a:p>
             <a:pPr indent="0">
               <a:buNone/>
             </a:pPr>
-            <a:endParaRPr b="0" lang="en-US" sz="1800" spc="-1" strike="noStrike">
+            <a:endParaRPr lang="en-US" sz="1800" b="0" strike="noStrike" spc="-1">
               <a:solidFill>
                 <a:srgbClr val="000000"/>
               </a:solidFill>
@@ -2402,9 +3559,10 @@
           </a:ln>
         </p:spPr>
         <p:txBody>
-          <a:bodyPr lIns="0" rIns="0" tIns="0" bIns="0" anchor="t">
+          <a:bodyPr lIns="0" tIns="0" rIns="0" bIns="0" anchor="t">
             <a:normAutofit/>
           </a:bodyPr>
+          <a:lstStyle/>
           <a:p>
             <a:pPr indent="0">
               <a:lnSpc>
@@ -2415,7 +3573,7 @@
               </a:spcBef>
               <a:buNone/>
             </a:pPr>
-            <a:endParaRPr b="0" lang="en-US" sz="2800" spc="-1" strike="noStrike">
+            <a:endParaRPr lang="en-US" sz="2800" b="0" strike="noStrike" spc="-1">
               <a:solidFill>
                 <a:srgbClr val="000000"/>
               </a:solidFill>
@@ -2448,9 +3606,10 @@
           </a:ln>
         </p:spPr>
         <p:txBody>
-          <a:bodyPr lIns="0" rIns="0" tIns="0" bIns="0" anchor="t">
+          <a:bodyPr lIns="0" tIns="0" rIns="0" bIns="0" anchor="t">
             <a:normAutofit/>
           </a:bodyPr>
+          <a:lstStyle/>
           <a:p>
             <a:pPr indent="0">
               <a:lnSpc>
@@ -2461,7 +3620,7 @@
               </a:spcBef>
               <a:buNone/>
             </a:pPr>
-            <a:endParaRPr b="0" lang="en-US" sz="2800" spc="-1" strike="noStrike">
+            <a:endParaRPr lang="en-US" sz="2800" b="0" strike="noStrike" spc="-1">
               <a:solidFill>
                 <a:srgbClr val="000000"/>
               </a:solidFill>
@@ -2494,9 +3653,10 @@
           </a:ln>
         </p:spPr>
         <p:txBody>
-          <a:bodyPr lIns="0" rIns="0" tIns="0" bIns="0" anchor="t">
+          <a:bodyPr lIns="0" tIns="0" rIns="0" bIns="0" anchor="t">
             <a:normAutofit/>
           </a:bodyPr>
+          <a:lstStyle/>
           <a:p>
             <a:pPr indent="0">
               <a:lnSpc>
@@ -2507,7 +3667,7 @@
               </a:spcBef>
               <a:buNone/>
             </a:pPr>
-            <a:endParaRPr b="0" lang="en-US" sz="2800" spc="-1" strike="noStrike">
+            <a:endParaRPr lang="en-US" sz="2800" b="0" strike="noStrike" spc="-1">
               <a:solidFill>
                 <a:srgbClr val="000000"/>
               </a:solidFill>
@@ -2529,6 +3689,7 @@
         <p:spPr/>
         <p:txBody>
           <a:bodyPr/>
+          <a:lstStyle/>
           <a:p>
             <a:r>
               <a:t>Footer</a:t>
@@ -2549,10 +3710,12 @@
         <p:spPr/>
         <p:txBody>
           <a:bodyPr/>
+          <a:lstStyle/>
           <a:p>
             <a:fld id="{7C66E370-9664-4999-A2A2-3D20D6DD47FA}" type="slidenum">
-              <a:t>&lt;#&gt;</a:t>
+              <a:t>‹#›</a:t>
             </a:fld>
+            <a:endParaRPr/>
           </a:p>
         </p:txBody>
       </p:sp>
@@ -2569,21 +3732,22 @@
         <p:spPr/>
         <p:txBody>
           <a:bodyPr/>
-          <a:p>
-            <a:r>
-              <a:rPr lang="en-IN"/>
-              <a:t/>
-            </a:r>
+          <a:lstStyle/>
+          <a:p>
+            <a:endParaRPr/>
           </a:p>
         </p:txBody>
       </p:sp>
     </p:spTree>
   </p:cSld>
+  <p:clrMapOvr>
+    <a:masterClrMapping/>
+  </p:clrMapOvr>
 </p:sldLayout>
 </file>
 
 <file path=ppt/slideLayouts/slideLayout21.xml><?xml version="1.0" encoding="utf-8"?>
-<p:sldLayout xmlns:a="http://schemas.openxmlformats.org/drawingml/2006/main" xmlns:p="http://schemas.openxmlformats.org/presentationml/2006/main" xmlns:r="http://schemas.openxmlformats.org/officeDocument/2006/relationships" xmlns:p14="http://schemas.microsoft.com/office/powerpoint/2010/main" xmlns:p15="http://schemas.microsoft.com/office/powerpoint/2012/main" xmlns:mc="http://schemas.openxmlformats.org/markup-compatibility/2006" type="twoObjOverTx" preserve="1">
+<p:sldLayout xmlns:a="http://schemas.openxmlformats.org/drawingml/2006/main" xmlns:r="http://schemas.openxmlformats.org/officeDocument/2006/relationships" xmlns:p="http://schemas.openxmlformats.org/presentationml/2006/main" type="twoObjOverTx" preserve="1">
   <p:cSld name="Title, 2 Content over Content">
     <p:spTree>
       <p:nvGrpSpPr>
@@ -2623,14 +3787,15 @@
           </a:ln>
         </p:spPr>
         <p:txBody>
-          <a:bodyPr lIns="0" rIns="0" tIns="0" bIns="0" anchor="ctr">
+          <a:bodyPr lIns="0" tIns="0" rIns="0" bIns="0" anchor="ctr">
             <a:noAutofit/>
           </a:bodyPr>
+          <a:lstStyle/>
           <a:p>
             <a:pPr indent="0">
               <a:buNone/>
             </a:pPr>
-            <a:endParaRPr b="0" lang="en-US" sz="1800" spc="-1" strike="noStrike">
+            <a:endParaRPr lang="en-US" sz="1800" b="0" strike="noStrike" spc="-1">
               <a:solidFill>
                 <a:srgbClr val="000000"/>
               </a:solidFill>
@@ -2663,9 +3828,10 @@
           </a:ln>
         </p:spPr>
         <p:txBody>
-          <a:bodyPr lIns="0" rIns="0" tIns="0" bIns="0" anchor="t">
+          <a:bodyPr lIns="0" tIns="0" rIns="0" bIns="0" anchor="t">
             <a:normAutofit/>
           </a:bodyPr>
+          <a:lstStyle/>
           <a:p>
             <a:pPr indent="0">
               <a:lnSpc>
@@ -2676,7 +3842,7 @@
               </a:spcBef>
               <a:buNone/>
             </a:pPr>
-            <a:endParaRPr b="0" lang="en-US" sz="2800" spc="-1" strike="noStrike">
+            <a:endParaRPr lang="en-US" sz="2800" b="0" strike="noStrike" spc="-1">
               <a:solidFill>
                 <a:srgbClr val="000000"/>
               </a:solidFill>
@@ -2709,9 +3875,10 @@
           </a:ln>
         </p:spPr>
         <p:txBody>
-          <a:bodyPr lIns="0" rIns="0" tIns="0" bIns="0" anchor="t">
+          <a:bodyPr lIns="0" tIns="0" rIns="0" bIns="0" anchor="t">
             <a:normAutofit/>
           </a:bodyPr>
+          <a:lstStyle/>
           <a:p>
             <a:pPr indent="0">
               <a:lnSpc>
@@ -2722,7 +3889,7 @@
               </a:spcBef>
               <a:buNone/>
             </a:pPr>
-            <a:endParaRPr b="0" lang="en-US" sz="2800" spc="-1" strike="noStrike">
+            <a:endParaRPr lang="en-US" sz="2800" b="0" strike="noStrike" spc="-1">
               <a:solidFill>
                 <a:srgbClr val="000000"/>
               </a:solidFill>
@@ -2755,9 +3922,10 @@
           </a:ln>
         </p:spPr>
         <p:txBody>
-          <a:bodyPr lIns="0" rIns="0" tIns="0" bIns="0" anchor="t">
+          <a:bodyPr lIns="0" tIns="0" rIns="0" bIns="0" anchor="t">
             <a:normAutofit/>
           </a:bodyPr>
+          <a:lstStyle/>
           <a:p>
             <a:pPr indent="0">
               <a:lnSpc>
@@ -2768,7 +3936,7 @@
               </a:spcBef>
               <a:buNone/>
             </a:pPr>
-            <a:endParaRPr b="0" lang="en-US" sz="2800" spc="-1" strike="noStrike">
+            <a:endParaRPr lang="en-US" sz="2800" b="0" strike="noStrike" spc="-1">
               <a:solidFill>
                 <a:srgbClr val="000000"/>
               </a:solidFill>
@@ -2790,6 +3958,7 @@
         <p:spPr/>
         <p:txBody>
           <a:bodyPr/>
+          <a:lstStyle/>
           <a:p>
             <a:r>
               <a:t>Footer</a:t>
@@ -2810,10 +3979,12 @@
         <p:spPr/>
         <p:txBody>
           <a:bodyPr/>
+          <a:lstStyle/>
           <a:p>
             <a:fld id="{2BF3CEEA-C407-4D18-8BB1-EDBAE17B85A0}" type="slidenum">
-              <a:t>&lt;#&gt;</a:t>
+              <a:t>‹#›</a:t>
             </a:fld>
+            <a:endParaRPr/>
           </a:p>
         </p:txBody>
       </p:sp>
@@ -2830,21 +4001,22 @@
         <p:spPr/>
         <p:txBody>
           <a:bodyPr/>
-          <a:p>
-            <a:r>
-              <a:rPr lang="en-IN"/>
-              <a:t/>
-            </a:r>
+          <a:lstStyle/>
+          <a:p>
+            <a:endParaRPr/>
           </a:p>
         </p:txBody>
       </p:sp>
     </p:spTree>
   </p:cSld>
+  <p:clrMapOvr>
+    <a:masterClrMapping/>
+  </p:clrMapOvr>
 </p:sldLayout>
 </file>
 
 <file path=ppt/slideLayouts/slideLayout22.xml><?xml version="1.0" encoding="utf-8"?>
-<p:sldLayout xmlns:a="http://schemas.openxmlformats.org/drawingml/2006/main" xmlns:p="http://schemas.openxmlformats.org/presentationml/2006/main" xmlns:r="http://schemas.openxmlformats.org/officeDocument/2006/relationships" xmlns:p14="http://schemas.microsoft.com/office/powerpoint/2010/main" xmlns:p15="http://schemas.microsoft.com/office/powerpoint/2012/main" xmlns:mc="http://schemas.openxmlformats.org/markup-compatibility/2006" type="objOverTx" preserve="1">
+<p:sldLayout xmlns:a="http://schemas.openxmlformats.org/drawingml/2006/main" xmlns:r="http://schemas.openxmlformats.org/officeDocument/2006/relationships" xmlns:p="http://schemas.openxmlformats.org/presentationml/2006/main" type="objOverTx" preserve="1">
   <p:cSld name="Title, Content over Content">
     <p:spTree>
       <p:nvGrpSpPr>
@@ -2884,14 +4056,15 @@
           </a:ln>
         </p:spPr>
         <p:txBody>
-          <a:bodyPr lIns="0" rIns="0" tIns="0" bIns="0" anchor="ctr">
+          <a:bodyPr lIns="0" tIns="0" rIns="0" bIns="0" anchor="ctr">
             <a:noAutofit/>
           </a:bodyPr>
+          <a:lstStyle/>
           <a:p>
             <a:pPr indent="0">
               <a:buNone/>
             </a:pPr>
-            <a:endParaRPr b="0" lang="en-US" sz="1800" spc="-1" strike="noStrike">
+            <a:endParaRPr lang="en-US" sz="1800" b="0" strike="noStrike" spc="-1">
               <a:solidFill>
                 <a:srgbClr val="000000"/>
               </a:solidFill>
@@ -2924,9 +4097,10 @@
           </a:ln>
         </p:spPr>
         <p:txBody>
-          <a:bodyPr lIns="0" rIns="0" tIns="0" bIns="0" anchor="t">
+          <a:bodyPr lIns="0" tIns="0" rIns="0" bIns="0" anchor="t">
             <a:normAutofit/>
           </a:bodyPr>
+          <a:lstStyle/>
           <a:p>
             <a:pPr indent="0">
               <a:lnSpc>
@@ -2937,7 +4111,7 @@
               </a:spcBef>
               <a:buNone/>
             </a:pPr>
-            <a:endParaRPr b="0" lang="en-US" sz="2800" spc="-1" strike="noStrike">
+            <a:endParaRPr lang="en-US" sz="2800" b="0" strike="noStrike" spc="-1">
               <a:solidFill>
                 <a:srgbClr val="000000"/>
               </a:solidFill>
@@ -2970,9 +4144,10 @@
           </a:ln>
         </p:spPr>
         <p:txBody>
-          <a:bodyPr lIns="0" rIns="0" tIns="0" bIns="0" anchor="t">
+          <a:bodyPr lIns="0" tIns="0" rIns="0" bIns="0" anchor="t">
             <a:normAutofit/>
           </a:bodyPr>
+          <a:lstStyle/>
           <a:p>
             <a:pPr indent="0">
               <a:lnSpc>
@@ -2983,7 +4158,7 @@
               </a:spcBef>
               <a:buNone/>
             </a:pPr>
-            <a:endParaRPr b="0" lang="en-US" sz="2800" spc="-1" strike="noStrike">
+            <a:endParaRPr lang="en-US" sz="2800" b="0" strike="noStrike" spc="-1">
               <a:solidFill>
                 <a:srgbClr val="000000"/>
               </a:solidFill>
@@ -3005,6 +4180,7 @@
         <p:spPr/>
         <p:txBody>
           <a:bodyPr/>
+          <a:lstStyle/>
           <a:p>
             <a:r>
               <a:t>Footer</a:t>
@@ -3025,10 +4201,12 @@
         <p:spPr/>
         <p:txBody>
           <a:bodyPr/>
+          <a:lstStyle/>
           <a:p>
             <a:fld id="{1A694C53-08FC-4F21-8A7C-E25FCD2E8F5E}" type="slidenum">
-              <a:t>&lt;#&gt;</a:t>
+              <a:t>‹#›</a:t>
             </a:fld>
+            <a:endParaRPr/>
           </a:p>
         </p:txBody>
       </p:sp>
@@ -3045,21 +4223,22 @@
         <p:spPr/>
         <p:txBody>
           <a:bodyPr/>
-          <a:p>
-            <a:r>
-              <a:rPr lang="en-IN"/>
-              <a:t/>
-            </a:r>
+          <a:lstStyle/>
+          <a:p>
+            <a:endParaRPr/>
           </a:p>
         </p:txBody>
       </p:sp>
     </p:spTree>
   </p:cSld>
+  <p:clrMapOvr>
+    <a:masterClrMapping/>
+  </p:clrMapOvr>
 </p:sldLayout>
 </file>
 
 <file path=ppt/slideLayouts/slideLayout23.xml><?xml version="1.0" encoding="utf-8"?>
-<p:sldLayout xmlns:a="http://schemas.openxmlformats.org/drawingml/2006/main" xmlns:p="http://schemas.openxmlformats.org/presentationml/2006/main" xmlns:r="http://schemas.openxmlformats.org/officeDocument/2006/relationships" xmlns:p14="http://schemas.microsoft.com/office/powerpoint/2010/main" xmlns:p15="http://schemas.microsoft.com/office/powerpoint/2012/main" xmlns:mc="http://schemas.openxmlformats.org/markup-compatibility/2006" type="fourObj" preserve="1">
+<p:sldLayout xmlns:a="http://schemas.openxmlformats.org/drawingml/2006/main" xmlns:r="http://schemas.openxmlformats.org/officeDocument/2006/relationships" xmlns:p="http://schemas.openxmlformats.org/presentationml/2006/main" type="fourObj" preserve="1">
   <p:cSld name="Title, 4 Content">
     <p:spTree>
       <p:nvGrpSpPr>
@@ -3099,14 +4278,15 @@
           </a:ln>
         </p:spPr>
         <p:txBody>
-          <a:bodyPr lIns="0" rIns="0" tIns="0" bIns="0" anchor="ctr">
+          <a:bodyPr lIns="0" tIns="0" rIns="0" bIns="0" anchor="ctr">
             <a:noAutofit/>
           </a:bodyPr>
+          <a:lstStyle/>
           <a:p>
             <a:pPr indent="0">
               <a:buNone/>
             </a:pPr>
-            <a:endParaRPr b="0" lang="en-US" sz="1800" spc="-1" strike="noStrike">
+            <a:endParaRPr lang="en-US" sz="1800" b="0" strike="noStrike" spc="-1">
               <a:solidFill>
                 <a:srgbClr val="000000"/>
               </a:solidFill>
@@ -3139,9 +4319,10 @@
           </a:ln>
         </p:spPr>
         <p:txBody>
-          <a:bodyPr lIns="0" rIns="0" tIns="0" bIns="0" anchor="t">
+          <a:bodyPr lIns="0" tIns="0" rIns="0" bIns="0" anchor="t">
             <a:normAutofit/>
           </a:bodyPr>
+          <a:lstStyle/>
           <a:p>
             <a:pPr indent="0">
               <a:lnSpc>
@@ -3152,7 +4333,7 @@
               </a:spcBef>
               <a:buNone/>
             </a:pPr>
-            <a:endParaRPr b="0" lang="en-US" sz="2800" spc="-1" strike="noStrike">
+            <a:endParaRPr lang="en-US" sz="2800" b="0" strike="noStrike" spc="-1">
               <a:solidFill>
                 <a:srgbClr val="000000"/>
               </a:solidFill>
@@ -3185,9 +4366,10 @@
           </a:ln>
         </p:spPr>
         <p:txBody>
-          <a:bodyPr lIns="0" rIns="0" tIns="0" bIns="0" anchor="t">
+          <a:bodyPr lIns="0" tIns="0" rIns="0" bIns="0" anchor="t">
             <a:normAutofit/>
           </a:bodyPr>
+          <a:lstStyle/>
           <a:p>
             <a:pPr indent="0">
               <a:lnSpc>
@@ -3198,7 +4380,7 @@
               </a:spcBef>
               <a:buNone/>
             </a:pPr>
-            <a:endParaRPr b="0" lang="en-US" sz="2800" spc="-1" strike="noStrike">
+            <a:endParaRPr lang="en-US" sz="2800" b="0" strike="noStrike" spc="-1">
               <a:solidFill>
                 <a:srgbClr val="000000"/>
               </a:solidFill>
@@ -3231,9 +4413,10 @@
           </a:ln>
         </p:spPr>
         <p:txBody>
-          <a:bodyPr lIns="0" rIns="0" tIns="0" bIns="0" anchor="t">
+          <a:bodyPr lIns="0" tIns="0" rIns="0" bIns="0" anchor="t">
             <a:normAutofit/>
           </a:bodyPr>
+          <a:lstStyle/>
           <a:p>
             <a:pPr indent="0">
               <a:lnSpc>
@@ -3244,7 +4427,7 @@
               </a:spcBef>
               <a:buNone/>
             </a:pPr>
-            <a:endParaRPr b="0" lang="en-US" sz="2800" spc="-1" strike="noStrike">
+            <a:endParaRPr lang="en-US" sz="2800" b="0" strike="noStrike" spc="-1">
               <a:solidFill>
                 <a:srgbClr val="000000"/>
               </a:solidFill>
@@ -3277,9 +4460,10 @@
           </a:ln>
         </p:spPr>
         <p:txBody>
-          <a:bodyPr lIns="0" rIns="0" tIns="0" bIns="0" anchor="t">
+          <a:bodyPr lIns="0" tIns="0" rIns="0" bIns="0" anchor="t">
             <a:normAutofit/>
           </a:bodyPr>
+          <a:lstStyle/>
           <a:p>
             <a:pPr indent="0">
               <a:lnSpc>
@@ -3290,7 +4474,7 @@
               </a:spcBef>
               <a:buNone/>
             </a:pPr>
-            <a:endParaRPr b="0" lang="en-US" sz="2800" spc="-1" strike="noStrike">
+            <a:endParaRPr lang="en-US" sz="2800" b="0" strike="noStrike" spc="-1">
               <a:solidFill>
                 <a:srgbClr val="000000"/>
               </a:solidFill>
@@ -3312,6 +4496,7 @@
         <p:spPr/>
         <p:txBody>
           <a:bodyPr/>
+          <a:lstStyle/>
           <a:p>
             <a:r>
               <a:t>Footer</a:t>
@@ -3332,10 +4517,12 @@
         <p:spPr/>
         <p:txBody>
           <a:bodyPr/>
+          <a:lstStyle/>
           <a:p>
             <a:fld id="{B9C2774C-8B24-43B0-803D-6999307362E4}" type="slidenum">
-              <a:t>&lt;#&gt;</a:t>
+              <a:t>‹#›</a:t>
             </a:fld>
+            <a:endParaRPr/>
           </a:p>
         </p:txBody>
       </p:sp>
@@ -3352,21 +4539,22 @@
         <p:spPr/>
         <p:txBody>
           <a:bodyPr/>
-          <a:p>
-            <a:r>
-              <a:rPr lang="en-IN"/>
-              <a:t/>
-            </a:r>
+          <a:lstStyle/>
+          <a:p>
+            <a:endParaRPr/>
           </a:p>
         </p:txBody>
       </p:sp>
     </p:spTree>
   </p:cSld>
+  <p:clrMapOvr>
+    <a:masterClrMapping/>
+  </p:clrMapOvr>
 </p:sldLayout>
 </file>
 
 <file path=ppt/slideLayouts/slideLayout24.xml><?xml version="1.0" encoding="utf-8"?>
-<p:sldLayout xmlns:a="http://schemas.openxmlformats.org/drawingml/2006/main" xmlns:p="http://schemas.openxmlformats.org/presentationml/2006/main" xmlns:r="http://schemas.openxmlformats.org/officeDocument/2006/relationships" xmlns:p14="http://schemas.microsoft.com/office/powerpoint/2010/main" xmlns:p15="http://schemas.microsoft.com/office/powerpoint/2012/main" xmlns:mc="http://schemas.openxmlformats.org/markup-compatibility/2006" type="blank" preserve="1">
+<p:sldLayout xmlns:a="http://schemas.openxmlformats.org/drawingml/2006/main" xmlns:r="http://schemas.openxmlformats.org/officeDocument/2006/relationships" xmlns:p="http://schemas.openxmlformats.org/presentationml/2006/main" type="blank" preserve="1">
   <p:cSld name="Title, 6 Content">
     <p:spTree>
       <p:nvGrpSpPr>
@@ -3406,14 +4594,15 @@
           </a:ln>
         </p:spPr>
         <p:txBody>
-          <a:bodyPr lIns="0" rIns="0" tIns="0" bIns="0" anchor="ctr">
+          <a:bodyPr lIns="0" tIns="0" rIns="0" bIns="0" anchor="ctr">
             <a:noAutofit/>
           </a:bodyPr>
+          <a:lstStyle/>
           <a:p>
             <a:pPr indent="0">
               <a:buNone/>
             </a:pPr>
-            <a:endParaRPr b="0" lang="en-US" sz="1800" spc="-1" strike="noStrike">
+            <a:endParaRPr lang="en-US" sz="1800" b="0" strike="noStrike" spc="-1">
               <a:solidFill>
                 <a:srgbClr val="000000"/>
               </a:solidFill>
@@ -3446,9 +4635,10 @@
           </a:ln>
         </p:spPr>
         <p:txBody>
-          <a:bodyPr lIns="0" rIns="0" tIns="0" bIns="0" anchor="t">
+          <a:bodyPr lIns="0" tIns="0" rIns="0" bIns="0" anchor="t">
             <a:normAutofit/>
           </a:bodyPr>
+          <a:lstStyle/>
           <a:p>
             <a:pPr indent="0">
               <a:lnSpc>
@@ -3459,7 +4649,7 @@
               </a:spcBef>
               <a:buNone/>
             </a:pPr>
-            <a:endParaRPr b="0" lang="en-US" sz="2800" spc="-1" strike="noStrike">
+            <a:endParaRPr lang="en-US" sz="2800" b="0" strike="noStrike" spc="-1">
               <a:solidFill>
                 <a:srgbClr val="000000"/>
               </a:solidFill>
@@ -3492,9 +4682,10 @@
           </a:ln>
         </p:spPr>
         <p:txBody>
-          <a:bodyPr lIns="0" rIns="0" tIns="0" bIns="0" anchor="t">
+          <a:bodyPr lIns="0" tIns="0" rIns="0" bIns="0" anchor="t">
             <a:normAutofit/>
           </a:bodyPr>
+          <a:lstStyle/>
           <a:p>
             <a:pPr indent="0">
               <a:lnSpc>
@@ -3505,7 +4696,7 @@
               </a:spcBef>
               <a:buNone/>
             </a:pPr>
-            <a:endParaRPr b="0" lang="en-US" sz="2800" spc="-1" strike="noStrike">
+            <a:endParaRPr lang="en-US" sz="2800" b="0" strike="noStrike" spc="-1">
               <a:solidFill>
                 <a:srgbClr val="000000"/>
               </a:solidFill>
@@ -3538,9 +4729,10 @@
           </a:ln>
         </p:spPr>
         <p:txBody>
-          <a:bodyPr lIns="0" rIns="0" tIns="0" bIns="0" anchor="t">
+          <a:bodyPr lIns="0" tIns="0" rIns="0" bIns="0" anchor="t">
             <a:normAutofit/>
           </a:bodyPr>
+          <a:lstStyle/>
           <a:p>
             <a:pPr indent="0">
               <a:lnSpc>
@@ -3551,7 +4743,7 @@
               </a:spcBef>
               <a:buNone/>
             </a:pPr>
-            <a:endParaRPr b="0" lang="en-US" sz="2800" spc="-1" strike="noStrike">
+            <a:endParaRPr lang="en-US" sz="2800" b="0" strike="noStrike" spc="-1">
               <a:solidFill>
                 <a:srgbClr val="000000"/>
               </a:solidFill>
@@ -3584,9 +4776,10 @@
           </a:ln>
         </p:spPr>
         <p:txBody>
-          <a:bodyPr lIns="0" rIns="0" tIns="0" bIns="0" anchor="t">
+          <a:bodyPr lIns="0" tIns="0" rIns="0" bIns="0" anchor="t">
             <a:normAutofit/>
           </a:bodyPr>
+          <a:lstStyle/>
           <a:p>
             <a:pPr indent="0">
               <a:lnSpc>
@@ -3597,7 +4790,7 @@
               </a:spcBef>
               <a:buNone/>
             </a:pPr>
-            <a:endParaRPr b="0" lang="en-US" sz="2800" spc="-1" strike="noStrike">
+            <a:endParaRPr lang="en-US" sz="2800" b="0" strike="noStrike" spc="-1">
               <a:solidFill>
                 <a:srgbClr val="000000"/>
               </a:solidFill>
@@ -3630,9 +4823,10 @@
           </a:ln>
         </p:spPr>
         <p:txBody>
-          <a:bodyPr lIns="0" rIns="0" tIns="0" bIns="0" anchor="t">
+          <a:bodyPr lIns="0" tIns="0" rIns="0" bIns="0" anchor="t">
             <a:normAutofit/>
           </a:bodyPr>
+          <a:lstStyle/>
           <a:p>
             <a:pPr indent="0">
               <a:lnSpc>
@@ -3643,7 +4837,7 @@
               </a:spcBef>
               <a:buNone/>
             </a:pPr>
-            <a:endParaRPr b="0" lang="en-US" sz="2800" spc="-1" strike="noStrike">
+            <a:endParaRPr lang="en-US" sz="2800" b="0" strike="noStrike" spc="-1">
               <a:solidFill>
                 <a:srgbClr val="000000"/>
               </a:solidFill>
@@ -3676,9 +4870,10 @@
           </a:ln>
         </p:spPr>
         <p:txBody>
-          <a:bodyPr lIns="0" rIns="0" tIns="0" bIns="0" anchor="t">
+          <a:bodyPr lIns="0" tIns="0" rIns="0" bIns="0" anchor="t">
             <a:normAutofit/>
           </a:bodyPr>
+          <a:lstStyle/>
           <a:p>
             <a:pPr indent="0">
               <a:lnSpc>
@@ -3689,7 +4884,7 @@
               </a:spcBef>
               <a:buNone/>
             </a:pPr>
-            <a:endParaRPr b="0" lang="en-US" sz="2800" spc="-1" strike="noStrike">
+            <a:endParaRPr lang="en-US" sz="2800" b="0" strike="noStrike" spc="-1">
               <a:solidFill>
                 <a:srgbClr val="000000"/>
               </a:solidFill>
@@ -3711,6 +4906,7 @@
         <p:spPr/>
         <p:txBody>
           <a:bodyPr/>
+          <a:lstStyle/>
           <a:p>
             <a:r>
               <a:t>Footer</a:t>
@@ -3731,10 +4927,12 @@
         <p:spPr/>
         <p:txBody>
           <a:bodyPr/>
+          <a:lstStyle/>
           <a:p>
             <a:fld id="{B7B66674-F04D-40FD-8883-E44B6B5F8902}" type="slidenum">
-              <a:t>&lt;#&gt;</a:t>
+              <a:t>‹#›</a:t>
             </a:fld>
+            <a:endParaRPr/>
           </a:p>
         </p:txBody>
       </p:sp>
@@ -3751,21 +4949,22 @@
         <p:spPr/>
         <p:txBody>
           <a:bodyPr/>
-          <a:p>
-            <a:r>
-              <a:rPr lang="en-IN"/>
-              <a:t/>
-            </a:r>
+          <a:lstStyle/>
+          <a:p>
+            <a:endParaRPr/>
           </a:p>
         </p:txBody>
       </p:sp>
     </p:spTree>
   </p:cSld>
+  <p:clrMapOvr>
+    <a:masterClrMapping/>
+  </p:clrMapOvr>
 </p:sldLayout>
 </file>
 
 <file path=ppt/slideLayouts/slideLayout3.xml><?xml version="1.0" encoding="utf-8"?>
-<p:sldLayout xmlns:a="http://schemas.openxmlformats.org/drawingml/2006/main" xmlns:p="http://schemas.openxmlformats.org/presentationml/2006/main" xmlns:r="http://schemas.openxmlformats.org/officeDocument/2006/relationships" xmlns:p14="http://schemas.microsoft.com/office/powerpoint/2010/main" xmlns:p15="http://schemas.microsoft.com/office/powerpoint/2012/main" xmlns:mc="http://schemas.openxmlformats.org/markup-compatibility/2006" type="obj" preserve="1">
+<p:sldLayout xmlns:a="http://schemas.openxmlformats.org/drawingml/2006/main" xmlns:r="http://schemas.openxmlformats.org/officeDocument/2006/relationships" xmlns:p="http://schemas.openxmlformats.org/presentationml/2006/main" type="obj" preserve="1">
   <p:cSld name="Title, Content">
     <p:spTree>
       <p:nvGrpSpPr>
@@ -3805,14 +5004,15 @@
           </a:ln>
         </p:spPr>
         <p:txBody>
-          <a:bodyPr lIns="0" rIns="0" tIns="0" bIns="0" anchor="ctr">
+          <a:bodyPr lIns="0" tIns="0" rIns="0" bIns="0" anchor="ctr">
             <a:noAutofit/>
           </a:bodyPr>
+          <a:lstStyle/>
           <a:p>
             <a:pPr indent="0">
               <a:buNone/>
             </a:pPr>
-            <a:endParaRPr b="0" lang="en-US" sz="1800" spc="-1" strike="noStrike">
+            <a:endParaRPr lang="en-US" sz="1800" b="0" strike="noStrike" spc="-1">
               <a:solidFill>
                 <a:srgbClr val="000000"/>
               </a:solidFill>
@@ -3845,9 +5045,10 @@
           </a:ln>
         </p:spPr>
         <p:txBody>
-          <a:bodyPr lIns="0" rIns="0" tIns="0" bIns="0" anchor="t">
+          <a:bodyPr lIns="0" tIns="0" rIns="0" bIns="0" anchor="t">
             <a:normAutofit/>
           </a:bodyPr>
+          <a:lstStyle/>
           <a:p>
             <a:pPr indent="0">
               <a:lnSpc>
@@ -3858,7 +5059,7 @@
               </a:spcBef>
               <a:buNone/>
             </a:pPr>
-            <a:endParaRPr b="0" lang="en-US" sz="2800" spc="-1" strike="noStrike">
+            <a:endParaRPr lang="en-US" sz="2800" b="0" strike="noStrike" spc="-1">
               <a:solidFill>
                 <a:srgbClr val="000000"/>
               </a:solidFill>
@@ -3880,6 +5081,7 @@
         <p:spPr/>
         <p:txBody>
           <a:bodyPr/>
+          <a:lstStyle/>
           <a:p>
             <a:r>
               <a:t>Footer</a:t>
@@ -3900,10 +5102,12 @@
         <p:spPr/>
         <p:txBody>
           <a:bodyPr/>
+          <a:lstStyle/>
           <a:p>
             <a:fld id="{49B4C20E-52C3-494B-B9AA-7D9882572810}" type="slidenum">
-              <a:t>&lt;#&gt;</a:t>
+              <a:t>‹#›</a:t>
             </a:fld>
+            <a:endParaRPr/>
           </a:p>
         </p:txBody>
       </p:sp>
@@ -3920,21 +5124,22 @@
         <p:spPr/>
         <p:txBody>
           <a:bodyPr/>
-          <a:p>
-            <a:r>
-              <a:rPr lang="en-IN"/>
-              <a:t/>
-            </a:r>
+          <a:lstStyle/>
+          <a:p>
+            <a:endParaRPr/>
           </a:p>
         </p:txBody>
       </p:sp>
     </p:spTree>
   </p:cSld>
+  <p:clrMapOvr>
+    <a:masterClrMapping/>
+  </p:clrMapOvr>
 </p:sldLayout>
 </file>
 
 <file path=ppt/slideLayouts/slideLayout4.xml><?xml version="1.0" encoding="utf-8"?>
-<p:sldLayout xmlns:a="http://schemas.openxmlformats.org/drawingml/2006/main" xmlns:p="http://schemas.openxmlformats.org/presentationml/2006/main" xmlns:r="http://schemas.openxmlformats.org/officeDocument/2006/relationships" xmlns:p14="http://schemas.microsoft.com/office/powerpoint/2010/main" xmlns:p15="http://schemas.microsoft.com/office/powerpoint/2012/main" xmlns:mc="http://schemas.openxmlformats.org/markup-compatibility/2006" type="twoObj" preserve="1">
+<p:sldLayout xmlns:a="http://schemas.openxmlformats.org/drawingml/2006/main" xmlns:r="http://schemas.openxmlformats.org/officeDocument/2006/relationships" xmlns:p="http://schemas.openxmlformats.org/presentationml/2006/main" type="twoObj" preserve="1">
   <p:cSld name="Title, 2 Content">
     <p:spTree>
       <p:nvGrpSpPr>
@@ -3974,14 +5179,15 @@
           </a:ln>
         </p:spPr>
         <p:txBody>
-          <a:bodyPr lIns="0" rIns="0" tIns="0" bIns="0" anchor="ctr">
+          <a:bodyPr lIns="0" tIns="0" rIns="0" bIns="0" anchor="ctr">
             <a:noAutofit/>
           </a:bodyPr>
+          <a:lstStyle/>
           <a:p>
             <a:pPr indent="0">
               <a:buNone/>
             </a:pPr>
-            <a:endParaRPr b="0" lang="en-US" sz="1800" spc="-1" strike="noStrike">
+            <a:endParaRPr lang="en-US" sz="1800" b="0" strike="noStrike" spc="-1">
               <a:solidFill>
                 <a:srgbClr val="000000"/>
               </a:solidFill>
@@ -4014,9 +5220,10 @@
           </a:ln>
         </p:spPr>
         <p:txBody>
-          <a:bodyPr lIns="0" rIns="0" tIns="0" bIns="0" anchor="t">
+          <a:bodyPr lIns="0" tIns="0" rIns="0" bIns="0" anchor="t">
             <a:normAutofit/>
           </a:bodyPr>
+          <a:lstStyle/>
           <a:p>
             <a:pPr indent="0">
               <a:lnSpc>
@@ -4027,7 +5234,7 @@
               </a:spcBef>
               <a:buNone/>
             </a:pPr>
-            <a:endParaRPr b="0" lang="en-US" sz="2800" spc="-1" strike="noStrike">
+            <a:endParaRPr lang="en-US" sz="2800" b="0" strike="noStrike" spc="-1">
               <a:solidFill>
                 <a:srgbClr val="000000"/>
               </a:solidFill>
@@ -4060,9 +5267,10 @@
           </a:ln>
         </p:spPr>
         <p:txBody>
-          <a:bodyPr lIns="0" rIns="0" tIns="0" bIns="0" anchor="t">
+          <a:bodyPr lIns="0" tIns="0" rIns="0" bIns="0" anchor="t">
             <a:normAutofit/>
           </a:bodyPr>
+          <a:lstStyle/>
           <a:p>
             <a:pPr indent="0">
               <a:lnSpc>
@@ -4073,7 +5281,7 @@
               </a:spcBef>
               <a:buNone/>
             </a:pPr>
-            <a:endParaRPr b="0" lang="en-US" sz="2800" spc="-1" strike="noStrike">
+            <a:endParaRPr lang="en-US" sz="2800" b="0" strike="noStrike" spc="-1">
               <a:solidFill>
                 <a:srgbClr val="000000"/>
               </a:solidFill>
@@ -4095,6 +5303,7 @@
         <p:spPr/>
         <p:txBody>
           <a:bodyPr/>
+          <a:lstStyle/>
           <a:p>
             <a:r>
               <a:t>Footer</a:t>
@@ -4115,10 +5324,12 @@
         <p:spPr/>
         <p:txBody>
           <a:bodyPr/>
+          <a:lstStyle/>
           <a:p>
             <a:fld id="{6D916898-0975-4CF1-BF47-FB0D50253040}" type="slidenum">
-              <a:t>&lt;#&gt;</a:t>
+              <a:t>‹#›</a:t>
             </a:fld>
+            <a:endParaRPr/>
           </a:p>
         </p:txBody>
       </p:sp>
@@ -4135,21 +5346,22 @@
         <p:spPr/>
         <p:txBody>
           <a:bodyPr/>
-          <a:p>
-            <a:r>
-              <a:rPr lang="en-IN"/>
-              <a:t/>
-            </a:r>
+          <a:lstStyle/>
+          <a:p>
+            <a:endParaRPr/>
           </a:p>
         </p:txBody>
       </p:sp>
     </p:spTree>
   </p:cSld>
+  <p:clrMapOvr>
+    <a:masterClrMapping/>
+  </p:clrMapOvr>
 </p:sldLayout>
 </file>
 
 <file path=ppt/slideLayouts/slideLayout5.xml><?xml version="1.0" encoding="utf-8"?>
-<p:sldLayout xmlns:a="http://schemas.openxmlformats.org/drawingml/2006/main" xmlns:p="http://schemas.openxmlformats.org/presentationml/2006/main" xmlns:r="http://schemas.openxmlformats.org/officeDocument/2006/relationships" xmlns:p14="http://schemas.microsoft.com/office/powerpoint/2010/main" xmlns:p15="http://schemas.microsoft.com/office/powerpoint/2012/main" xmlns:mc="http://schemas.openxmlformats.org/markup-compatibility/2006" type="titleOnly" preserve="1">
+<p:sldLayout xmlns:a="http://schemas.openxmlformats.org/drawingml/2006/main" xmlns:r="http://schemas.openxmlformats.org/officeDocument/2006/relationships" xmlns:p="http://schemas.openxmlformats.org/presentationml/2006/main" type="titleOnly" preserve="1">
   <p:cSld name="Title Only">
     <p:spTree>
       <p:nvGrpSpPr>
@@ -4189,14 +5401,15 @@
           </a:ln>
         </p:spPr>
         <p:txBody>
-          <a:bodyPr lIns="0" rIns="0" tIns="0" bIns="0" anchor="ctr">
+          <a:bodyPr lIns="0" tIns="0" rIns="0" bIns="0" anchor="ctr">
             <a:noAutofit/>
           </a:bodyPr>
+          <a:lstStyle/>
           <a:p>
             <a:pPr indent="0">
               <a:buNone/>
             </a:pPr>
-            <a:endParaRPr b="0" lang="en-US" sz="1800" spc="-1" strike="noStrike">
+            <a:endParaRPr lang="en-US" sz="1800" b="0" strike="noStrike" spc="-1">
               <a:solidFill>
                 <a:srgbClr val="000000"/>
               </a:solidFill>
@@ -4218,6 +5431,7 @@
         <p:spPr/>
         <p:txBody>
           <a:bodyPr/>
+          <a:lstStyle/>
           <a:p>
             <a:r>
               <a:t>Footer</a:t>
@@ -4238,10 +5452,12 @@
         <p:spPr/>
         <p:txBody>
           <a:bodyPr/>
+          <a:lstStyle/>
           <a:p>
             <a:fld id="{828CABB0-F659-43C0-9B9E-321FE20AF771}" type="slidenum">
-              <a:t>&lt;#&gt;</a:t>
+              <a:t>‹#›</a:t>
             </a:fld>
+            <a:endParaRPr/>
           </a:p>
         </p:txBody>
       </p:sp>
@@ -4258,21 +5474,22 @@
         <p:spPr/>
         <p:txBody>
           <a:bodyPr/>
-          <a:p>
-            <a:r>
-              <a:rPr lang="en-IN"/>
-              <a:t/>
-            </a:r>
+          <a:lstStyle/>
+          <a:p>
+            <a:endParaRPr/>
           </a:p>
         </p:txBody>
       </p:sp>
     </p:spTree>
   </p:cSld>
+  <p:clrMapOvr>
+    <a:masterClrMapping/>
+  </p:clrMapOvr>
 </p:sldLayout>
 </file>
 
 <file path=ppt/slideLayouts/slideLayout6.xml><?xml version="1.0" encoding="utf-8"?>
-<p:sldLayout xmlns:a="http://schemas.openxmlformats.org/drawingml/2006/main" xmlns:p="http://schemas.openxmlformats.org/presentationml/2006/main" xmlns:r="http://schemas.openxmlformats.org/officeDocument/2006/relationships" xmlns:p14="http://schemas.microsoft.com/office/powerpoint/2010/main" xmlns:p15="http://schemas.microsoft.com/office/powerpoint/2012/main" xmlns:mc="http://schemas.openxmlformats.org/markup-compatibility/2006" type="objOnly" preserve="1">
+<p:sldLayout xmlns:a="http://schemas.openxmlformats.org/drawingml/2006/main" xmlns:r="http://schemas.openxmlformats.org/officeDocument/2006/relationships" xmlns:p="http://schemas.openxmlformats.org/presentationml/2006/main" type="objOnly" preserve="1">
   <p:cSld name="Centered Text">
     <p:spTree>
       <p:nvGrpSpPr>
@@ -4312,12 +5529,13 @@
           </a:ln>
         </p:spPr>
         <p:txBody>
-          <a:bodyPr lIns="0" rIns="0" tIns="0" bIns="0" anchor="ctr">
+          <a:bodyPr lIns="0" tIns="0" rIns="0" bIns="0" anchor="ctr">
             <a:noAutofit/>
           </a:bodyPr>
+          <a:lstStyle/>
           <a:p>
             <a:pPr algn="ctr"/>
-            <a:endParaRPr b="0" lang="en-IN" sz="3200" spc="-1" strike="noStrike">
+            <a:endParaRPr lang="en-IN" sz="3200" b="0" strike="noStrike" spc="-1">
               <a:solidFill>
                 <a:srgbClr val="000000"/>
               </a:solidFill>
@@ -4339,6 +5557,7 @@
         <p:spPr/>
         <p:txBody>
           <a:bodyPr/>
+          <a:lstStyle/>
           <a:p>
             <a:r>
               <a:t>Footer</a:t>
@@ -4359,10 +5578,12 @@
         <p:spPr/>
         <p:txBody>
           <a:bodyPr/>
+          <a:lstStyle/>
           <a:p>
             <a:fld id="{F3313670-F5FB-4362-BBE2-945B2ED9B9D5}" type="slidenum">
-              <a:t>&lt;#&gt;</a:t>
+              <a:t>‹#›</a:t>
             </a:fld>
+            <a:endParaRPr/>
           </a:p>
         </p:txBody>
       </p:sp>
@@ -4379,21 +5600,22 @@
         <p:spPr/>
         <p:txBody>
           <a:bodyPr/>
-          <a:p>
-            <a:r>
-              <a:rPr lang="en-IN"/>
-              <a:t/>
-            </a:r>
+          <a:lstStyle/>
+          <a:p>
+            <a:endParaRPr/>
           </a:p>
         </p:txBody>
       </p:sp>
     </p:spTree>
   </p:cSld>
+  <p:clrMapOvr>
+    <a:masterClrMapping/>
+  </p:clrMapOvr>
 </p:sldLayout>
 </file>
 
 <file path=ppt/slideLayouts/slideLayout7.xml><?xml version="1.0" encoding="utf-8"?>
-<p:sldLayout xmlns:a="http://schemas.openxmlformats.org/drawingml/2006/main" xmlns:p="http://schemas.openxmlformats.org/presentationml/2006/main" xmlns:r="http://schemas.openxmlformats.org/officeDocument/2006/relationships" xmlns:p14="http://schemas.microsoft.com/office/powerpoint/2010/main" xmlns:p15="http://schemas.microsoft.com/office/powerpoint/2012/main" xmlns:mc="http://schemas.openxmlformats.org/markup-compatibility/2006" type="twoObjAndObj" preserve="1">
+<p:sldLayout xmlns:a="http://schemas.openxmlformats.org/drawingml/2006/main" xmlns:r="http://schemas.openxmlformats.org/officeDocument/2006/relationships" xmlns:p="http://schemas.openxmlformats.org/presentationml/2006/main" type="twoObjAndObj" preserve="1">
   <p:cSld name="Title, 2 Content and Content">
     <p:spTree>
       <p:nvGrpSpPr>
@@ -4433,14 +5655,15 @@
           </a:ln>
         </p:spPr>
         <p:txBody>
-          <a:bodyPr lIns="0" rIns="0" tIns="0" bIns="0" anchor="ctr">
+          <a:bodyPr lIns="0" tIns="0" rIns="0" bIns="0" anchor="ctr">
             <a:noAutofit/>
           </a:bodyPr>
+          <a:lstStyle/>
           <a:p>
             <a:pPr indent="0">
               <a:buNone/>
             </a:pPr>
-            <a:endParaRPr b="0" lang="en-US" sz="1800" spc="-1" strike="noStrike">
+            <a:endParaRPr lang="en-US" sz="1800" b="0" strike="noStrike" spc="-1">
               <a:solidFill>
                 <a:srgbClr val="000000"/>
               </a:solidFill>
@@ -4473,9 +5696,10 @@
           </a:ln>
         </p:spPr>
         <p:txBody>
-          <a:bodyPr lIns="0" rIns="0" tIns="0" bIns="0" anchor="t">
+          <a:bodyPr lIns="0" tIns="0" rIns="0" bIns="0" anchor="t">
             <a:normAutofit/>
           </a:bodyPr>
+          <a:lstStyle/>
           <a:p>
             <a:pPr indent="0">
               <a:lnSpc>
@@ -4486,7 +5710,7 @@
               </a:spcBef>
               <a:buNone/>
             </a:pPr>
-            <a:endParaRPr b="0" lang="en-US" sz="2800" spc="-1" strike="noStrike">
+            <a:endParaRPr lang="en-US" sz="2800" b="0" strike="noStrike" spc="-1">
               <a:solidFill>
                 <a:srgbClr val="000000"/>
               </a:solidFill>
@@ -4519,9 +5743,10 @@
           </a:ln>
         </p:spPr>
         <p:txBody>
-          <a:bodyPr lIns="0" rIns="0" tIns="0" bIns="0" anchor="t">
+          <a:bodyPr lIns="0" tIns="0" rIns="0" bIns="0" anchor="t">
             <a:normAutofit/>
           </a:bodyPr>
+          <a:lstStyle/>
           <a:p>
             <a:pPr indent="0">
               <a:lnSpc>
@@ -4532,7 +5757,7 @@
               </a:spcBef>
               <a:buNone/>
             </a:pPr>
-            <a:endParaRPr b="0" lang="en-US" sz="2800" spc="-1" strike="noStrike">
+            <a:endParaRPr lang="en-US" sz="2800" b="0" strike="noStrike" spc="-1">
               <a:solidFill>
                 <a:srgbClr val="000000"/>
               </a:solidFill>
@@ -4565,9 +5790,10 @@
           </a:ln>
         </p:spPr>
         <p:txBody>
-          <a:bodyPr lIns="0" rIns="0" tIns="0" bIns="0" anchor="t">
+          <a:bodyPr lIns="0" tIns="0" rIns="0" bIns="0" anchor="t">
             <a:normAutofit/>
           </a:bodyPr>
+          <a:lstStyle/>
           <a:p>
             <a:pPr indent="0">
               <a:lnSpc>
@@ -4578,7 +5804,7 @@
               </a:spcBef>
               <a:buNone/>
             </a:pPr>
-            <a:endParaRPr b="0" lang="en-US" sz="2800" spc="-1" strike="noStrike">
+            <a:endParaRPr lang="en-US" sz="2800" b="0" strike="noStrike" spc="-1">
               <a:solidFill>
                 <a:srgbClr val="000000"/>
               </a:solidFill>
@@ -4600,6 +5826,7 @@
         <p:spPr/>
         <p:txBody>
           <a:bodyPr/>
+          <a:lstStyle/>
           <a:p>
             <a:r>
               <a:t>Footer</a:t>
@@ -4620,10 +5847,12 @@
         <p:spPr/>
         <p:txBody>
           <a:bodyPr/>
+          <a:lstStyle/>
           <a:p>
             <a:fld id="{953E8A23-7D46-4BE4-91F8-EA199EF09461}" type="slidenum">
-              <a:t>&lt;#&gt;</a:t>
+              <a:t>‹#›</a:t>
             </a:fld>
+            <a:endParaRPr/>
           </a:p>
         </p:txBody>
       </p:sp>
@@ -4640,21 +5869,22 @@
         <p:spPr/>
         <p:txBody>
           <a:bodyPr/>
-          <a:p>
-            <a:r>
-              <a:rPr lang="en-IN"/>
-              <a:t/>
-            </a:r>
+          <a:lstStyle/>
+          <a:p>
+            <a:endParaRPr/>
           </a:p>
         </p:txBody>
       </p:sp>
     </p:spTree>
   </p:cSld>
+  <p:clrMapOvr>
+    <a:masterClrMapping/>
+  </p:clrMapOvr>
 </p:sldLayout>
 </file>
 
 <file path=ppt/slideLayouts/slideLayout8.xml><?xml version="1.0" encoding="utf-8"?>
-<p:sldLayout xmlns:a="http://schemas.openxmlformats.org/drawingml/2006/main" xmlns:p="http://schemas.openxmlformats.org/presentationml/2006/main" xmlns:r="http://schemas.openxmlformats.org/officeDocument/2006/relationships" xmlns:p14="http://schemas.microsoft.com/office/powerpoint/2010/main" xmlns:p15="http://schemas.microsoft.com/office/powerpoint/2012/main" xmlns:mc="http://schemas.openxmlformats.org/markup-compatibility/2006" type="objAndTwoObj" preserve="1">
+<p:sldLayout xmlns:a="http://schemas.openxmlformats.org/drawingml/2006/main" xmlns:r="http://schemas.openxmlformats.org/officeDocument/2006/relationships" xmlns:p="http://schemas.openxmlformats.org/presentationml/2006/main" type="objAndTwoObj" preserve="1">
   <p:cSld name="Title Content and 2 Content">
     <p:spTree>
       <p:nvGrpSpPr>
@@ -4694,14 +5924,15 @@
           </a:ln>
         </p:spPr>
         <p:txBody>
-          <a:bodyPr lIns="0" rIns="0" tIns="0" bIns="0" anchor="ctr">
+          <a:bodyPr lIns="0" tIns="0" rIns="0" bIns="0" anchor="ctr">
             <a:noAutofit/>
           </a:bodyPr>
+          <a:lstStyle/>
           <a:p>
             <a:pPr indent="0">
               <a:buNone/>
             </a:pPr>
-            <a:endParaRPr b="0" lang="en-US" sz="1800" spc="-1" strike="noStrike">
+            <a:endParaRPr lang="en-US" sz="1800" b="0" strike="noStrike" spc="-1">
               <a:solidFill>
                 <a:srgbClr val="000000"/>
               </a:solidFill>
@@ -4734,9 +5965,10 @@
           </a:ln>
         </p:spPr>
         <p:txBody>
-          <a:bodyPr lIns="0" rIns="0" tIns="0" bIns="0" anchor="t">
+          <a:bodyPr lIns="0" tIns="0" rIns="0" bIns="0" anchor="t">
             <a:normAutofit/>
           </a:bodyPr>
+          <a:lstStyle/>
           <a:p>
             <a:pPr indent="0">
               <a:lnSpc>
@@ -4747,7 +5979,7 @@
               </a:spcBef>
               <a:buNone/>
             </a:pPr>
-            <a:endParaRPr b="0" lang="en-US" sz="2800" spc="-1" strike="noStrike">
+            <a:endParaRPr lang="en-US" sz="2800" b="0" strike="noStrike" spc="-1">
               <a:solidFill>
                 <a:srgbClr val="000000"/>
               </a:solidFill>
@@ -4780,9 +6012,10 @@
           </a:ln>
         </p:spPr>
         <p:txBody>
-          <a:bodyPr lIns="0" rIns="0" tIns="0" bIns="0" anchor="t">
+          <a:bodyPr lIns="0" tIns="0" rIns="0" bIns="0" anchor="t">
             <a:normAutofit/>
           </a:bodyPr>
+          <a:lstStyle/>
           <a:p>
             <a:pPr indent="0">
               <a:lnSpc>
@@ -4793,7 +6026,7 @@
               </a:spcBef>
               <a:buNone/>
             </a:pPr>
-            <a:endParaRPr b="0" lang="en-US" sz="2800" spc="-1" strike="noStrike">
+            <a:endParaRPr lang="en-US" sz="2800" b="0" strike="noStrike" spc="-1">
               <a:solidFill>
                 <a:srgbClr val="000000"/>
               </a:solidFill>
@@ -4826,9 +6059,10 @@
           </a:ln>
         </p:spPr>
         <p:txBody>
-          <a:bodyPr lIns="0" rIns="0" tIns="0" bIns="0" anchor="t">
+          <a:bodyPr lIns="0" tIns="0" rIns="0" bIns="0" anchor="t">
             <a:normAutofit/>
           </a:bodyPr>
+          <a:lstStyle/>
           <a:p>
             <a:pPr indent="0">
               <a:lnSpc>
@@ -4839,7 +6073,7 @@
               </a:spcBef>
               <a:buNone/>
             </a:pPr>
-            <a:endParaRPr b="0" lang="en-US" sz="2800" spc="-1" strike="noStrike">
+            <a:endParaRPr lang="en-US" sz="2800" b="0" strike="noStrike" spc="-1">
               <a:solidFill>
                 <a:srgbClr val="000000"/>
               </a:solidFill>
@@ -4861,6 +6095,7 @@
         <p:spPr/>
         <p:txBody>
           <a:bodyPr/>
+          <a:lstStyle/>
           <a:p>
             <a:r>
               <a:t>Footer</a:t>
@@ -4881,10 +6116,12 @@
         <p:spPr/>
         <p:txBody>
           <a:bodyPr/>
+          <a:lstStyle/>
           <a:p>
             <a:fld id="{BEF4F353-F8BC-4E79-B136-949E29E3777C}" type="slidenum">
-              <a:t>&lt;#&gt;</a:t>
+              <a:t>‹#›</a:t>
             </a:fld>
+            <a:endParaRPr/>
           </a:p>
         </p:txBody>
       </p:sp>
@@ -4901,21 +6138,22 @@
         <p:spPr/>
         <p:txBody>
           <a:bodyPr/>
-          <a:p>
-            <a:r>
-              <a:rPr lang="en-IN"/>
-              <a:t/>
-            </a:r>
+          <a:lstStyle/>
+          <a:p>
+            <a:endParaRPr/>
           </a:p>
         </p:txBody>
       </p:sp>
     </p:spTree>
   </p:cSld>
+  <p:clrMapOvr>
+    <a:masterClrMapping/>
+  </p:clrMapOvr>
 </p:sldLayout>
 </file>
 
 <file path=ppt/slideLayouts/slideLayout9.xml><?xml version="1.0" encoding="utf-8"?>
-<p:sldLayout xmlns:a="http://schemas.openxmlformats.org/drawingml/2006/main" xmlns:p="http://schemas.openxmlformats.org/presentationml/2006/main" xmlns:r="http://schemas.openxmlformats.org/officeDocument/2006/relationships" xmlns:p14="http://schemas.microsoft.com/office/powerpoint/2010/main" xmlns:p15="http://schemas.microsoft.com/office/powerpoint/2012/main" xmlns:mc="http://schemas.openxmlformats.org/markup-compatibility/2006" type="twoObjOverTx" preserve="1">
+<p:sldLayout xmlns:a="http://schemas.openxmlformats.org/drawingml/2006/main" xmlns:r="http://schemas.openxmlformats.org/officeDocument/2006/relationships" xmlns:p="http://schemas.openxmlformats.org/presentationml/2006/main" type="twoObjOverTx" preserve="1">
   <p:cSld name="Title, 2 Content over Content">
     <p:spTree>
       <p:nvGrpSpPr>
@@ -4955,14 +6193,15 @@
           </a:ln>
         </p:spPr>
         <p:txBody>
-          <a:bodyPr lIns="0" rIns="0" tIns="0" bIns="0" anchor="ctr">
+          <a:bodyPr lIns="0" tIns="0" rIns="0" bIns="0" anchor="ctr">
             <a:noAutofit/>
           </a:bodyPr>
+          <a:lstStyle/>
           <a:p>
             <a:pPr indent="0">
               <a:buNone/>
             </a:pPr>
-            <a:endParaRPr b="0" lang="en-US" sz="1800" spc="-1" strike="noStrike">
+            <a:endParaRPr lang="en-US" sz="1800" b="0" strike="noStrike" spc="-1">
               <a:solidFill>
                 <a:srgbClr val="000000"/>
               </a:solidFill>
@@ -4995,9 +6234,10 @@
           </a:ln>
         </p:spPr>
         <p:txBody>
-          <a:bodyPr lIns="0" rIns="0" tIns="0" bIns="0" anchor="t">
+          <a:bodyPr lIns="0" tIns="0" rIns="0" bIns="0" anchor="t">
             <a:normAutofit/>
           </a:bodyPr>
+          <a:lstStyle/>
           <a:p>
             <a:pPr indent="0">
               <a:lnSpc>
@@ -5008,7 +6248,7 @@
               </a:spcBef>
               <a:buNone/>
             </a:pPr>
-            <a:endParaRPr b="0" lang="en-US" sz="2800" spc="-1" strike="noStrike">
+            <a:endParaRPr lang="en-US" sz="2800" b="0" strike="noStrike" spc="-1">
               <a:solidFill>
                 <a:srgbClr val="000000"/>
               </a:solidFill>
@@ -5041,9 +6281,10 @@
           </a:ln>
         </p:spPr>
         <p:txBody>
-          <a:bodyPr lIns="0" rIns="0" tIns="0" bIns="0" anchor="t">
+          <a:bodyPr lIns="0" tIns="0" rIns="0" bIns="0" anchor="t">
             <a:normAutofit/>
           </a:bodyPr>
+          <a:lstStyle/>
           <a:p>
             <a:pPr indent="0">
               <a:lnSpc>
@@ -5054,7 +6295,7 @@
               </a:spcBef>
               <a:buNone/>
             </a:pPr>
-            <a:endParaRPr b="0" lang="en-US" sz="2800" spc="-1" strike="noStrike">
+            <a:endParaRPr lang="en-US" sz="2800" b="0" strike="noStrike" spc="-1">
               <a:solidFill>
                 <a:srgbClr val="000000"/>
               </a:solidFill>
@@ -5087,9 +6328,10 @@
           </a:ln>
         </p:spPr>
         <p:txBody>
-          <a:bodyPr lIns="0" rIns="0" tIns="0" bIns="0" anchor="t">
+          <a:bodyPr lIns="0" tIns="0" rIns="0" bIns="0" anchor="t">
             <a:normAutofit/>
           </a:bodyPr>
+          <a:lstStyle/>
           <a:p>
             <a:pPr indent="0">
               <a:lnSpc>
@@ -5100,7 +6342,7 @@
               </a:spcBef>
               <a:buNone/>
             </a:pPr>
-            <a:endParaRPr b="0" lang="en-US" sz="2800" spc="-1" strike="noStrike">
+            <a:endParaRPr lang="en-US" sz="2800" b="0" strike="noStrike" spc="-1">
               <a:solidFill>
                 <a:srgbClr val="000000"/>
               </a:solidFill>
@@ -5122,6 +6364,7 @@
         <p:spPr/>
         <p:txBody>
           <a:bodyPr/>
+          <a:lstStyle/>
           <a:p>
             <a:r>
               <a:t>Footer</a:t>
@@ -5142,10 +6385,12 @@
         <p:spPr/>
         <p:txBody>
           <a:bodyPr/>
+          <a:lstStyle/>
           <a:p>
             <a:fld id="{1DF9F529-B097-42BB-BA7F-C7936137CB33}" type="slidenum">
-              <a:t>&lt;#&gt;</a:t>
+              <a:t>‹#›</a:t>
             </a:fld>
+            <a:endParaRPr/>
           </a:p>
         </p:txBody>
       </p:sp>
@@ -5162,27 +6407,29 @@
         <p:spPr/>
         <p:txBody>
           <a:bodyPr/>
-          <a:p>
-            <a:r>
-              <a:rPr lang="en-IN"/>
-              <a:t/>
-            </a:r>
+          <a:lstStyle/>
+          <a:p>
+            <a:endParaRPr/>
           </a:p>
         </p:txBody>
       </p:sp>
     </p:spTree>
   </p:cSld>
+  <p:clrMapOvr>
+    <a:masterClrMapping/>
+  </p:clrMapOvr>
 </p:sldLayout>
 </file>
 
 <file path=ppt/slideMasters/slideMaster1.xml><?xml version="1.0" encoding="utf-8"?>
-<p:sldMaster xmlns:a="http://schemas.openxmlformats.org/drawingml/2006/main" xmlns:p="http://schemas.openxmlformats.org/presentationml/2006/main" xmlns:r="http://schemas.openxmlformats.org/officeDocument/2006/relationships" xmlns:p14="http://schemas.microsoft.com/office/powerpoint/2010/main" xmlns:p15="http://schemas.microsoft.com/office/powerpoint/2012/main" xmlns:mc="http://schemas.openxmlformats.org/markup-compatibility/2006">
+<p:sldMaster xmlns:a="http://schemas.openxmlformats.org/drawingml/2006/main" xmlns:r="http://schemas.openxmlformats.org/officeDocument/2006/relationships" xmlns:p="http://schemas.openxmlformats.org/presentationml/2006/main">
   <p:cSld>
     <p:bg>
       <p:bgPr>
         <a:solidFill>
-          <a:srgbClr val="ffffff"/>
+          <a:srgbClr val="FFFFFF"/>
         </a:solidFill>
+        <a:effectLst/>
       </p:bgPr>
     </p:bg>
     <p:spTree>
@@ -5201,7 +6448,7 @@
       </p:grpSpPr>
       <p:sp>
         <p:nvSpPr>
-          <p:cNvPr id="0" name="PlaceHolder 1"/>
+          <p:cNvPr id="5" name="PlaceHolder 1"/>
           <p:cNvSpPr>
             <a:spLocks noGrp="1"/>
           </p:cNvSpPr>
@@ -5226,6 +6473,7 @@
           <a:bodyPr anchor="b">
             <a:noAutofit/>
           </a:bodyPr>
+          <a:lstStyle/>
           <a:p>
             <a:pPr indent="0" algn="ctr">
               <a:lnSpc>
@@ -5234,7 +6482,7 @@
               <a:buNone/>
             </a:pPr>
             <a:r>
-              <a:rPr b="0" lang="en-US" sz="6000" spc="-1" strike="noStrike">
+              <a:rPr lang="en-US" sz="6000" b="0" strike="noStrike" spc="-1">
                 <a:solidFill>
                   <a:srgbClr val="000000"/>
                 </a:solidFill>
@@ -5242,7 +6490,7 @@
               </a:rPr>
               <a:t>Click to edit Master title style</a:t>
             </a:r>
-            <a:endParaRPr b="0" lang="en-US" sz="6000" spc="-1" strike="noStrike">
+            <a:endParaRPr lang="en-US" sz="6000" b="0" strike="noStrike" spc="-1">
               <a:solidFill>
                 <a:srgbClr val="000000"/>
               </a:solidFill>
@@ -5253,7 +6501,7 @@
       </p:sp>
       <p:sp>
         <p:nvSpPr>
-          <p:cNvPr id="1" name="PlaceHolder 2"/>
+          <p:cNvPr id="6" name="PlaceHolder 2"/>
           <p:cNvSpPr>
             <a:spLocks noGrp="1"/>
           </p:cNvSpPr>
@@ -5284,9 +6532,9 @@
                 <a:spcPct val="100000"/>
               </a:lnSpc>
               <a:buNone/>
-              <a:defRPr b="0" lang="en-IN" sz="1200" spc="-1" strike="noStrike">
+              <a:defRPr lang="en-IN" sz="1200" b="0" strike="noStrike" spc="-1">
                 <a:solidFill>
-                  <a:srgbClr val="8b8b8b"/>
+                  <a:srgbClr val="8B8B8B"/>
                 </a:solidFill>
                 <a:latin typeface="Calibri"/>
               </a:defRPr>
@@ -5300,15 +6548,15 @@
               <a:buNone/>
             </a:pPr>
             <a:r>
-              <a:rPr b="0" lang="en-IN" sz="1200" spc="-1" strike="noStrike">
+              <a:rPr lang="en-IN" sz="1200" b="0" strike="noStrike" spc="-1">
                 <a:solidFill>
-                  <a:srgbClr val="8b8b8b"/>
+                  <a:srgbClr val="8B8B8B"/>
                 </a:solidFill>
                 <a:latin typeface="Calibri"/>
               </a:rPr>
               <a:t>&lt;date/time&gt;</a:t>
             </a:r>
-            <a:endParaRPr b="0" lang="en-IN" sz="1200" spc="-1" strike="noStrike">
+            <a:endParaRPr lang="en-IN" sz="1200" b="0" strike="noStrike" spc="-1">
               <a:solidFill>
                 <a:srgbClr val="000000"/>
               </a:solidFill>
@@ -5347,7 +6595,7 @@
           <a:lstStyle>
             <a:lvl1pPr indent="0" algn="ctr">
               <a:buNone/>
-              <a:defRPr b="0" lang="en-IN" sz="1400" spc="-1" strike="noStrike">
+              <a:defRPr lang="en-IN" sz="1400" b="0" strike="noStrike" spc="-1">
                 <a:solidFill>
                   <a:srgbClr val="000000"/>
                 </a:solidFill>
@@ -5360,7 +6608,7 @@
               <a:buNone/>
             </a:pPr>
             <a:r>
-              <a:rPr b="0" lang="en-IN" sz="1400" spc="-1" strike="noStrike">
+              <a:rPr lang="en-IN" sz="1400" b="0" strike="noStrike" spc="-1">
                 <a:solidFill>
                   <a:srgbClr val="000000"/>
                 </a:solidFill>
@@ -5368,12 +6616,6 @@
               </a:rPr>
               <a:t>&lt;footer&gt;</a:t>
             </a:r>
-            <a:endParaRPr b="0" lang="en-IN" sz="1400" spc="-1" strike="noStrike">
-              <a:solidFill>
-                <a:srgbClr val="000000"/>
-              </a:solidFill>
-              <a:latin typeface="Times New Roman"/>
-            </a:endParaRPr>
           </a:p>
         </p:txBody>
       </p:sp>
@@ -5410,9 +6652,9 @@
                 <a:spcPct val="100000"/>
               </a:lnSpc>
               <a:buNone/>
-              <a:defRPr b="0" lang="en-IN" sz="1200" spc="-1" strike="noStrike">
+              <a:defRPr lang="en-IN" sz="1200" b="0" strike="noStrike" spc="-1">
                 <a:solidFill>
-                  <a:srgbClr val="8b8b8b"/>
+                  <a:srgbClr val="8B8B8B"/>
                 </a:solidFill>
                 <a:latin typeface="Calibri"/>
               </a:defRPr>
@@ -5426,15 +6668,15 @@
               <a:buNone/>
             </a:pPr>
             <a:fld id="{4600D565-FDF4-4570-9843-F2A409F532CD}" type="slidenum">
-              <a:rPr b="0" lang="en-IN" sz="1200" spc="-1" strike="noStrike">
+              <a:rPr lang="en-IN" sz="1200" b="0" strike="noStrike" spc="-1">
                 <a:solidFill>
-                  <a:srgbClr val="8b8b8b"/>
+                  <a:srgbClr val="8B8B8B"/>
                 </a:solidFill>
                 <a:latin typeface="Calibri"/>
               </a:rPr>
-              <a:t>&lt;number&gt;</a:t>
+              <a:t>‹#›</a:t>
             </a:fld>
-            <a:endParaRPr b="0" lang="en-IN" sz="1200" spc="-1" strike="noStrike">
+            <a:endParaRPr lang="en-IN" sz="1200" b="0" strike="noStrike" spc="-1">
               <a:solidFill>
                 <a:srgbClr val="000000"/>
               </a:solidFill>
@@ -5467,9 +6709,10 @@
           </a:ln>
         </p:spPr>
         <p:txBody>
-          <a:bodyPr lIns="0" rIns="0" tIns="0" bIns="0" anchor="t">
+          <a:bodyPr lIns="0" tIns="0" rIns="0" bIns="0" anchor="t">
             <a:normAutofit/>
           </a:bodyPr>
+          <a:lstStyle/>
           <a:p>
             <a:pPr marL="432000" indent="-324000">
               <a:lnSpc>
@@ -5486,7 +6729,7 @@
               <a:buChar char=""/>
             </a:pPr>
             <a:r>
-              <a:rPr b="0" lang="en-US" sz="2800" spc="-1" strike="noStrike">
+              <a:rPr lang="en-US" sz="2800" b="0" strike="noStrike" spc="-1">
                 <a:solidFill>
                   <a:srgbClr val="000000"/>
                 </a:solidFill>
@@ -5494,15 +6737,9 @@
               </a:rPr>
               <a:t>Click to edit the outline text format</a:t>
             </a:r>
-            <a:endParaRPr b="0" lang="en-US" sz="2800" spc="-1" strike="noStrike">
-              <a:solidFill>
-                <a:srgbClr val="000000"/>
-              </a:solidFill>
-              <a:latin typeface="Calibri"/>
-            </a:endParaRPr>
-          </a:p>
-          <a:p>
-            <a:pPr lvl="1" marL="864000" indent="-324000">
+          </a:p>
+          <a:p>
+            <a:pPr marL="864000" lvl="1" indent="-324000">
               <a:lnSpc>
                 <a:spcPct val="90000"/>
               </a:lnSpc>
@@ -5517,7 +6754,7 @@
               <a:buChar char=""/>
             </a:pPr>
             <a:r>
-              <a:rPr b="0" lang="en-US" sz="2000" spc="-1" strike="noStrike">
+              <a:rPr lang="en-US" sz="2000" b="0" strike="noStrike" spc="-1">
                 <a:solidFill>
                   <a:srgbClr val="000000"/>
                 </a:solidFill>
@@ -5525,15 +6762,9 @@
               </a:rPr>
               <a:t>Second Outline Level</a:t>
             </a:r>
-            <a:endParaRPr b="0" lang="en-US" sz="2000" spc="-1" strike="noStrike">
-              <a:solidFill>
-                <a:srgbClr val="000000"/>
-              </a:solidFill>
-              <a:latin typeface="Calibri"/>
-            </a:endParaRPr>
-          </a:p>
-          <a:p>
-            <a:pPr lvl="2" marL="1296000" indent="-288000">
+          </a:p>
+          <a:p>
+            <a:pPr marL="1296000" lvl="2" indent="-288000">
               <a:lnSpc>
                 <a:spcPct val="90000"/>
               </a:lnSpc>
@@ -5548,7 +6779,7 @@
               <a:buChar char=""/>
             </a:pPr>
             <a:r>
-              <a:rPr b="0" lang="en-US" sz="1800" spc="-1" strike="noStrike">
+              <a:rPr lang="en-US" sz="1800" b="0" strike="noStrike" spc="-1">
                 <a:solidFill>
                   <a:srgbClr val="000000"/>
                 </a:solidFill>
@@ -5556,15 +6787,9 @@
               </a:rPr>
               <a:t>Third Outline Level</a:t>
             </a:r>
-            <a:endParaRPr b="0" lang="en-US" sz="1800" spc="-1" strike="noStrike">
-              <a:solidFill>
-                <a:srgbClr val="000000"/>
-              </a:solidFill>
-              <a:latin typeface="Calibri"/>
-            </a:endParaRPr>
-          </a:p>
-          <a:p>
-            <a:pPr lvl="3" marL="1728000" indent="-216000">
+          </a:p>
+          <a:p>
+            <a:pPr marL="1728000" lvl="3" indent="-216000">
               <a:lnSpc>
                 <a:spcPct val="90000"/>
               </a:lnSpc>
@@ -5579,7 +6804,7 @@
               <a:buChar char=""/>
             </a:pPr>
             <a:r>
-              <a:rPr b="0" lang="en-US" sz="1800" spc="-1" strike="noStrike">
+              <a:rPr lang="en-US" sz="1800" b="0" strike="noStrike" spc="-1">
                 <a:solidFill>
                   <a:srgbClr val="000000"/>
                 </a:solidFill>
@@ -5587,15 +6812,9 @@
               </a:rPr>
               <a:t>Fourth Outline Level</a:t>
             </a:r>
-            <a:endParaRPr b="0" lang="en-US" sz="1800" spc="-1" strike="noStrike">
-              <a:solidFill>
-                <a:srgbClr val="000000"/>
-              </a:solidFill>
-              <a:latin typeface="Calibri"/>
-            </a:endParaRPr>
-          </a:p>
-          <a:p>
-            <a:pPr lvl="4" marL="2160000" indent="-216000">
+          </a:p>
+          <a:p>
+            <a:pPr marL="2160000" lvl="4" indent="-216000">
               <a:lnSpc>
                 <a:spcPct val="90000"/>
               </a:lnSpc>
@@ -5610,7 +6829,7 @@
               <a:buChar char=""/>
             </a:pPr>
             <a:r>
-              <a:rPr b="0" lang="en-US" sz="2000" spc="-1" strike="noStrike">
+              <a:rPr lang="en-US" sz="2000" b="0" strike="noStrike" spc="-1">
                 <a:solidFill>
                   <a:srgbClr val="000000"/>
                 </a:solidFill>
@@ -5618,15 +6837,9 @@
               </a:rPr>
               <a:t>Fifth Outline Level</a:t>
             </a:r>
-            <a:endParaRPr b="0" lang="en-US" sz="2000" spc="-1" strike="noStrike">
-              <a:solidFill>
-                <a:srgbClr val="000000"/>
-              </a:solidFill>
-              <a:latin typeface="Calibri"/>
-            </a:endParaRPr>
-          </a:p>
-          <a:p>
-            <a:pPr lvl="5" marL="2592000" indent="-216000">
+          </a:p>
+          <a:p>
+            <a:pPr marL="2592000" lvl="5" indent="-216000">
               <a:lnSpc>
                 <a:spcPct val="90000"/>
               </a:lnSpc>
@@ -5641,7 +6854,7 @@
               <a:buChar char=""/>
             </a:pPr>
             <a:r>
-              <a:rPr b="0" lang="en-US" sz="2000" spc="-1" strike="noStrike">
+              <a:rPr lang="en-US" sz="2000" b="0" strike="noStrike" spc="-1">
                 <a:solidFill>
                   <a:srgbClr val="000000"/>
                 </a:solidFill>
@@ -5649,15 +6862,9 @@
               </a:rPr>
               <a:t>Sixth Outline Level</a:t>
             </a:r>
-            <a:endParaRPr b="0" lang="en-US" sz="2000" spc="-1" strike="noStrike">
-              <a:solidFill>
-                <a:srgbClr val="000000"/>
-              </a:solidFill>
-              <a:latin typeface="Calibri"/>
-            </a:endParaRPr>
-          </a:p>
-          <a:p>
-            <a:pPr lvl="6" marL="3024000" indent="-216000">
+          </a:p>
+          <a:p>
+            <a:pPr marL="3024000" lvl="6" indent="-216000">
               <a:lnSpc>
                 <a:spcPct val="90000"/>
               </a:lnSpc>
@@ -5672,7 +6879,7 @@
               <a:buChar char=""/>
             </a:pPr>
             <a:r>
-              <a:rPr b="0" lang="en-US" sz="2000" spc="-1" strike="noStrike">
+              <a:rPr lang="en-US" sz="2000" b="0" strike="noStrike" spc="-1">
                 <a:solidFill>
                   <a:srgbClr val="000000"/>
                 </a:solidFill>
@@ -5680,43 +6887,318 @@
               </a:rPr>
               <a:t>Seventh Outline Level</a:t>
             </a:r>
-            <a:endParaRPr b="0" lang="en-US" sz="2000" spc="-1" strike="noStrike">
-              <a:solidFill>
-                <a:srgbClr val="000000"/>
-              </a:solidFill>
-              <a:latin typeface="Calibri"/>
-            </a:endParaRPr>
           </a:p>
         </p:txBody>
       </p:sp>
     </p:spTree>
   </p:cSld>
-  <p:clrMap bg1="lt1" bg2="lt2" tx1="dk1" tx2="dk2" accent1="accent1" accent2="accent2" accent3="accent3" accent4="accent4" accent5="accent5" accent6="accent6" hlink="hlink" folHlink="folHlink"/>
+  <p:clrMap bg1="lt1" tx1="dk1" bg2="lt2" tx2="dk2" accent1="accent1" accent2="accent2" accent3="accent3" accent4="accent4" accent5="accent5" accent6="accent6" hlink="hlink" folHlink="folHlink"/>
   <p:sldLayoutIdLst>
-    <p:sldLayoutId id="2147483649" r:id="rId2"/>
-    <p:sldLayoutId id="2147483650" r:id="rId3"/>
-    <p:sldLayoutId id="2147483651" r:id="rId4"/>
-    <p:sldLayoutId id="2147483652" r:id="rId5"/>
-    <p:sldLayoutId id="2147483653" r:id="rId6"/>
-    <p:sldLayoutId id="2147483654" r:id="rId7"/>
-    <p:sldLayoutId id="2147483655" r:id="rId8"/>
-    <p:sldLayoutId id="2147483656" r:id="rId9"/>
-    <p:sldLayoutId id="2147483657" r:id="rId10"/>
-    <p:sldLayoutId id="2147483658" r:id="rId11"/>
-    <p:sldLayoutId id="2147483659" r:id="rId12"/>
-    <p:sldLayoutId id="2147483660" r:id="rId13"/>
+    <p:sldLayoutId id="2147483649" r:id="rId1"/>
+    <p:sldLayoutId id="2147483650" r:id="rId2"/>
+    <p:sldLayoutId id="2147483651" r:id="rId3"/>
+    <p:sldLayoutId id="2147483652" r:id="rId4"/>
+    <p:sldLayoutId id="2147483653" r:id="rId5"/>
+    <p:sldLayoutId id="2147483654" r:id="rId6"/>
+    <p:sldLayoutId id="2147483655" r:id="rId7"/>
+    <p:sldLayoutId id="2147483656" r:id="rId8"/>
+    <p:sldLayoutId id="2147483657" r:id="rId9"/>
+    <p:sldLayoutId id="2147483658" r:id="rId10"/>
+    <p:sldLayoutId id="2147483659" r:id="rId11"/>
+    <p:sldLayoutId id="2147483660" r:id="rId12"/>
   </p:sldLayoutIdLst>
+  <p:txStyles>
+    <p:titleStyle>
+      <a:lvl1pPr algn="l" defTabSz="914400" rtl="0" eaLnBrk="1" latinLnBrk="0" hangingPunct="1">
+        <a:lnSpc>
+          <a:spcPct val="90000"/>
+        </a:lnSpc>
+        <a:spcBef>
+          <a:spcPct val="0"/>
+        </a:spcBef>
+        <a:buNone/>
+        <a:defRPr sz="4400" kern="1200">
+          <a:solidFill>
+            <a:schemeClr val="tx1"/>
+          </a:solidFill>
+          <a:latin typeface="+mj-lt"/>
+          <a:ea typeface="+mj-ea"/>
+          <a:cs typeface="+mj-cs"/>
+        </a:defRPr>
+      </a:lvl1pPr>
+    </p:titleStyle>
+    <p:bodyStyle>
+      <a:lvl1pPr marL="228600" indent="-228600" algn="l" defTabSz="914400" rtl="0" eaLnBrk="1" latinLnBrk="0" hangingPunct="1">
+        <a:lnSpc>
+          <a:spcPct val="90000"/>
+        </a:lnSpc>
+        <a:spcBef>
+          <a:spcPts val="1000"/>
+        </a:spcBef>
+        <a:buFont typeface="Arial" panose="020B0604020202020204" pitchFamily="34" charset="0"/>
+        <a:buChar char="•"/>
+        <a:defRPr sz="2800" kern="1200">
+          <a:solidFill>
+            <a:schemeClr val="tx1"/>
+          </a:solidFill>
+          <a:latin typeface="+mn-lt"/>
+          <a:ea typeface="+mn-ea"/>
+          <a:cs typeface="+mn-cs"/>
+        </a:defRPr>
+      </a:lvl1pPr>
+      <a:lvl2pPr marL="685800" indent="-228600" algn="l" defTabSz="914400" rtl="0" eaLnBrk="1" latinLnBrk="0" hangingPunct="1">
+        <a:lnSpc>
+          <a:spcPct val="90000"/>
+        </a:lnSpc>
+        <a:spcBef>
+          <a:spcPts val="500"/>
+        </a:spcBef>
+        <a:buFont typeface="Arial" panose="020B0604020202020204" pitchFamily="34" charset="0"/>
+        <a:buChar char="•"/>
+        <a:defRPr sz="2400" kern="1200">
+          <a:solidFill>
+            <a:schemeClr val="tx1"/>
+          </a:solidFill>
+          <a:latin typeface="+mn-lt"/>
+          <a:ea typeface="+mn-ea"/>
+          <a:cs typeface="+mn-cs"/>
+        </a:defRPr>
+      </a:lvl2pPr>
+      <a:lvl3pPr marL="1143000" indent="-228600" algn="l" defTabSz="914400" rtl="0" eaLnBrk="1" latinLnBrk="0" hangingPunct="1">
+        <a:lnSpc>
+          <a:spcPct val="90000"/>
+        </a:lnSpc>
+        <a:spcBef>
+          <a:spcPts val="500"/>
+        </a:spcBef>
+        <a:buFont typeface="Arial" panose="020B0604020202020204" pitchFamily="34" charset="0"/>
+        <a:buChar char="•"/>
+        <a:defRPr sz="2000" kern="1200">
+          <a:solidFill>
+            <a:schemeClr val="tx1"/>
+          </a:solidFill>
+          <a:latin typeface="+mn-lt"/>
+          <a:ea typeface="+mn-ea"/>
+          <a:cs typeface="+mn-cs"/>
+        </a:defRPr>
+      </a:lvl3pPr>
+      <a:lvl4pPr marL="1600200" indent="-228600" algn="l" defTabSz="914400" rtl="0" eaLnBrk="1" latinLnBrk="0" hangingPunct="1">
+        <a:lnSpc>
+          <a:spcPct val="90000"/>
+        </a:lnSpc>
+        <a:spcBef>
+          <a:spcPts val="500"/>
+        </a:spcBef>
+        <a:buFont typeface="Arial" panose="020B0604020202020204" pitchFamily="34" charset="0"/>
+        <a:buChar char="•"/>
+        <a:defRPr sz="1800" kern="1200">
+          <a:solidFill>
+            <a:schemeClr val="tx1"/>
+          </a:solidFill>
+          <a:latin typeface="+mn-lt"/>
+          <a:ea typeface="+mn-ea"/>
+          <a:cs typeface="+mn-cs"/>
+        </a:defRPr>
+      </a:lvl4pPr>
+      <a:lvl5pPr marL="2057400" indent="-228600" algn="l" defTabSz="914400" rtl="0" eaLnBrk="1" latinLnBrk="0" hangingPunct="1">
+        <a:lnSpc>
+          <a:spcPct val="90000"/>
+        </a:lnSpc>
+        <a:spcBef>
+          <a:spcPts val="500"/>
+        </a:spcBef>
+        <a:buFont typeface="Arial" panose="020B0604020202020204" pitchFamily="34" charset="0"/>
+        <a:buChar char="•"/>
+        <a:defRPr sz="1800" kern="1200">
+          <a:solidFill>
+            <a:schemeClr val="tx1"/>
+          </a:solidFill>
+          <a:latin typeface="+mn-lt"/>
+          <a:ea typeface="+mn-ea"/>
+          <a:cs typeface="+mn-cs"/>
+        </a:defRPr>
+      </a:lvl5pPr>
+      <a:lvl6pPr marL="2514600" indent="-228600" algn="l" defTabSz="914400" rtl="0" eaLnBrk="1" latinLnBrk="0" hangingPunct="1">
+        <a:lnSpc>
+          <a:spcPct val="90000"/>
+        </a:lnSpc>
+        <a:spcBef>
+          <a:spcPts val="500"/>
+        </a:spcBef>
+        <a:buFont typeface="Arial" panose="020B0604020202020204" pitchFamily="34" charset="0"/>
+        <a:buChar char="•"/>
+        <a:defRPr sz="1800" kern="1200">
+          <a:solidFill>
+            <a:schemeClr val="tx1"/>
+          </a:solidFill>
+          <a:latin typeface="+mn-lt"/>
+          <a:ea typeface="+mn-ea"/>
+          <a:cs typeface="+mn-cs"/>
+        </a:defRPr>
+      </a:lvl6pPr>
+      <a:lvl7pPr marL="2971800" indent="-228600" algn="l" defTabSz="914400" rtl="0" eaLnBrk="1" latinLnBrk="0" hangingPunct="1">
+        <a:lnSpc>
+          <a:spcPct val="90000"/>
+        </a:lnSpc>
+        <a:spcBef>
+          <a:spcPts val="500"/>
+        </a:spcBef>
+        <a:buFont typeface="Arial" panose="020B0604020202020204" pitchFamily="34" charset="0"/>
+        <a:buChar char="•"/>
+        <a:defRPr sz="1800" kern="1200">
+          <a:solidFill>
+            <a:schemeClr val="tx1"/>
+          </a:solidFill>
+          <a:latin typeface="+mn-lt"/>
+          <a:ea typeface="+mn-ea"/>
+          <a:cs typeface="+mn-cs"/>
+        </a:defRPr>
+      </a:lvl7pPr>
+      <a:lvl8pPr marL="3429000" indent="-228600" algn="l" defTabSz="914400" rtl="0" eaLnBrk="1" latinLnBrk="0" hangingPunct="1">
+        <a:lnSpc>
+          <a:spcPct val="90000"/>
+        </a:lnSpc>
+        <a:spcBef>
+          <a:spcPts val="500"/>
+        </a:spcBef>
+        <a:buFont typeface="Arial" panose="020B0604020202020204" pitchFamily="34" charset="0"/>
+        <a:buChar char="•"/>
+        <a:defRPr sz="1800" kern="1200">
+          <a:solidFill>
+            <a:schemeClr val="tx1"/>
+          </a:solidFill>
+          <a:latin typeface="+mn-lt"/>
+          <a:ea typeface="+mn-ea"/>
+          <a:cs typeface="+mn-cs"/>
+        </a:defRPr>
+      </a:lvl8pPr>
+      <a:lvl9pPr marL="3886200" indent="-228600" algn="l" defTabSz="914400" rtl="0" eaLnBrk="1" latinLnBrk="0" hangingPunct="1">
+        <a:lnSpc>
+          <a:spcPct val="90000"/>
+        </a:lnSpc>
+        <a:spcBef>
+          <a:spcPts val="500"/>
+        </a:spcBef>
+        <a:buFont typeface="Arial" panose="020B0604020202020204" pitchFamily="34" charset="0"/>
+        <a:buChar char="•"/>
+        <a:defRPr sz="1800" kern="1200">
+          <a:solidFill>
+            <a:schemeClr val="tx1"/>
+          </a:solidFill>
+          <a:latin typeface="+mn-lt"/>
+          <a:ea typeface="+mn-ea"/>
+          <a:cs typeface="+mn-cs"/>
+        </a:defRPr>
+      </a:lvl9pPr>
+    </p:bodyStyle>
+    <p:otherStyle>
+      <a:defPPr>
+        <a:defRPr lang="en-US"/>
+      </a:defPPr>
+      <a:lvl1pPr marL="0" algn="l" defTabSz="914400" rtl="0" eaLnBrk="1" latinLnBrk="0" hangingPunct="1">
+        <a:defRPr sz="1800" kern="1200">
+          <a:solidFill>
+            <a:schemeClr val="tx1"/>
+          </a:solidFill>
+          <a:latin typeface="+mn-lt"/>
+          <a:ea typeface="+mn-ea"/>
+          <a:cs typeface="+mn-cs"/>
+        </a:defRPr>
+      </a:lvl1pPr>
+      <a:lvl2pPr marL="457200" algn="l" defTabSz="914400" rtl="0" eaLnBrk="1" latinLnBrk="0" hangingPunct="1">
+        <a:defRPr sz="1800" kern="1200">
+          <a:solidFill>
+            <a:schemeClr val="tx1"/>
+          </a:solidFill>
+          <a:latin typeface="+mn-lt"/>
+          <a:ea typeface="+mn-ea"/>
+          <a:cs typeface="+mn-cs"/>
+        </a:defRPr>
+      </a:lvl2pPr>
+      <a:lvl3pPr marL="914400" algn="l" defTabSz="914400" rtl="0" eaLnBrk="1" latinLnBrk="0" hangingPunct="1">
+        <a:defRPr sz="1800" kern="1200">
+          <a:solidFill>
+            <a:schemeClr val="tx1"/>
+          </a:solidFill>
+          <a:latin typeface="+mn-lt"/>
+          <a:ea typeface="+mn-ea"/>
+          <a:cs typeface="+mn-cs"/>
+        </a:defRPr>
+      </a:lvl3pPr>
+      <a:lvl4pPr marL="1371600" algn="l" defTabSz="914400" rtl="0" eaLnBrk="1" latinLnBrk="0" hangingPunct="1">
+        <a:defRPr sz="1800" kern="1200">
+          <a:solidFill>
+            <a:schemeClr val="tx1"/>
+          </a:solidFill>
+          <a:latin typeface="+mn-lt"/>
+          <a:ea typeface="+mn-ea"/>
+          <a:cs typeface="+mn-cs"/>
+        </a:defRPr>
+      </a:lvl4pPr>
+      <a:lvl5pPr marL="1828800" algn="l" defTabSz="914400" rtl="0" eaLnBrk="1" latinLnBrk="0" hangingPunct="1">
+        <a:defRPr sz="1800" kern="1200">
+          <a:solidFill>
+            <a:schemeClr val="tx1"/>
+          </a:solidFill>
+          <a:latin typeface="+mn-lt"/>
+          <a:ea typeface="+mn-ea"/>
+          <a:cs typeface="+mn-cs"/>
+        </a:defRPr>
+      </a:lvl5pPr>
+      <a:lvl6pPr marL="2286000" algn="l" defTabSz="914400" rtl="0" eaLnBrk="1" latinLnBrk="0" hangingPunct="1">
+        <a:defRPr sz="1800" kern="1200">
+          <a:solidFill>
+            <a:schemeClr val="tx1"/>
+          </a:solidFill>
+          <a:latin typeface="+mn-lt"/>
+          <a:ea typeface="+mn-ea"/>
+          <a:cs typeface="+mn-cs"/>
+        </a:defRPr>
+      </a:lvl6pPr>
+      <a:lvl7pPr marL="2743200" algn="l" defTabSz="914400" rtl="0" eaLnBrk="1" latinLnBrk="0" hangingPunct="1">
+        <a:defRPr sz="1800" kern="1200">
+          <a:solidFill>
+            <a:schemeClr val="tx1"/>
+          </a:solidFill>
+          <a:latin typeface="+mn-lt"/>
+          <a:ea typeface="+mn-ea"/>
+          <a:cs typeface="+mn-cs"/>
+        </a:defRPr>
+      </a:lvl7pPr>
+      <a:lvl8pPr marL="3200400" algn="l" defTabSz="914400" rtl="0" eaLnBrk="1" latinLnBrk="0" hangingPunct="1">
+        <a:defRPr sz="1800" kern="1200">
+          <a:solidFill>
+            <a:schemeClr val="tx1"/>
+          </a:solidFill>
+          <a:latin typeface="+mn-lt"/>
+          <a:ea typeface="+mn-ea"/>
+          <a:cs typeface="+mn-cs"/>
+        </a:defRPr>
+      </a:lvl8pPr>
+      <a:lvl9pPr marL="3657600" algn="l" defTabSz="914400" rtl="0" eaLnBrk="1" latinLnBrk="0" hangingPunct="1">
+        <a:defRPr sz="1800" kern="1200">
+          <a:solidFill>
+            <a:schemeClr val="tx1"/>
+          </a:solidFill>
+          <a:latin typeface="+mn-lt"/>
+          <a:ea typeface="+mn-ea"/>
+          <a:cs typeface="+mn-cs"/>
+        </a:defRPr>
+      </a:lvl9pPr>
+    </p:otherStyle>
+  </p:txStyles>
 </p:sldMaster>
 </file>
 
 <file path=ppt/slideMasters/slideMaster2.xml><?xml version="1.0" encoding="utf-8"?>
-<p:sldMaster xmlns:a="http://schemas.openxmlformats.org/drawingml/2006/main" xmlns:p="http://schemas.openxmlformats.org/presentationml/2006/main" xmlns:r="http://schemas.openxmlformats.org/officeDocument/2006/relationships" xmlns:p14="http://schemas.microsoft.com/office/powerpoint/2010/main" xmlns:p15="http://schemas.microsoft.com/office/powerpoint/2012/main" xmlns:mc="http://schemas.openxmlformats.org/markup-compatibility/2006">
+<p:sldMaster xmlns:a="http://schemas.openxmlformats.org/drawingml/2006/main" xmlns:r="http://schemas.openxmlformats.org/officeDocument/2006/relationships" xmlns:p="http://schemas.openxmlformats.org/presentationml/2006/main">
   <p:cSld>
     <p:bg>
       <p:bgPr>
         <a:solidFill>
-          <a:srgbClr val="ffffff"/>
+          <a:srgbClr val="FFFFFF"/>
         </a:solidFill>
+        <a:effectLst/>
       </p:bgPr>
     </p:bg>
     <p:spTree>
@@ -5760,6 +7242,7 @@
           <a:bodyPr anchor="ctr">
             <a:noAutofit/>
           </a:bodyPr>
+          <a:lstStyle/>
           <a:p>
             <a:pPr indent="0">
               <a:lnSpc>
@@ -5768,7 +7251,7 @@
               <a:buNone/>
             </a:pPr>
             <a:r>
-              <a:rPr b="0" lang="en-US" sz="4400" spc="-1" strike="noStrike">
+              <a:rPr lang="en-US" sz="4400" b="0" strike="noStrike" spc="-1">
                 <a:solidFill>
                   <a:srgbClr val="000000"/>
                 </a:solidFill>
@@ -5776,7 +7259,7 @@
               </a:rPr>
               <a:t>Click to edit Master title style</a:t>
             </a:r>
-            <a:endParaRPr b="0" lang="en-US" sz="4400" spc="-1" strike="noStrike">
+            <a:endParaRPr lang="en-US" sz="4400" b="0" strike="noStrike" spc="-1">
               <a:solidFill>
                 <a:srgbClr val="000000"/>
               </a:solidFill>
@@ -5812,6 +7295,7 @@
           <a:bodyPr anchor="t">
             <a:noAutofit/>
           </a:bodyPr>
+          <a:lstStyle/>
           <a:p>
             <a:pPr marL="228600" indent="-228600">
               <a:lnSpc>
@@ -5827,7 +7311,7 @@
               <a:buChar char="•"/>
             </a:pPr>
             <a:r>
-              <a:rPr b="0" lang="en-US" sz="2800" spc="-1" strike="noStrike">
+              <a:rPr lang="en-US" sz="2800" b="0" strike="noStrike" spc="-1">
                 <a:solidFill>
                   <a:srgbClr val="000000"/>
                 </a:solidFill>
@@ -5835,15 +7319,9 @@
               </a:rPr>
               <a:t>Click to edit Master text styles</a:t>
             </a:r>
-            <a:endParaRPr b="0" lang="en-US" sz="2800" spc="-1" strike="noStrike">
-              <a:solidFill>
-                <a:srgbClr val="000000"/>
-              </a:solidFill>
-              <a:latin typeface="Calibri"/>
-            </a:endParaRPr>
-          </a:p>
-          <a:p>
-            <a:pPr lvl="1" marL="685800" indent="-228600">
+          </a:p>
+          <a:p>
+            <a:pPr marL="685800" lvl="1" indent="-228600">
               <a:lnSpc>
                 <a:spcPct val="90000"/>
               </a:lnSpc>
@@ -5857,7 +7335,7 @@
               <a:buChar char="•"/>
             </a:pPr>
             <a:r>
-              <a:rPr b="0" lang="en-US" sz="2400" spc="-1" strike="noStrike">
+              <a:rPr lang="en-US" sz="2400" b="0" strike="noStrike" spc="-1">
                 <a:solidFill>
                   <a:srgbClr val="000000"/>
                 </a:solidFill>
@@ -5865,15 +7343,9 @@
               </a:rPr>
               <a:t>Second level</a:t>
             </a:r>
-            <a:endParaRPr b="0" lang="en-US" sz="2400" spc="-1" strike="noStrike">
-              <a:solidFill>
-                <a:srgbClr val="000000"/>
-              </a:solidFill>
-              <a:latin typeface="Calibri"/>
-            </a:endParaRPr>
-          </a:p>
-          <a:p>
-            <a:pPr lvl="2" marL="1143000" indent="-228600">
+          </a:p>
+          <a:p>
+            <a:pPr marL="1143000" lvl="2" indent="-228600">
               <a:lnSpc>
                 <a:spcPct val="90000"/>
               </a:lnSpc>
@@ -5887,7 +7359,7 @@
               <a:buChar char="•"/>
             </a:pPr>
             <a:r>
-              <a:rPr b="0" lang="en-US" sz="2000" spc="-1" strike="noStrike">
+              <a:rPr lang="en-US" sz="2000" b="0" strike="noStrike" spc="-1">
                 <a:solidFill>
                   <a:srgbClr val="000000"/>
                 </a:solidFill>
@@ -5895,15 +7367,9 @@
               </a:rPr>
               <a:t>Third level</a:t>
             </a:r>
-            <a:endParaRPr b="0" lang="en-US" sz="2000" spc="-1" strike="noStrike">
-              <a:solidFill>
-                <a:srgbClr val="000000"/>
-              </a:solidFill>
-              <a:latin typeface="Calibri"/>
-            </a:endParaRPr>
-          </a:p>
-          <a:p>
-            <a:pPr lvl="3" marL="1600200" indent="-228600">
+          </a:p>
+          <a:p>
+            <a:pPr marL="1600200" lvl="3" indent="-228600">
               <a:lnSpc>
                 <a:spcPct val="90000"/>
               </a:lnSpc>
@@ -5917,7 +7383,7 @@
               <a:buChar char="•"/>
             </a:pPr>
             <a:r>
-              <a:rPr b="0" lang="en-US" sz="1800" spc="-1" strike="noStrike">
+              <a:rPr lang="en-US" sz="1800" b="0" strike="noStrike" spc="-1">
                 <a:solidFill>
                   <a:srgbClr val="000000"/>
                 </a:solidFill>
@@ -5925,15 +7391,9 @@
               </a:rPr>
               <a:t>Fourth level</a:t>
             </a:r>
-            <a:endParaRPr b="0" lang="en-US" sz="1800" spc="-1" strike="noStrike">
-              <a:solidFill>
-                <a:srgbClr val="000000"/>
-              </a:solidFill>
-              <a:latin typeface="Calibri"/>
-            </a:endParaRPr>
-          </a:p>
-          <a:p>
-            <a:pPr lvl="4" marL="2057400" indent="-228600">
+          </a:p>
+          <a:p>
+            <a:pPr marL="2057400" lvl="4" indent="-228600">
               <a:lnSpc>
                 <a:spcPct val="90000"/>
               </a:lnSpc>
@@ -5947,7 +7407,7 @@
               <a:buChar char="•"/>
             </a:pPr>
             <a:r>
-              <a:rPr b="0" lang="en-US" sz="1800" spc="-1" strike="noStrike">
+              <a:rPr lang="en-US" sz="1800" b="0" strike="noStrike" spc="-1">
                 <a:solidFill>
                   <a:srgbClr val="000000"/>
                 </a:solidFill>
@@ -5955,12 +7415,6 @@
               </a:rPr>
               <a:t>Fifth level</a:t>
             </a:r>
-            <a:endParaRPr b="0" lang="en-US" sz="1800" spc="-1" strike="noStrike">
-              <a:solidFill>
-                <a:srgbClr val="000000"/>
-              </a:solidFill>
-              <a:latin typeface="Calibri"/>
-            </a:endParaRPr>
           </a:p>
         </p:txBody>
       </p:sp>
@@ -5997,9 +7451,9 @@
                 <a:spcPct val="100000"/>
               </a:lnSpc>
               <a:buNone/>
-              <a:defRPr b="0" lang="en-IN" sz="1200" spc="-1" strike="noStrike">
+              <a:defRPr lang="en-IN" sz="1200" b="0" strike="noStrike" spc="-1">
                 <a:solidFill>
-                  <a:srgbClr val="8b8b8b"/>
+                  <a:srgbClr val="8B8B8B"/>
                 </a:solidFill>
                 <a:latin typeface="Calibri"/>
               </a:defRPr>
@@ -6013,15 +7467,15 @@
               <a:buNone/>
             </a:pPr>
             <a:r>
-              <a:rPr b="0" lang="en-IN" sz="1200" spc="-1" strike="noStrike">
+              <a:rPr lang="en-IN" sz="1200" b="0" strike="noStrike" spc="-1">
                 <a:solidFill>
-                  <a:srgbClr val="8b8b8b"/>
+                  <a:srgbClr val="8B8B8B"/>
                 </a:solidFill>
                 <a:latin typeface="Calibri"/>
               </a:rPr>
               <a:t>&lt;date/time&gt;</a:t>
             </a:r>
-            <a:endParaRPr b="0" lang="en-IN" sz="1200" spc="-1" strike="noStrike">
+            <a:endParaRPr lang="en-IN" sz="1200" b="0" strike="noStrike" spc="-1">
               <a:solidFill>
                 <a:srgbClr val="000000"/>
               </a:solidFill>
@@ -6060,7 +7514,7 @@
           <a:lstStyle>
             <a:lvl1pPr indent="0" algn="ctr">
               <a:buNone/>
-              <a:defRPr b="0" lang="en-IN" sz="1400" spc="-1" strike="noStrike">
+              <a:defRPr lang="en-IN" sz="1400" b="0" strike="noStrike" spc="-1">
                 <a:solidFill>
                   <a:srgbClr val="000000"/>
                 </a:solidFill>
@@ -6073,7 +7527,7 @@
               <a:buNone/>
             </a:pPr>
             <a:r>
-              <a:rPr b="0" lang="en-IN" sz="1400" spc="-1" strike="noStrike">
+              <a:rPr lang="en-IN" sz="1400" b="0" strike="noStrike" spc="-1">
                 <a:solidFill>
                   <a:srgbClr val="000000"/>
                 </a:solidFill>
@@ -6081,12 +7535,6 @@
               </a:rPr>
               <a:t>&lt;footer&gt;</a:t>
             </a:r>
-            <a:endParaRPr b="0" lang="en-IN" sz="1400" spc="-1" strike="noStrike">
-              <a:solidFill>
-                <a:srgbClr val="000000"/>
-              </a:solidFill>
-              <a:latin typeface="Times New Roman"/>
-            </a:endParaRPr>
           </a:p>
         </p:txBody>
       </p:sp>
@@ -6123,9 +7571,9 @@
                 <a:spcPct val="100000"/>
               </a:lnSpc>
               <a:buNone/>
-              <a:defRPr b="0" lang="en-IN" sz="1200" spc="-1" strike="noStrike">
+              <a:defRPr lang="en-IN" sz="1200" b="0" strike="noStrike" spc="-1">
                 <a:solidFill>
-                  <a:srgbClr val="8b8b8b"/>
+                  <a:srgbClr val="8B8B8B"/>
                 </a:solidFill>
                 <a:latin typeface="Calibri"/>
               </a:defRPr>
@@ -6139,15 +7587,15 @@
               <a:buNone/>
             </a:pPr>
             <a:fld id="{3ADBEB16-080E-4128-AA92-55BC3D8DC08D}" type="slidenum">
-              <a:rPr b="0" lang="en-IN" sz="1200" spc="-1" strike="noStrike">
+              <a:rPr lang="en-IN" sz="1200" b="0" strike="noStrike" spc="-1">
                 <a:solidFill>
-                  <a:srgbClr val="8b8b8b"/>
+                  <a:srgbClr val="8B8B8B"/>
                 </a:solidFill>
                 <a:latin typeface="Calibri"/>
               </a:rPr>
-              <a:t>&lt;number&gt;</a:t>
+              <a:t>‹#›</a:t>
             </a:fld>
-            <a:endParaRPr b="0" lang="en-IN" sz="1200" spc="-1" strike="noStrike">
+            <a:endParaRPr lang="en-IN" sz="1200" b="0" strike="noStrike" spc="-1">
               <a:solidFill>
                 <a:srgbClr val="000000"/>
               </a:solidFill>
@@ -6158,26 +7606,306 @@
       </p:sp>
     </p:spTree>
   </p:cSld>
-  <p:clrMap bg1="lt1" bg2="lt2" tx1="dk1" tx2="dk2" accent1="accent1" accent2="accent2" accent3="accent3" accent4="accent4" accent5="accent5" accent6="accent6" hlink="hlink" folHlink="folHlink"/>
+  <p:clrMap bg1="lt1" tx1="dk1" bg2="lt2" tx2="dk2" accent1="accent1" accent2="accent2" accent3="accent3" accent4="accent4" accent5="accent5" accent6="accent6" hlink="hlink" folHlink="folHlink"/>
   <p:sldLayoutIdLst>
-    <p:sldLayoutId id="2147483662" r:id="rId2"/>
-    <p:sldLayoutId id="2147483663" r:id="rId3"/>
-    <p:sldLayoutId id="2147483664" r:id="rId4"/>
-    <p:sldLayoutId id="2147483665" r:id="rId5"/>
-    <p:sldLayoutId id="2147483666" r:id="rId6"/>
-    <p:sldLayoutId id="2147483667" r:id="rId7"/>
-    <p:sldLayoutId id="2147483668" r:id="rId8"/>
-    <p:sldLayoutId id="2147483669" r:id="rId9"/>
-    <p:sldLayoutId id="2147483670" r:id="rId10"/>
-    <p:sldLayoutId id="2147483671" r:id="rId11"/>
-    <p:sldLayoutId id="2147483672" r:id="rId12"/>
-    <p:sldLayoutId id="2147483673" r:id="rId13"/>
+    <p:sldLayoutId id="2147483662" r:id="rId1"/>
+    <p:sldLayoutId id="2147483663" r:id="rId2"/>
+    <p:sldLayoutId id="2147483664" r:id="rId3"/>
+    <p:sldLayoutId id="2147483665" r:id="rId4"/>
+    <p:sldLayoutId id="2147483666" r:id="rId5"/>
+    <p:sldLayoutId id="2147483667" r:id="rId6"/>
+    <p:sldLayoutId id="2147483668" r:id="rId7"/>
+    <p:sldLayoutId id="2147483669" r:id="rId8"/>
+    <p:sldLayoutId id="2147483670" r:id="rId9"/>
+    <p:sldLayoutId id="2147483671" r:id="rId10"/>
+    <p:sldLayoutId id="2147483672" r:id="rId11"/>
+    <p:sldLayoutId id="2147483673" r:id="rId12"/>
   </p:sldLayoutIdLst>
+  <p:txStyles>
+    <p:titleStyle>
+      <a:lvl1pPr algn="l" defTabSz="914400" rtl="0" eaLnBrk="1" latinLnBrk="0" hangingPunct="1">
+        <a:lnSpc>
+          <a:spcPct val="90000"/>
+        </a:lnSpc>
+        <a:spcBef>
+          <a:spcPct val="0"/>
+        </a:spcBef>
+        <a:buNone/>
+        <a:defRPr sz="4400" kern="1200">
+          <a:solidFill>
+            <a:schemeClr val="tx1"/>
+          </a:solidFill>
+          <a:latin typeface="+mj-lt"/>
+          <a:ea typeface="+mj-ea"/>
+          <a:cs typeface="+mj-cs"/>
+        </a:defRPr>
+      </a:lvl1pPr>
+    </p:titleStyle>
+    <p:bodyStyle>
+      <a:lvl1pPr marL="228600" indent="-228600" algn="l" defTabSz="914400" rtl="0" eaLnBrk="1" latinLnBrk="0" hangingPunct="1">
+        <a:lnSpc>
+          <a:spcPct val="90000"/>
+        </a:lnSpc>
+        <a:spcBef>
+          <a:spcPts val="1000"/>
+        </a:spcBef>
+        <a:buFont typeface="Arial" panose="020B0604020202020204" pitchFamily="34" charset="0"/>
+        <a:buChar char="•"/>
+        <a:defRPr sz="2800" kern="1200">
+          <a:solidFill>
+            <a:schemeClr val="tx1"/>
+          </a:solidFill>
+          <a:latin typeface="+mn-lt"/>
+          <a:ea typeface="+mn-ea"/>
+          <a:cs typeface="+mn-cs"/>
+        </a:defRPr>
+      </a:lvl1pPr>
+      <a:lvl2pPr marL="685800" indent="-228600" algn="l" defTabSz="914400" rtl="0" eaLnBrk="1" latinLnBrk="0" hangingPunct="1">
+        <a:lnSpc>
+          <a:spcPct val="90000"/>
+        </a:lnSpc>
+        <a:spcBef>
+          <a:spcPts val="500"/>
+        </a:spcBef>
+        <a:buFont typeface="Arial" panose="020B0604020202020204" pitchFamily="34" charset="0"/>
+        <a:buChar char="•"/>
+        <a:defRPr sz="2400" kern="1200">
+          <a:solidFill>
+            <a:schemeClr val="tx1"/>
+          </a:solidFill>
+          <a:latin typeface="+mn-lt"/>
+          <a:ea typeface="+mn-ea"/>
+          <a:cs typeface="+mn-cs"/>
+        </a:defRPr>
+      </a:lvl2pPr>
+      <a:lvl3pPr marL="1143000" indent="-228600" algn="l" defTabSz="914400" rtl="0" eaLnBrk="1" latinLnBrk="0" hangingPunct="1">
+        <a:lnSpc>
+          <a:spcPct val="90000"/>
+        </a:lnSpc>
+        <a:spcBef>
+          <a:spcPts val="500"/>
+        </a:spcBef>
+        <a:buFont typeface="Arial" panose="020B0604020202020204" pitchFamily="34" charset="0"/>
+        <a:buChar char="•"/>
+        <a:defRPr sz="2000" kern="1200">
+          <a:solidFill>
+            <a:schemeClr val="tx1"/>
+          </a:solidFill>
+          <a:latin typeface="+mn-lt"/>
+          <a:ea typeface="+mn-ea"/>
+          <a:cs typeface="+mn-cs"/>
+        </a:defRPr>
+      </a:lvl3pPr>
+      <a:lvl4pPr marL="1600200" indent="-228600" algn="l" defTabSz="914400" rtl="0" eaLnBrk="1" latinLnBrk="0" hangingPunct="1">
+        <a:lnSpc>
+          <a:spcPct val="90000"/>
+        </a:lnSpc>
+        <a:spcBef>
+          <a:spcPts val="500"/>
+        </a:spcBef>
+        <a:buFont typeface="Arial" panose="020B0604020202020204" pitchFamily="34" charset="0"/>
+        <a:buChar char="•"/>
+        <a:defRPr sz="1800" kern="1200">
+          <a:solidFill>
+            <a:schemeClr val="tx1"/>
+          </a:solidFill>
+          <a:latin typeface="+mn-lt"/>
+          <a:ea typeface="+mn-ea"/>
+          <a:cs typeface="+mn-cs"/>
+        </a:defRPr>
+      </a:lvl4pPr>
+      <a:lvl5pPr marL="2057400" indent="-228600" algn="l" defTabSz="914400" rtl="0" eaLnBrk="1" latinLnBrk="0" hangingPunct="1">
+        <a:lnSpc>
+          <a:spcPct val="90000"/>
+        </a:lnSpc>
+        <a:spcBef>
+          <a:spcPts val="500"/>
+        </a:spcBef>
+        <a:buFont typeface="Arial" panose="020B0604020202020204" pitchFamily="34" charset="0"/>
+        <a:buChar char="•"/>
+        <a:defRPr sz="1800" kern="1200">
+          <a:solidFill>
+            <a:schemeClr val="tx1"/>
+          </a:solidFill>
+          <a:latin typeface="+mn-lt"/>
+          <a:ea typeface="+mn-ea"/>
+          <a:cs typeface="+mn-cs"/>
+        </a:defRPr>
+      </a:lvl5pPr>
+      <a:lvl6pPr marL="2514600" indent="-228600" algn="l" defTabSz="914400" rtl="0" eaLnBrk="1" latinLnBrk="0" hangingPunct="1">
+        <a:lnSpc>
+          <a:spcPct val="90000"/>
+        </a:lnSpc>
+        <a:spcBef>
+          <a:spcPts val="500"/>
+        </a:spcBef>
+        <a:buFont typeface="Arial" panose="020B0604020202020204" pitchFamily="34" charset="0"/>
+        <a:buChar char="•"/>
+        <a:defRPr sz="1800" kern="1200">
+          <a:solidFill>
+            <a:schemeClr val="tx1"/>
+          </a:solidFill>
+          <a:latin typeface="+mn-lt"/>
+          <a:ea typeface="+mn-ea"/>
+          <a:cs typeface="+mn-cs"/>
+        </a:defRPr>
+      </a:lvl6pPr>
+      <a:lvl7pPr marL="2971800" indent="-228600" algn="l" defTabSz="914400" rtl="0" eaLnBrk="1" latinLnBrk="0" hangingPunct="1">
+        <a:lnSpc>
+          <a:spcPct val="90000"/>
+        </a:lnSpc>
+        <a:spcBef>
+          <a:spcPts val="500"/>
+        </a:spcBef>
+        <a:buFont typeface="Arial" panose="020B0604020202020204" pitchFamily="34" charset="0"/>
+        <a:buChar char="•"/>
+        <a:defRPr sz="1800" kern="1200">
+          <a:solidFill>
+            <a:schemeClr val="tx1"/>
+          </a:solidFill>
+          <a:latin typeface="+mn-lt"/>
+          <a:ea typeface="+mn-ea"/>
+          <a:cs typeface="+mn-cs"/>
+        </a:defRPr>
+      </a:lvl7pPr>
+      <a:lvl8pPr marL="3429000" indent="-228600" algn="l" defTabSz="914400" rtl="0" eaLnBrk="1" latinLnBrk="0" hangingPunct="1">
+        <a:lnSpc>
+          <a:spcPct val="90000"/>
+        </a:lnSpc>
+        <a:spcBef>
+          <a:spcPts val="500"/>
+        </a:spcBef>
+        <a:buFont typeface="Arial" panose="020B0604020202020204" pitchFamily="34" charset="0"/>
+        <a:buChar char="•"/>
+        <a:defRPr sz="1800" kern="1200">
+          <a:solidFill>
+            <a:schemeClr val="tx1"/>
+          </a:solidFill>
+          <a:latin typeface="+mn-lt"/>
+          <a:ea typeface="+mn-ea"/>
+          <a:cs typeface="+mn-cs"/>
+        </a:defRPr>
+      </a:lvl8pPr>
+      <a:lvl9pPr marL="3886200" indent="-228600" algn="l" defTabSz="914400" rtl="0" eaLnBrk="1" latinLnBrk="0" hangingPunct="1">
+        <a:lnSpc>
+          <a:spcPct val="90000"/>
+        </a:lnSpc>
+        <a:spcBef>
+          <a:spcPts val="500"/>
+        </a:spcBef>
+        <a:buFont typeface="Arial" panose="020B0604020202020204" pitchFamily="34" charset="0"/>
+        <a:buChar char="•"/>
+        <a:defRPr sz="1800" kern="1200">
+          <a:solidFill>
+            <a:schemeClr val="tx1"/>
+          </a:solidFill>
+          <a:latin typeface="+mn-lt"/>
+          <a:ea typeface="+mn-ea"/>
+          <a:cs typeface="+mn-cs"/>
+        </a:defRPr>
+      </a:lvl9pPr>
+    </p:bodyStyle>
+    <p:otherStyle>
+      <a:defPPr>
+        <a:defRPr lang="en-US"/>
+      </a:defPPr>
+      <a:lvl1pPr marL="0" algn="l" defTabSz="914400" rtl="0" eaLnBrk="1" latinLnBrk="0" hangingPunct="1">
+        <a:defRPr sz="1800" kern="1200">
+          <a:solidFill>
+            <a:schemeClr val="tx1"/>
+          </a:solidFill>
+          <a:latin typeface="+mn-lt"/>
+          <a:ea typeface="+mn-ea"/>
+          <a:cs typeface="+mn-cs"/>
+        </a:defRPr>
+      </a:lvl1pPr>
+      <a:lvl2pPr marL="457200" algn="l" defTabSz="914400" rtl="0" eaLnBrk="1" latinLnBrk="0" hangingPunct="1">
+        <a:defRPr sz="1800" kern="1200">
+          <a:solidFill>
+            <a:schemeClr val="tx1"/>
+          </a:solidFill>
+          <a:latin typeface="+mn-lt"/>
+          <a:ea typeface="+mn-ea"/>
+          <a:cs typeface="+mn-cs"/>
+        </a:defRPr>
+      </a:lvl2pPr>
+      <a:lvl3pPr marL="914400" algn="l" defTabSz="914400" rtl="0" eaLnBrk="1" latinLnBrk="0" hangingPunct="1">
+        <a:defRPr sz="1800" kern="1200">
+          <a:solidFill>
+            <a:schemeClr val="tx1"/>
+          </a:solidFill>
+          <a:latin typeface="+mn-lt"/>
+          <a:ea typeface="+mn-ea"/>
+          <a:cs typeface="+mn-cs"/>
+        </a:defRPr>
+      </a:lvl3pPr>
+      <a:lvl4pPr marL="1371600" algn="l" defTabSz="914400" rtl="0" eaLnBrk="1" latinLnBrk="0" hangingPunct="1">
+        <a:defRPr sz="1800" kern="1200">
+          <a:solidFill>
+            <a:schemeClr val="tx1"/>
+          </a:solidFill>
+          <a:latin typeface="+mn-lt"/>
+          <a:ea typeface="+mn-ea"/>
+          <a:cs typeface="+mn-cs"/>
+        </a:defRPr>
+      </a:lvl4pPr>
+      <a:lvl5pPr marL="1828800" algn="l" defTabSz="914400" rtl="0" eaLnBrk="1" latinLnBrk="0" hangingPunct="1">
+        <a:defRPr sz="1800" kern="1200">
+          <a:solidFill>
+            <a:schemeClr val="tx1"/>
+          </a:solidFill>
+          <a:latin typeface="+mn-lt"/>
+          <a:ea typeface="+mn-ea"/>
+          <a:cs typeface="+mn-cs"/>
+        </a:defRPr>
+      </a:lvl5pPr>
+      <a:lvl6pPr marL="2286000" algn="l" defTabSz="914400" rtl="0" eaLnBrk="1" latinLnBrk="0" hangingPunct="1">
+        <a:defRPr sz="1800" kern="1200">
+          <a:solidFill>
+            <a:schemeClr val="tx1"/>
+          </a:solidFill>
+          <a:latin typeface="+mn-lt"/>
+          <a:ea typeface="+mn-ea"/>
+          <a:cs typeface="+mn-cs"/>
+        </a:defRPr>
+      </a:lvl6pPr>
+      <a:lvl7pPr marL="2743200" algn="l" defTabSz="914400" rtl="0" eaLnBrk="1" latinLnBrk="0" hangingPunct="1">
+        <a:defRPr sz="1800" kern="1200">
+          <a:solidFill>
+            <a:schemeClr val="tx1"/>
+          </a:solidFill>
+          <a:latin typeface="+mn-lt"/>
+          <a:ea typeface="+mn-ea"/>
+          <a:cs typeface="+mn-cs"/>
+        </a:defRPr>
+      </a:lvl7pPr>
+      <a:lvl8pPr marL="3200400" algn="l" defTabSz="914400" rtl="0" eaLnBrk="1" latinLnBrk="0" hangingPunct="1">
+        <a:defRPr sz="1800" kern="1200">
+          <a:solidFill>
+            <a:schemeClr val="tx1"/>
+          </a:solidFill>
+          <a:latin typeface="+mn-lt"/>
+          <a:ea typeface="+mn-ea"/>
+          <a:cs typeface="+mn-cs"/>
+        </a:defRPr>
+      </a:lvl8pPr>
+      <a:lvl9pPr marL="3657600" algn="l" defTabSz="914400" rtl="0" eaLnBrk="1" latinLnBrk="0" hangingPunct="1">
+        <a:defRPr sz="1800" kern="1200">
+          <a:solidFill>
+            <a:schemeClr val="tx1"/>
+          </a:solidFill>
+          <a:latin typeface="+mn-lt"/>
+          <a:ea typeface="+mn-ea"/>
+          <a:cs typeface="+mn-cs"/>
+        </a:defRPr>
+      </a:lvl9pPr>
+    </p:otherStyle>
+  </p:txStyles>
 </p:sldMaster>
 </file>
 
 <file path=ppt/slides/slide1.xml><?xml version="1.0" encoding="utf-8"?>
-<p:sld xmlns:a="http://schemas.openxmlformats.org/drawingml/2006/main" xmlns:p="http://schemas.openxmlformats.org/presentationml/2006/main" xmlns:r="http://schemas.openxmlformats.org/officeDocument/2006/relationships" xmlns:p14="http://schemas.microsoft.com/office/powerpoint/2010/main" xmlns:p15="http://schemas.microsoft.com/office/powerpoint/2012/main" xmlns:mc="http://schemas.openxmlformats.org/markup-compatibility/2006">
+<p:sld xmlns:a="http://schemas.openxmlformats.org/drawingml/2006/main" xmlns:r="http://schemas.openxmlformats.org/officeDocument/2006/relationships" xmlns:p="http://schemas.openxmlformats.org/presentationml/2006/main">
   <p:cSld>
     <p:spTree>
       <p:nvGrpSpPr>
@@ -6220,6 +7948,7 @@
           <a:bodyPr anchor="b">
             <a:noAutofit/>
           </a:bodyPr>
+          <a:lstStyle/>
           <a:p>
             <a:pPr indent="0" algn="ctr">
               <a:lnSpc>
@@ -6228,7 +7957,7 @@
               <a:buNone/>
             </a:pPr>
             <a:r>
-              <a:rPr b="0" lang="en-IN" sz="6000" spc="-1" strike="noStrike">
+              <a:rPr lang="en-IN" sz="6000" b="0" strike="noStrike" spc="-1">
                 <a:solidFill>
                   <a:srgbClr val="000000"/>
                 </a:solidFill>
@@ -6236,7 +7965,7 @@
               </a:rPr>
               <a:t>SR in thin-film ferro-electric capacitor</a:t>
             </a:r>
-            <a:endParaRPr b="0" lang="en-US" sz="6000" spc="-1" strike="noStrike">
+            <a:endParaRPr lang="en-US" sz="6000" b="0" strike="noStrike" spc="-1">
               <a:solidFill>
                 <a:srgbClr val="000000"/>
               </a:solidFill>
@@ -6272,11 +8001,12 @@
           <a:bodyPr anchor="t">
             <a:noAutofit/>
           </a:bodyPr>
+          <a:lstStyle/>
           <a:p>
             <a:pPr indent="0" algn="ctr">
               <a:buNone/>
             </a:pPr>
-            <a:endParaRPr b="0" lang="en-IN" sz="2400" spc="-1" strike="noStrike">
+            <a:endParaRPr lang="en-IN" sz="2400" b="0" strike="noStrike" spc="-1">
               <a:solidFill>
                 <a:srgbClr val="000000"/>
               </a:solidFill>
@@ -6287,19 +8017,1676 @@
       </p:sp>
     </p:spTree>
   </p:cSld>
-  <mc:AlternateContent>
-    <mc:Choice Requires="p14">
-      <p:transition spd="slow" p14:dur="2000"/>
-    </mc:Choice>
-    <mc:Fallback>
-      <p:transition spd="slow"/>
-    </mc:Fallback>
-  </mc:AlternateContent>
+  <p:clrMapOvr>
+    <a:masterClrMapping/>
+  </p:clrMapOvr>
+</p:sld>
+</file>
+
+<file path=ppt/slides/slide10.xml><?xml version="1.0" encoding="utf-8"?>
+<p:sld xmlns:a="http://schemas.openxmlformats.org/drawingml/2006/main" xmlns:r="http://schemas.openxmlformats.org/officeDocument/2006/relationships" xmlns:p="http://schemas.openxmlformats.org/presentationml/2006/main">
+  <p:cSld>
+    <p:spTree>
+      <p:nvGrpSpPr>
+        <p:cNvPr id="1" name="">
+          <a:extLst>
+            <a:ext uri="{FF2B5EF4-FFF2-40B4-BE49-F238E27FC236}">
+              <a16:creationId xmlns:a16="http://schemas.microsoft.com/office/drawing/2014/main" id="{7B2A7CD5-1310-69D8-0082-A8300BC61C47}"/>
+            </a:ext>
+          </a:extLst>
+        </p:cNvPr>
+        <p:cNvGrpSpPr/>
+        <p:nvPr/>
+      </p:nvGrpSpPr>
+      <p:grpSpPr>
+        <a:xfrm>
+          <a:off x="0" y="0"/>
+          <a:ext cx="0" cy="0"/>
+          <a:chOff x="0" y="0"/>
+          <a:chExt cx="0" cy="0"/>
+        </a:xfrm>
+      </p:grpSpPr>
+      <p:sp>
+        <p:nvSpPr>
+          <p:cNvPr id="111" name="PlaceHolder 1">
+            <a:extLst>
+              <a:ext uri="{FF2B5EF4-FFF2-40B4-BE49-F238E27FC236}">
+                <a16:creationId xmlns:a16="http://schemas.microsoft.com/office/drawing/2014/main" id="{604D6B5B-B25F-854E-A769-48477D885042}"/>
+              </a:ext>
+            </a:extLst>
+          </p:cNvPr>
+          <p:cNvSpPr>
+            <a:spLocks noGrp="1"/>
+          </p:cNvSpPr>
+          <p:nvPr>
+            <p:ph type="title"/>
+          </p:nvPr>
+        </p:nvSpPr>
+        <p:spPr>
+          <a:xfrm>
+            <a:off x="594799" y="98827"/>
+            <a:ext cx="10515240" cy="1325160"/>
+          </a:xfrm>
+          <a:prstGeom prst="rect">
+            <a:avLst/>
+          </a:prstGeom>
+          <a:noFill/>
+          <a:ln w="0">
+            <a:noFill/>
+          </a:ln>
+        </p:spPr>
+        <p:txBody>
+          <a:bodyPr anchor="ctr">
+            <a:noAutofit/>
+          </a:bodyPr>
+          <a:lstStyle/>
+          <a:p>
+            <a:pPr indent="0">
+              <a:lnSpc>
+                <a:spcPct val="90000"/>
+              </a:lnSpc>
+              <a:buNone/>
+            </a:pPr>
+            <a:r>
+              <a:rPr lang="en-US" spc="-1" dirty="0">
+                <a:solidFill>
+                  <a:srgbClr val="000000"/>
+                </a:solidFill>
+                <a:latin typeface="Calibri Light"/>
+              </a:rPr>
+              <a:t>Noise Characterization</a:t>
+            </a:r>
+            <a:endParaRPr lang="en-US" sz="4400" b="0" strike="noStrike" spc="-1" dirty="0">
+              <a:solidFill>
+                <a:srgbClr val="000000"/>
+              </a:solidFill>
+              <a:latin typeface="Calibri"/>
+            </a:endParaRPr>
+          </a:p>
+        </p:txBody>
+      </p:sp>
+      <p:pic>
+        <p:nvPicPr>
+          <p:cNvPr id="3" name="Picture 2">
+            <a:extLst>
+              <a:ext uri="{FF2B5EF4-FFF2-40B4-BE49-F238E27FC236}">
+                <a16:creationId xmlns:a16="http://schemas.microsoft.com/office/drawing/2014/main" id="{46180E89-5339-80BB-E0F9-D085126AD9B1}"/>
+              </a:ext>
+            </a:extLst>
+          </p:cNvPr>
+          <p:cNvPicPr>
+            <a:picLocks noChangeAspect="1"/>
+          </p:cNvPicPr>
+          <p:nvPr/>
+        </p:nvPicPr>
+        <p:blipFill>
+          <a:blip r:embed="rId3">
+            <a:extLst>
+              <a:ext uri="{28A0092B-C50C-407E-A947-70E740481C1C}">
+                <a14:useLocalDpi xmlns:a14="http://schemas.microsoft.com/office/drawing/2010/main" val="0"/>
+              </a:ext>
+            </a:extLst>
+          </a:blip>
+          <a:srcRect t="5872" b="13639"/>
+          <a:stretch>
+            <a:fillRect/>
+          </a:stretch>
+        </p:blipFill>
+        <p:spPr>
+          <a:xfrm>
+            <a:off x="3565411" y="1140903"/>
+            <a:ext cx="3855749" cy="5519956"/>
+          </a:xfrm>
+          <a:prstGeom prst="rect">
+            <a:avLst/>
+          </a:prstGeom>
+        </p:spPr>
+      </p:pic>
+      <p:pic>
+        <p:nvPicPr>
+          <p:cNvPr id="6" name="Picture 5">
+            <a:extLst>
+              <a:ext uri="{FF2B5EF4-FFF2-40B4-BE49-F238E27FC236}">
+                <a16:creationId xmlns:a16="http://schemas.microsoft.com/office/drawing/2014/main" id="{426EDCEA-EA2C-9EC1-7C2B-0DD8BC98AC69}"/>
+              </a:ext>
+            </a:extLst>
+          </p:cNvPr>
+          <p:cNvPicPr>
+            <a:picLocks noChangeAspect="1"/>
+          </p:cNvPicPr>
+          <p:nvPr/>
+        </p:nvPicPr>
+        <p:blipFill>
+          <a:blip r:embed="rId4">
+            <a:extLst>
+              <a:ext uri="{28A0092B-C50C-407E-A947-70E740481C1C}">
+                <a14:useLocalDpi xmlns:a14="http://schemas.microsoft.com/office/drawing/2010/main" val="0"/>
+              </a:ext>
+            </a:extLst>
+          </a:blip>
+          <a:srcRect t="5902" b="19511"/>
+          <a:stretch>
+            <a:fillRect/>
+          </a:stretch>
+        </p:blipFill>
+        <p:spPr>
+          <a:xfrm>
+            <a:off x="7583647" y="1140903"/>
+            <a:ext cx="4160857" cy="5519956"/>
+          </a:xfrm>
+          <a:prstGeom prst="rect">
+            <a:avLst/>
+          </a:prstGeom>
+        </p:spPr>
+      </p:pic>
+      <p:pic>
+        <p:nvPicPr>
+          <p:cNvPr id="9" name="Picture 8">
+            <a:extLst>
+              <a:ext uri="{FF2B5EF4-FFF2-40B4-BE49-F238E27FC236}">
+                <a16:creationId xmlns:a16="http://schemas.microsoft.com/office/drawing/2014/main" id="{12BF26DD-2CA3-1609-65FF-711A6799BBFB}"/>
+              </a:ext>
+            </a:extLst>
+          </p:cNvPr>
+          <p:cNvPicPr>
+            <a:picLocks noChangeAspect="1"/>
+          </p:cNvPicPr>
+          <p:nvPr/>
+        </p:nvPicPr>
+        <p:blipFill>
+          <a:blip r:embed="rId5" cstate="print">
+            <a:extLst>
+              <a:ext uri="{28A0092B-C50C-407E-A947-70E740481C1C}">
+                <a14:useLocalDpi xmlns:a14="http://schemas.microsoft.com/office/drawing/2010/main" val="0"/>
+              </a:ext>
+            </a:extLst>
+          </a:blip>
+          <a:stretch>
+            <a:fillRect/>
+          </a:stretch>
+        </p:blipFill>
+        <p:spPr>
+          <a:xfrm>
+            <a:off x="180888" y="2841771"/>
+            <a:ext cx="2835198" cy="2118220"/>
+          </a:xfrm>
+          <a:prstGeom prst="rect">
+            <a:avLst/>
+          </a:prstGeom>
+        </p:spPr>
+      </p:pic>
+      <p:pic>
+        <p:nvPicPr>
+          <p:cNvPr id="16" name="Picture 15">
+            <a:extLst>
+              <a:ext uri="{FF2B5EF4-FFF2-40B4-BE49-F238E27FC236}">
+                <a16:creationId xmlns:a16="http://schemas.microsoft.com/office/drawing/2014/main" id="{2794062F-286C-F3B9-EE57-8F50CAC60B4B}"/>
+              </a:ext>
+            </a:extLst>
+          </p:cNvPr>
+          <p:cNvPicPr>
+            <a:picLocks noChangeAspect="1"/>
+          </p:cNvPicPr>
+          <p:nvPr/>
+        </p:nvPicPr>
+        <p:blipFill>
+          <a:blip r:embed="rId6" cstate="print">
+            <a:extLst>
+              <a:ext uri="{28A0092B-C50C-407E-A947-70E740481C1C}">
+                <a14:useLocalDpi xmlns:a14="http://schemas.microsoft.com/office/drawing/2010/main" val="0"/>
+              </a:ext>
+            </a:extLst>
+          </a:blip>
+          <a:stretch>
+            <a:fillRect/>
+          </a:stretch>
+        </p:blipFill>
+        <p:spPr>
+          <a:xfrm>
+            <a:off x="180888" y="5266407"/>
+            <a:ext cx="3066026" cy="1394452"/>
+          </a:xfrm>
+          <a:prstGeom prst="rect">
+            <a:avLst/>
+          </a:prstGeom>
+        </p:spPr>
+      </p:pic>
+    </p:spTree>
+    <p:extLst>
+      <p:ext uri="{BB962C8B-B14F-4D97-AF65-F5344CB8AC3E}">
+        <p14:creationId xmlns:p14="http://schemas.microsoft.com/office/powerpoint/2010/main" val="3596754322"/>
+      </p:ext>
+    </p:extLst>
+  </p:cSld>
+  <p:clrMapOvr>
+    <a:masterClrMapping/>
+  </p:clrMapOvr>
+</p:sld>
+</file>
+
+<file path=ppt/slides/slide11.xml><?xml version="1.0" encoding="utf-8"?>
+<p:sld xmlns:a="http://schemas.openxmlformats.org/drawingml/2006/main" xmlns:r="http://schemas.openxmlformats.org/officeDocument/2006/relationships" xmlns:p="http://schemas.openxmlformats.org/presentationml/2006/main">
+  <p:cSld>
+    <p:spTree>
+      <p:nvGrpSpPr>
+        <p:cNvPr id="1" name="">
+          <a:extLst>
+            <a:ext uri="{FF2B5EF4-FFF2-40B4-BE49-F238E27FC236}">
+              <a16:creationId xmlns:a16="http://schemas.microsoft.com/office/drawing/2014/main" id="{9423ECE3-64BF-C90E-9741-5F9FF53A27C7}"/>
+            </a:ext>
+          </a:extLst>
+        </p:cNvPr>
+        <p:cNvGrpSpPr/>
+        <p:nvPr/>
+      </p:nvGrpSpPr>
+      <p:grpSpPr>
+        <a:xfrm>
+          <a:off x="0" y="0"/>
+          <a:ext cx="0" cy="0"/>
+          <a:chOff x="0" y="0"/>
+          <a:chExt cx="0" cy="0"/>
+        </a:xfrm>
+      </p:grpSpPr>
+      <p:sp>
+        <p:nvSpPr>
+          <p:cNvPr id="111" name="PlaceHolder 1">
+            <a:extLst>
+              <a:ext uri="{FF2B5EF4-FFF2-40B4-BE49-F238E27FC236}">
+                <a16:creationId xmlns:a16="http://schemas.microsoft.com/office/drawing/2014/main" id="{F1F732F0-C154-2369-2F71-917D9338779A}"/>
+              </a:ext>
+            </a:extLst>
+          </p:cNvPr>
+          <p:cNvSpPr>
+            <a:spLocks noGrp="1"/>
+          </p:cNvSpPr>
+          <p:nvPr>
+            <p:ph type="title"/>
+          </p:nvPr>
+        </p:nvSpPr>
+        <p:spPr>
+          <a:xfrm>
+            <a:off x="594799" y="98827"/>
+            <a:ext cx="10515240" cy="1325160"/>
+          </a:xfrm>
+          <a:prstGeom prst="rect">
+            <a:avLst/>
+          </a:prstGeom>
+          <a:noFill/>
+          <a:ln w="0">
+            <a:noFill/>
+          </a:ln>
+        </p:spPr>
+        <p:txBody>
+          <a:bodyPr anchor="ctr">
+            <a:noAutofit/>
+          </a:bodyPr>
+          <a:lstStyle/>
+          <a:p>
+            <a:pPr indent="0">
+              <a:lnSpc>
+                <a:spcPct val="90000"/>
+              </a:lnSpc>
+              <a:buNone/>
+            </a:pPr>
+            <a:r>
+              <a:rPr lang="en-US" sz="4400" b="0" strike="noStrike" spc="-1" dirty="0">
+                <a:solidFill>
+                  <a:srgbClr val="000000"/>
+                </a:solidFill>
+                <a:latin typeface="Calibri Light"/>
+              </a:rPr>
+              <a:t>Found an inconsistency in our assumptions </a:t>
+            </a:r>
+            <a:endParaRPr lang="en-US" sz="4400" b="0" strike="noStrike" spc="-1" dirty="0">
+              <a:solidFill>
+                <a:srgbClr val="000000"/>
+              </a:solidFill>
+              <a:latin typeface="Calibri"/>
+            </a:endParaRPr>
+          </a:p>
+        </p:txBody>
+      </p:sp>
+      <p:pic>
+        <p:nvPicPr>
+          <p:cNvPr id="3" name="Picture 2">
+            <a:extLst>
+              <a:ext uri="{FF2B5EF4-FFF2-40B4-BE49-F238E27FC236}">
+                <a16:creationId xmlns:a16="http://schemas.microsoft.com/office/drawing/2014/main" id="{BBE3D735-A0A8-9E24-314C-C4CC512A050A}"/>
+              </a:ext>
+            </a:extLst>
+          </p:cNvPr>
+          <p:cNvPicPr>
+            <a:picLocks noChangeAspect="1"/>
+          </p:cNvPicPr>
+          <p:nvPr/>
+        </p:nvPicPr>
+        <p:blipFill>
+          <a:blip r:embed="rId3" cstate="print">
+            <a:extLst>
+              <a:ext uri="{28A0092B-C50C-407E-A947-70E740481C1C}">
+                <a14:useLocalDpi xmlns:a14="http://schemas.microsoft.com/office/drawing/2010/main" val="0"/>
+              </a:ext>
+            </a:extLst>
+          </a:blip>
+          <a:stretch>
+            <a:fillRect/>
+          </a:stretch>
+        </p:blipFill>
+        <p:spPr>
+          <a:xfrm>
+            <a:off x="594799" y="1423987"/>
+            <a:ext cx="6032504" cy="1658938"/>
+          </a:xfrm>
+          <a:prstGeom prst="rect">
+            <a:avLst/>
+          </a:prstGeom>
+        </p:spPr>
+      </p:pic>
+      <p:pic>
+        <p:nvPicPr>
+          <p:cNvPr id="6" name="Picture 5">
+            <a:extLst>
+              <a:ext uri="{FF2B5EF4-FFF2-40B4-BE49-F238E27FC236}">
+                <a16:creationId xmlns:a16="http://schemas.microsoft.com/office/drawing/2014/main" id="{4C1977D9-4FF6-E0CF-3959-577819F45DF9}"/>
+              </a:ext>
+            </a:extLst>
+          </p:cNvPr>
+          <p:cNvPicPr>
+            <a:picLocks noChangeAspect="1"/>
+          </p:cNvPicPr>
+          <p:nvPr/>
+        </p:nvPicPr>
+        <p:blipFill>
+          <a:blip r:embed="rId4" cstate="print">
+            <a:extLst>
+              <a:ext uri="{28A0092B-C50C-407E-A947-70E740481C1C}">
+                <a14:useLocalDpi xmlns:a14="http://schemas.microsoft.com/office/drawing/2010/main" val="0"/>
+              </a:ext>
+            </a:extLst>
+          </a:blip>
+          <a:stretch>
+            <a:fillRect/>
+          </a:stretch>
+        </p:blipFill>
+        <p:spPr>
+          <a:xfrm>
+            <a:off x="594799" y="3192386"/>
+            <a:ext cx="6032504" cy="1658938"/>
+          </a:xfrm>
+          <a:prstGeom prst="rect">
+            <a:avLst/>
+          </a:prstGeom>
+        </p:spPr>
+      </p:pic>
+      <p:pic>
+        <p:nvPicPr>
+          <p:cNvPr id="9" name="Picture 8">
+            <a:extLst>
+              <a:ext uri="{FF2B5EF4-FFF2-40B4-BE49-F238E27FC236}">
+                <a16:creationId xmlns:a16="http://schemas.microsoft.com/office/drawing/2014/main" id="{A5F1E89B-149A-4B6B-4A0A-96ACDAD2A9D2}"/>
+              </a:ext>
+            </a:extLst>
+          </p:cNvPr>
+          <p:cNvPicPr>
+            <a:picLocks noChangeAspect="1"/>
+          </p:cNvPicPr>
+          <p:nvPr/>
+        </p:nvPicPr>
+        <p:blipFill>
+          <a:blip r:embed="rId5" cstate="print">
+            <a:extLst>
+              <a:ext uri="{28A0092B-C50C-407E-A947-70E740481C1C}">
+                <a14:useLocalDpi xmlns:a14="http://schemas.microsoft.com/office/drawing/2010/main" val="0"/>
+              </a:ext>
+            </a:extLst>
+          </a:blip>
+          <a:stretch>
+            <a:fillRect/>
+          </a:stretch>
+        </p:blipFill>
+        <p:spPr>
+          <a:xfrm>
+            <a:off x="594799" y="4960785"/>
+            <a:ext cx="6032504" cy="1658938"/>
+          </a:xfrm>
+          <a:prstGeom prst="rect">
+            <a:avLst/>
+          </a:prstGeom>
+        </p:spPr>
+      </p:pic>
+      <p:sp>
+        <p:nvSpPr>
+          <p:cNvPr id="14" name="TextBox 13">
+            <a:extLst>
+              <a:ext uri="{FF2B5EF4-FFF2-40B4-BE49-F238E27FC236}">
+                <a16:creationId xmlns:a16="http://schemas.microsoft.com/office/drawing/2014/main" id="{5397B1AD-566F-FEC6-8482-19DA6E511CA6}"/>
+              </a:ext>
+            </a:extLst>
+          </p:cNvPr>
+          <p:cNvSpPr txBox="1"/>
+          <p:nvPr/>
+        </p:nvSpPr>
+        <p:spPr>
+          <a:xfrm>
+            <a:off x="6731147" y="1054655"/>
+            <a:ext cx="1313895" cy="369332"/>
+          </a:xfrm>
+          <a:prstGeom prst="rect">
+            <a:avLst/>
+          </a:prstGeom>
+          <a:noFill/>
+        </p:spPr>
+        <p:txBody>
+          <a:bodyPr wrap="square" rtlCol="0">
+            <a:spAutoFit/>
+          </a:bodyPr>
+          <a:lstStyle/>
+          <a:p>
+            <a:r>
+              <a:rPr lang="en-IN" dirty="0">
+                <a:highlight>
+                  <a:srgbClr val="FFFF00"/>
+                </a:highlight>
+              </a:rPr>
+              <a:t>Noise BW</a:t>
+            </a:r>
+          </a:p>
+        </p:txBody>
+      </p:sp>
+      <p:sp>
+        <p:nvSpPr>
+          <p:cNvPr id="16" name="TextBox 15">
+            <a:extLst>
+              <a:ext uri="{FF2B5EF4-FFF2-40B4-BE49-F238E27FC236}">
+                <a16:creationId xmlns:a16="http://schemas.microsoft.com/office/drawing/2014/main" id="{33FED09D-1FE8-2067-EE4B-4DA41DDFEF5A}"/>
+              </a:ext>
+            </a:extLst>
+          </p:cNvPr>
+          <p:cNvSpPr txBox="1"/>
+          <p:nvPr/>
+        </p:nvSpPr>
+        <p:spPr>
+          <a:xfrm>
+            <a:off x="6731147" y="2436288"/>
+            <a:ext cx="1313895" cy="369332"/>
+          </a:xfrm>
+          <a:prstGeom prst="rect">
+            <a:avLst/>
+          </a:prstGeom>
+          <a:noFill/>
+        </p:spPr>
+        <p:txBody>
+          <a:bodyPr wrap="square" rtlCol="0">
+            <a:spAutoFit/>
+          </a:bodyPr>
+          <a:lstStyle/>
+          <a:p>
+            <a:r>
+              <a:rPr lang="en-IN" dirty="0">
+                <a:highlight>
+                  <a:srgbClr val="FFFF00"/>
+                </a:highlight>
+              </a:rPr>
+              <a:t>10 kHz</a:t>
+            </a:r>
+          </a:p>
+        </p:txBody>
+      </p:sp>
+      <p:sp>
+        <p:nvSpPr>
+          <p:cNvPr id="18" name="TextBox 17">
+            <a:extLst>
+              <a:ext uri="{FF2B5EF4-FFF2-40B4-BE49-F238E27FC236}">
+                <a16:creationId xmlns:a16="http://schemas.microsoft.com/office/drawing/2014/main" id="{0624B89C-F8AB-29C6-E3B4-BFD158E40723}"/>
+              </a:ext>
+            </a:extLst>
+          </p:cNvPr>
+          <p:cNvSpPr txBox="1"/>
+          <p:nvPr/>
+        </p:nvSpPr>
+        <p:spPr>
+          <a:xfrm>
+            <a:off x="6731147" y="4241319"/>
+            <a:ext cx="1313895" cy="369332"/>
+          </a:xfrm>
+          <a:prstGeom prst="rect">
+            <a:avLst/>
+          </a:prstGeom>
+          <a:noFill/>
+        </p:spPr>
+        <p:txBody>
+          <a:bodyPr wrap="square" rtlCol="0">
+            <a:spAutoFit/>
+          </a:bodyPr>
+          <a:lstStyle/>
+          <a:p>
+            <a:r>
+              <a:rPr lang="en-IN" dirty="0">
+                <a:highlight>
+                  <a:srgbClr val="FFFF00"/>
+                </a:highlight>
+              </a:rPr>
+              <a:t>100 kHz</a:t>
+            </a:r>
+          </a:p>
+        </p:txBody>
+      </p:sp>
+      <p:sp>
+        <p:nvSpPr>
+          <p:cNvPr id="19" name="TextBox 18">
+            <a:extLst>
+              <a:ext uri="{FF2B5EF4-FFF2-40B4-BE49-F238E27FC236}">
+                <a16:creationId xmlns:a16="http://schemas.microsoft.com/office/drawing/2014/main" id="{589AFDF3-219D-DF00-CD13-DB021913AB36}"/>
+              </a:ext>
+            </a:extLst>
+          </p:cNvPr>
+          <p:cNvSpPr txBox="1"/>
+          <p:nvPr/>
+        </p:nvSpPr>
+        <p:spPr>
+          <a:xfrm>
+            <a:off x="6731147" y="6046350"/>
+            <a:ext cx="1313895" cy="369332"/>
+          </a:xfrm>
+          <a:prstGeom prst="rect">
+            <a:avLst/>
+          </a:prstGeom>
+          <a:noFill/>
+        </p:spPr>
+        <p:txBody>
+          <a:bodyPr wrap="square" rtlCol="0">
+            <a:spAutoFit/>
+          </a:bodyPr>
+          <a:lstStyle/>
+          <a:p>
+            <a:r>
+              <a:rPr lang="en-IN" dirty="0">
+                <a:highlight>
+                  <a:srgbClr val="FFFF00"/>
+                </a:highlight>
+              </a:rPr>
+              <a:t>1 MHz</a:t>
+            </a:r>
+          </a:p>
+        </p:txBody>
+      </p:sp>
+      <p:sp>
+        <p:nvSpPr>
+          <p:cNvPr id="20" name="TextBox 6">
+            <a:extLst>
+              <a:ext uri="{FF2B5EF4-FFF2-40B4-BE49-F238E27FC236}">
+                <a16:creationId xmlns:a16="http://schemas.microsoft.com/office/drawing/2014/main" id="{9EF546C3-5375-E4D0-9F3E-E2589A7C68FD}"/>
+              </a:ext>
+            </a:extLst>
+          </p:cNvPr>
+          <p:cNvSpPr/>
+          <p:nvPr/>
+        </p:nvSpPr>
+        <p:spPr>
+          <a:xfrm>
+            <a:off x="6727494" y="4795894"/>
+            <a:ext cx="1870745" cy="1198875"/>
+          </a:xfrm>
+          <a:prstGeom prst="rect">
+            <a:avLst/>
+          </a:prstGeom>
+          <a:noFill/>
+          <a:ln w="0">
+            <a:noFill/>
+          </a:ln>
+        </p:spPr>
+        <p:style>
+          <a:lnRef idx="0">
+            <a:scrgbClr r="0" g="0" b="0"/>
+          </a:lnRef>
+          <a:fillRef idx="0">
+            <a:scrgbClr r="0" g="0" b="0"/>
+          </a:fillRef>
+          <a:effectRef idx="0">
+            <a:scrgbClr r="0" g="0" b="0"/>
+          </a:effectRef>
+          <a:fontRef idx="minor"/>
+        </p:style>
+        <p:txBody>
+          <a:bodyPr wrap="square" lIns="90000" tIns="45000" rIns="90000" bIns="45000" anchor="t">
+            <a:spAutoFit/>
+          </a:bodyPr>
+          <a:lstStyle/>
+          <a:p>
+            <a:pPr>
+              <a:lnSpc>
+                <a:spcPct val="100000"/>
+              </a:lnSpc>
+            </a:pPr>
+            <a:r>
+              <a:rPr lang="en-IN" sz="1800" b="0" strike="noStrike" spc="-1" dirty="0">
+                <a:solidFill>
+                  <a:srgbClr val="000000"/>
+                </a:solidFill>
+                <a:latin typeface="Calibri"/>
+              </a:rPr>
+              <a:t>The SR peak prediction point is aligning only for higher BW noise</a:t>
+            </a:r>
+            <a:endParaRPr lang="en-IN" sz="1800" b="0" strike="noStrike" spc="-1" dirty="0">
+              <a:solidFill>
+                <a:srgbClr val="000000"/>
+              </a:solidFill>
+              <a:latin typeface="Arial"/>
+            </a:endParaRPr>
+          </a:p>
+        </p:txBody>
+      </p:sp>
+      <p:sp>
+        <p:nvSpPr>
+          <p:cNvPr id="21" name="TextBox 6">
+            <a:extLst>
+              <a:ext uri="{FF2B5EF4-FFF2-40B4-BE49-F238E27FC236}">
+                <a16:creationId xmlns:a16="http://schemas.microsoft.com/office/drawing/2014/main" id="{B93F565C-77D1-CEE8-B9DB-A20971D48A83}"/>
+              </a:ext>
+            </a:extLst>
+          </p:cNvPr>
+          <p:cNvSpPr/>
+          <p:nvPr/>
+        </p:nvSpPr>
+        <p:spPr>
+          <a:xfrm>
+            <a:off x="8849909" y="1800820"/>
+            <a:ext cx="2952720" cy="1475873"/>
+          </a:xfrm>
+          <a:prstGeom prst="rect">
+            <a:avLst/>
+          </a:prstGeom>
+          <a:noFill/>
+          <a:ln w="0">
+            <a:noFill/>
+          </a:ln>
+        </p:spPr>
+        <p:style>
+          <a:lnRef idx="0">
+            <a:scrgbClr r="0" g="0" b="0"/>
+          </a:lnRef>
+          <a:fillRef idx="0">
+            <a:scrgbClr r="0" g="0" b="0"/>
+          </a:fillRef>
+          <a:effectRef idx="0">
+            <a:scrgbClr r="0" g="0" b="0"/>
+          </a:effectRef>
+          <a:fontRef idx="minor"/>
+        </p:style>
+        <p:txBody>
+          <a:bodyPr lIns="90000" tIns="45000" rIns="90000" bIns="45000" anchor="t">
+            <a:spAutoFit/>
+          </a:bodyPr>
+          <a:lstStyle/>
+          <a:p>
+            <a:pPr>
+              <a:lnSpc>
+                <a:spcPct val="100000"/>
+              </a:lnSpc>
+            </a:pPr>
+            <a:r>
+              <a:rPr lang="en-IN" sz="1800" b="0" strike="noStrike" spc="-1" dirty="0">
+                <a:solidFill>
+                  <a:srgbClr val="000000"/>
+                </a:solidFill>
+                <a:highlight>
+                  <a:srgbClr val="00FF00"/>
+                </a:highlight>
+                <a:latin typeface="Calibri"/>
+              </a:rPr>
+              <a:t>Take away: we can’t assume </a:t>
+            </a:r>
+            <a:r>
+              <a:rPr lang="en-IN" spc="-1" dirty="0">
+                <a:solidFill>
+                  <a:srgbClr val="000000"/>
+                </a:solidFill>
+                <a:highlight>
+                  <a:srgbClr val="00FF00"/>
+                </a:highlight>
+                <a:latin typeface="Calibri"/>
+              </a:rPr>
+              <a:t>K</a:t>
+            </a:r>
+            <a:r>
+              <a:rPr lang="en-IN" sz="1800" b="0" strike="noStrike" spc="-1" dirty="0">
+                <a:solidFill>
+                  <a:srgbClr val="000000"/>
+                </a:solidFill>
+                <a:highlight>
+                  <a:srgbClr val="00FF00"/>
+                </a:highlight>
+                <a:latin typeface="Calibri"/>
+              </a:rPr>
+              <a:t>ramers rate formula for a bandlimited noise. The prediction is off by orders of magnitudes.</a:t>
+            </a:r>
+            <a:endParaRPr lang="en-IN" sz="1800" b="0" strike="noStrike" spc="-1" dirty="0">
+              <a:solidFill>
+                <a:srgbClr val="000000"/>
+              </a:solidFill>
+              <a:highlight>
+                <a:srgbClr val="00FF00"/>
+              </a:highlight>
+              <a:latin typeface="Arial"/>
+            </a:endParaRPr>
+          </a:p>
+        </p:txBody>
+      </p:sp>
+      <p:sp>
+        <p:nvSpPr>
+          <p:cNvPr id="22" name="TextBox 6">
+            <a:extLst>
+              <a:ext uri="{FF2B5EF4-FFF2-40B4-BE49-F238E27FC236}">
+                <a16:creationId xmlns:a16="http://schemas.microsoft.com/office/drawing/2014/main" id="{80054943-5A32-AE38-F314-849C493A372D}"/>
+              </a:ext>
+            </a:extLst>
+          </p:cNvPr>
+          <p:cNvSpPr/>
+          <p:nvPr/>
+        </p:nvSpPr>
+        <p:spPr>
+          <a:xfrm>
+            <a:off x="8849909" y="4518896"/>
+            <a:ext cx="2952720" cy="1752872"/>
+          </a:xfrm>
+          <a:prstGeom prst="rect">
+            <a:avLst/>
+          </a:prstGeom>
+          <a:noFill/>
+          <a:ln w="0">
+            <a:noFill/>
+          </a:ln>
+        </p:spPr>
+        <p:style>
+          <a:lnRef idx="0">
+            <a:scrgbClr r="0" g="0" b="0"/>
+          </a:lnRef>
+          <a:fillRef idx="0">
+            <a:scrgbClr r="0" g="0" b="0"/>
+          </a:fillRef>
+          <a:effectRef idx="0">
+            <a:scrgbClr r="0" g="0" b="0"/>
+          </a:effectRef>
+          <a:fontRef idx="minor"/>
+        </p:style>
+        <p:txBody>
+          <a:bodyPr lIns="90000" tIns="45000" rIns="90000" bIns="45000" anchor="t">
+            <a:spAutoFit/>
+          </a:bodyPr>
+          <a:lstStyle/>
+          <a:p>
+            <a:pPr>
+              <a:lnSpc>
+                <a:spcPct val="100000"/>
+              </a:lnSpc>
+            </a:pPr>
+            <a:r>
+              <a:rPr lang="en-IN" sz="1800" b="0" strike="noStrike" spc="-1" dirty="0">
+                <a:solidFill>
+                  <a:srgbClr val="000000"/>
+                </a:solidFill>
+                <a:highlight>
+                  <a:srgbClr val="00FF00"/>
+                </a:highlight>
+                <a:latin typeface="Calibri"/>
+              </a:rPr>
+              <a:t>Dependency on perturbation magnitude is minimal, all though the absolute prediction </a:t>
+            </a:r>
+            <a:r>
+              <a:rPr lang="en-IN" spc="-1" dirty="0">
+                <a:solidFill>
+                  <a:srgbClr val="000000"/>
+                </a:solidFill>
+                <a:highlight>
+                  <a:srgbClr val="00FF00"/>
+                </a:highlight>
+                <a:latin typeface="Calibri"/>
+              </a:rPr>
+              <a:t>matching is observed for small magnitude of perturbation signal</a:t>
+            </a:r>
+            <a:endParaRPr lang="en-IN" sz="1800" b="0" strike="noStrike" spc="-1" dirty="0">
+              <a:solidFill>
+                <a:srgbClr val="000000"/>
+              </a:solidFill>
+              <a:highlight>
+                <a:srgbClr val="00FF00"/>
+              </a:highlight>
+              <a:latin typeface="Arial"/>
+            </a:endParaRPr>
+          </a:p>
+        </p:txBody>
+      </p:sp>
+    </p:spTree>
+    <p:extLst>
+      <p:ext uri="{BB962C8B-B14F-4D97-AF65-F5344CB8AC3E}">
+        <p14:creationId xmlns:p14="http://schemas.microsoft.com/office/powerpoint/2010/main" val="2048537145"/>
+      </p:ext>
+    </p:extLst>
+  </p:cSld>
+  <p:clrMapOvr>
+    <a:masterClrMapping/>
+  </p:clrMapOvr>
+</p:sld>
+</file>
+
+<file path=ppt/slides/slide12.xml><?xml version="1.0" encoding="utf-8"?>
+<p:sld xmlns:a="http://schemas.openxmlformats.org/drawingml/2006/main" xmlns:r="http://schemas.openxmlformats.org/officeDocument/2006/relationships" xmlns:p="http://schemas.openxmlformats.org/presentationml/2006/main">
+  <p:cSld>
+    <p:spTree>
+      <p:nvGrpSpPr>
+        <p:cNvPr id="1" name="">
+          <a:extLst>
+            <a:ext uri="{FF2B5EF4-FFF2-40B4-BE49-F238E27FC236}">
+              <a16:creationId xmlns:a16="http://schemas.microsoft.com/office/drawing/2014/main" id="{66A43C87-3F4E-2D1D-FC8A-A64AA4647C2A}"/>
+            </a:ext>
+          </a:extLst>
+        </p:cNvPr>
+        <p:cNvGrpSpPr/>
+        <p:nvPr/>
+      </p:nvGrpSpPr>
+      <p:grpSpPr>
+        <a:xfrm>
+          <a:off x="0" y="0"/>
+          <a:ext cx="0" cy="0"/>
+          <a:chOff x="0" y="0"/>
+          <a:chExt cx="0" cy="0"/>
+        </a:xfrm>
+      </p:grpSpPr>
+      <p:sp>
+        <p:nvSpPr>
+          <p:cNvPr id="111" name="PlaceHolder 1">
+            <a:extLst>
+              <a:ext uri="{FF2B5EF4-FFF2-40B4-BE49-F238E27FC236}">
+                <a16:creationId xmlns:a16="http://schemas.microsoft.com/office/drawing/2014/main" id="{E3EF709D-3B28-2F36-9FB0-070CDEB2A978}"/>
+              </a:ext>
+            </a:extLst>
+          </p:cNvPr>
+          <p:cNvSpPr>
+            <a:spLocks noGrp="1"/>
+          </p:cNvSpPr>
+          <p:nvPr>
+            <p:ph type="title"/>
+          </p:nvPr>
+        </p:nvSpPr>
+        <p:spPr>
+          <a:xfrm>
+            <a:off x="594799" y="98827"/>
+            <a:ext cx="10515240" cy="1325160"/>
+          </a:xfrm>
+          <a:prstGeom prst="rect">
+            <a:avLst/>
+          </a:prstGeom>
+          <a:noFill/>
+          <a:ln w="0">
+            <a:noFill/>
+          </a:ln>
+        </p:spPr>
+        <p:txBody>
+          <a:bodyPr anchor="ctr">
+            <a:noAutofit/>
+          </a:bodyPr>
+          <a:lstStyle/>
+          <a:p>
+            <a:pPr indent="0">
+              <a:lnSpc>
+                <a:spcPct val="90000"/>
+              </a:lnSpc>
+              <a:buNone/>
+            </a:pPr>
+            <a:r>
+              <a:rPr lang="en-US" sz="4400" b="0" strike="noStrike" spc="-1" dirty="0">
+                <a:solidFill>
+                  <a:srgbClr val="000000"/>
+                </a:solidFill>
+                <a:latin typeface="Calibri Light"/>
+              </a:rPr>
+              <a:t>To solve the SR prediction, we use MFPT</a:t>
+            </a:r>
+            <a:endParaRPr lang="en-US" sz="4400" b="0" strike="noStrike" spc="-1" dirty="0">
+              <a:solidFill>
+                <a:srgbClr val="000000"/>
+              </a:solidFill>
+              <a:latin typeface="Calibri"/>
+            </a:endParaRPr>
+          </a:p>
+        </p:txBody>
+      </p:sp>
+      <p:sp>
+        <p:nvSpPr>
+          <p:cNvPr id="2" name="TextBox 6">
+            <a:extLst>
+              <a:ext uri="{FF2B5EF4-FFF2-40B4-BE49-F238E27FC236}">
+                <a16:creationId xmlns:a16="http://schemas.microsoft.com/office/drawing/2014/main" id="{B20047FE-042F-DE16-70DF-F369FCAC28D3}"/>
+              </a:ext>
+            </a:extLst>
+          </p:cNvPr>
+          <p:cNvSpPr/>
+          <p:nvPr/>
+        </p:nvSpPr>
+        <p:spPr>
+          <a:xfrm>
+            <a:off x="8003097" y="1240048"/>
+            <a:ext cx="3875033" cy="367878"/>
+          </a:xfrm>
+          <a:prstGeom prst="rect">
+            <a:avLst/>
+          </a:prstGeom>
+          <a:noFill/>
+          <a:ln w="0">
+            <a:noFill/>
+          </a:ln>
+        </p:spPr>
+        <p:style>
+          <a:lnRef idx="0">
+            <a:scrgbClr r="0" g="0" b="0"/>
+          </a:lnRef>
+          <a:fillRef idx="0">
+            <a:scrgbClr r="0" g="0" b="0"/>
+          </a:fillRef>
+          <a:effectRef idx="0">
+            <a:scrgbClr r="0" g="0" b="0"/>
+          </a:effectRef>
+          <a:fontRef idx="minor"/>
+        </p:style>
+        <p:txBody>
+          <a:bodyPr wrap="square" lIns="90000" tIns="45000" rIns="90000" bIns="45000" anchor="t">
+            <a:spAutoFit/>
+          </a:bodyPr>
+          <a:lstStyle/>
+          <a:p>
+            <a:pPr>
+              <a:lnSpc>
+                <a:spcPct val="100000"/>
+              </a:lnSpc>
+            </a:pPr>
+            <a:r>
+              <a:rPr lang="en-IN" sz="1800" b="0" strike="noStrike" spc="-1" dirty="0">
+                <a:solidFill>
+                  <a:srgbClr val="000000"/>
+                </a:solidFill>
+                <a:highlight>
+                  <a:srgbClr val="00FF00"/>
+                </a:highlight>
+                <a:latin typeface="Calibri"/>
+              </a:rPr>
+              <a:t>MFPT: Mean First Passage Time</a:t>
+            </a:r>
+            <a:endParaRPr lang="en-IN" sz="1800" b="0" strike="noStrike" spc="-1" dirty="0">
+              <a:solidFill>
+                <a:srgbClr val="000000"/>
+              </a:solidFill>
+              <a:highlight>
+                <a:srgbClr val="00FF00"/>
+              </a:highlight>
+              <a:latin typeface="Arial"/>
+            </a:endParaRPr>
+          </a:p>
+        </p:txBody>
+      </p:sp>
+      <p:pic>
+        <p:nvPicPr>
+          <p:cNvPr id="5" name="Picture 4">
+            <a:extLst>
+              <a:ext uri="{FF2B5EF4-FFF2-40B4-BE49-F238E27FC236}">
+                <a16:creationId xmlns:a16="http://schemas.microsoft.com/office/drawing/2014/main" id="{51CD5756-216C-9D33-F791-510EC885B8F4}"/>
+              </a:ext>
+            </a:extLst>
+          </p:cNvPr>
+          <p:cNvPicPr>
+            <a:picLocks noChangeAspect="1"/>
+          </p:cNvPicPr>
+          <p:nvPr/>
+        </p:nvPicPr>
+        <p:blipFill>
+          <a:blip r:embed="rId3">
+            <a:extLst>
+              <a:ext uri="{28A0092B-C50C-407E-A947-70E740481C1C}">
+                <a14:useLocalDpi xmlns:a14="http://schemas.microsoft.com/office/drawing/2010/main" val="0"/>
+              </a:ext>
+            </a:extLst>
+          </a:blip>
+          <a:stretch>
+            <a:fillRect/>
+          </a:stretch>
+        </p:blipFill>
+        <p:spPr>
+          <a:xfrm>
+            <a:off x="594799" y="1524036"/>
+            <a:ext cx="4413429" cy="4059265"/>
+          </a:xfrm>
+          <a:prstGeom prst="rect">
+            <a:avLst/>
+          </a:prstGeom>
+        </p:spPr>
+      </p:pic>
+      <p:sp>
+        <p:nvSpPr>
+          <p:cNvPr id="7" name="TextBox 6">
+            <a:extLst>
+              <a:ext uri="{FF2B5EF4-FFF2-40B4-BE49-F238E27FC236}">
+                <a16:creationId xmlns:a16="http://schemas.microsoft.com/office/drawing/2014/main" id="{715581E2-7BC2-5480-3055-91823374D614}"/>
+              </a:ext>
+            </a:extLst>
+          </p:cNvPr>
+          <p:cNvSpPr txBox="1"/>
+          <p:nvPr/>
+        </p:nvSpPr>
+        <p:spPr>
+          <a:xfrm>
+            <a:off x="5008228" y="2103543"/>
+            <a:ext cx="4518490" cy="923330"/>
+          </a:xfrm>
+          <a:prstGeom prst="rect">
+            <a:avLst/>
+          </a:prstGeom>
+          <a:noFill/>
+        </p:spPr>
+        <p:txBody>
+          <a:bodyPr wrap="square" rtlCol="0">
+            <a:spAutoFit/>
+          </a:bodyPr>
+          <a:lstStyle/>
+          <a:p>
+            <a:r>
+              <a:rPr lang="en-IN" dirty="0">
+                <a:highlight>
+                  <a:srgbClr val="FFFF00"/>
+                </a:highlight>
+              </a:rPr>
+              <a:t>Instead of </a:t>
+            </a:r>
+            <a:r>
+              <a:rPr lang="en-IN" dirty="0" err="1">
+                <a:highlight>
+                  <a:srgbClr val="FFFF00"/>
+                </a:highlight>
+              </a:rPr>
+              <a:t>Ktime</a:t>
+            </a:r>
+            <a:r>
+              <a:rPr lang="en-IN" dirty="0">
+                <a:highlight>
+                  <a:srgbClr val="FFFF00"/>
+                </a:highlight>
+              </a:rPr>
+              <a:t> formula we extract the MFPT by simulating the SDE with the </a:t>
+            </a:r>
+            <a:r>
+              <a:rPr lang="en-IN" dirty="0" err="1">
+                <a:highlight>
+                  <a:srgbClr val="FFFF00"/>
+                </a:highlight>
+              </a:rPr>
+              <a:t>Ktime</a:t>
+            </a:r>
+            <a:r>
+              <a:rPr lang="en-IN" dirty="0">
+                <a:highlight>
+                  <a:srgbClr val="FFFF00"/>
+                </a:highlight>
+              </a:rPr>
+              <a:t> measurement experiment.  </a:t>
+            </a:r>
+          </a:p>
+        </p:txBody>
+      </p:sp>
+      <p:pic>
+        <p:nvPicPr>
+          <p:cNvPr id="10" name="Picture 9" descr="A diagram of a function&#10;&#10;AI-generated content may be incorrect.">
+            <a:extLst>
+              <a:ext uri="{FF2B5EF4-FFF2-40B4-BE49-F238E27FC236}">
+                <a16:creationId xmlns:a16="http://schemas.microsoft.com/office/drawing/2014/main" id="{F5C984D3-0831-7688-D33C-E24DC7574E38}"/>
+              </a:ext>
+            </a:extLst>
+          </p:cNvPr>
+          <p:cNvPicPr>
+            <a:picLocks noChangeAspect="1"/>
+          </p:cNvPicPr>
+          <p:nvPr/>
+        </p:nvPicPr>
+        <p:blipFill>
+          <a:blip r:embed="rId4"/>
+          <a:stretch>
+            <a:fillRect/>
+          </a:stretch>
+        </p:blipFill>
+        <p:spPr>
+          <a:xfrm>
+            <a:off x="5732993" y="3207815"/>
+            <a:ext cx="4669356" cy="2929792"/>
+          </a:xfrm>
+          <a:prstGeom prst="rect">
+            <a:avLst/>
+          </a:prstGeom>
+        </p:spPr>
+      </p:pic>
+      <p:sp>
+        <p:nvSpPr>
+          <p:cNvPr id="11" name="TextBox 10">
+            <a:extLst>
+              <a:ext uri="{FF2B5EF4-FFF2-40B4-BE49-F238E27FC236}">
+                <a16:creationId xmlns:a16="http://schemas.microsoft.com/office/drawing/2014/main" id="{C9645F0A-F54E-891B-B148-B48F2694294A}"/>
+              </a:ext>
+            </a:extLst>
+          </p:cNvPr>
+          <p:cNvSpPr txBox="1"/>
+          <p:nvPr/>
+        </p:nvSpPr>
+        <p:spPr>
+          <a:xfrm>
+            <a:off x="9670925" y="5995383"/>
+            <a:ext cx="2361684" cy="646331"/>
+          </a:xfrm>
+          <a:prstGeom prst="rect">
+            <a:avLst/>
+          </a:prstGeom>
+          <a:noFill/>
+        </p:spPr>
+        <p:txBody>
+          <a:bodyPr wrap="square" rtlCol="0">
+            <a:spAutoFit/>
+          </a:bodyPr>
+          <a:lstStyle/>
+          <a:p>
+            <a:r>
+              <a:rPr lang="en-IN" dirty="0">
+                <a:highlight>
+                  <a:srgbClr val="FFFF00"/>
+                </a:highlight>
+              </a:rPr>
+              <a:t>MFPT prediction matches exactly!</a:t>
+            </a:r>
+          </a:p>
+        </p:txBody>
+      </p:sp>
+    </p:spTree>
+    <p:extLst>
+      <p:ext uri="{BB962C8B-B14F-4D97-AF65-F5344CB8AC3E}">
+        <p14:creationId xmlns:p14="http://schemas.microsoft.com/office/powerpoint/2010/main" val="1848292157"/>
+      </p:ext>
+    </p:extLst>
+  </p:cSld>
+  <p:clrMapOvr>
+    <a:masterClrMapping/>
+  </p:clrMapOvr>
+</p:sld>
+</file>
+
+<file path=ppt/slides/slide13.xml><?xml version="1.0" encoding="utf-8"?>
+<p:sld xmlns:a="http://schemas.openxmlformats.org/drawingml/2006/main" xmlns:r="http://schemas.openxmlformats.org/officeDocument/2006/relationships" xmlns:p="http://schemas.openxmlformats.org/presentationml/2006/main">
+  <p:cSld>
+    <p:spTree>
+      <p:nvGrpSpPr>
+        <p:cNvPr id="1" name="">
+          <a:extLst>
+            <a:ext uri="{FF2B5EF4-FFF2-40B4-BE49-F238E27FC236}">
+              <a16:creationId xmlns:a16="http://schemas.microsoft.com/office/drawing/2014/main" id="{74DD17D7-5E39-3F61-FE7E-E4B728AC65D4}"/>
+            </a:ext>
+          </a:extLst>
+        </p:cNvPr>
+        <p:cNvGrpSpPr/>
+        <p:nvPr/>
+      </p:nvGrpSpPr>
+      <p:grpSpPr>
+        <a:xfrm>
+          <a:off x="0" y="0"/>
+          <a:ext cx="0" cy="0"/>
+          <a:chOff x="0" y="0"/>
+          <a:chExt cx="0" cy="0"/>
+        </a:xfrm>
+      </p:grpSpPr>
+      <p:sp>
+        <p:nvSpPr>
+          <p:cNvPr id="111" name="PlaceHolder 1">
+            <a:extLst>
+              <a:ext uri="{FF2B5EF4-FFF2-40B4-BE49-F238E27FC236}">
+                <a16:creationId xmlns:a16="http://schemas.microsoft.com/office/drawing/2014/main" id="{C4C52430-9940-7B6F-88B2-CDD92D4B693A}"/>
+              </a:ext>
+            </a:extLst>
+          </p:cNvPr>
+          <p:cNvSpPr>
+            <a:spLocks noGrp="1"/>
+          </p:cNvSpPr>
+          <p:nvPr>
+            <p:ph type="title"/>
+          </p:nvPr>
+        </p:nvSpPr>
+        <p:spPr>
+          <a:xfrm>
+            <a:off x="594799" y="98827"/>
+            <a:ext cx="10515240" cy="1325160"/>
+          </a:xfrm>
+          <a:prstGeom prst="rect">
+            <a:avLst/>
+          </a:prstGeom>
+          <a:noFill/>
+          <a:ln w="0">
+            <a:noFill/>
+          </a:ln>
+        </p:spPr>
+        <p:txBody>
+          <a:bodyPr anchor="ctr">
+            <a:noAutofit/>
+          </a:bodyPr>
+          <a:lstStyle/>
+          <a:p>
+            <a:pPr indent="0">
+              <a:lnSpc>
+                <a:spcPct val="90000"/>
+              </a:lnSpc>
+              <a:buNone/>
+            </a:pPr>
+            <a:r>
+              <a:rPr lang="en-US" sz="4400" b="0" strike="noStrike" spc="-1" dirty="0">
+                <a:solidFill>
+                  <a:srgbClr val="000000"/>
+                </a:solidFill>
+                <a:latin typeface="Calibri Light"/>
+              </a:rPr>
+              <a:t>Inconsistency in extraction of rho from </a:t>
+            </a:r>
+            <a:r>
+              <a:rPr lang="en-US" sz="4400" b="0" strike="noStrike" spc="-1" dirty="0" err="1">
+                <a:solidFill>
+                  <a:srgbClr val="000000"/>
+                </a:solidFill>
+                <a:latin typeface="Calibri Light"/>
+              </a:rPr>
+              <a:t>Ktime</a:t>
+            </a:r>
+            <a:r>
+              <a:rPr lang="en-US" sz="4400" b="0" strike="noStrike" spc="-1" dirty="0">
+                <a:solidFill>
+                  <a:srgbClr val="000000"/>
+                </a:solidFill>
+                <a:latin typeface="Calibri Light"/>
+              </a:rPr>
+              <a:t> exp</a:t>
+            </a:r>
+            <a:endParaRPr lang="en-US" sz="4400" b="0" strike="noStrike" spc="-1" dirty="0">
+              <a:solidFill>
+                <a:srgbClr val="000000"/>
+              </a:solidFill>
+              <a:latin typeface="Calibri"/>
+            </a:endParaRPr>
+          </a:p>
+        </p:txBody>
+      </p:sp>
+      <p:sp>
+        <p:nvSpPr>
+          <p:cNvPr id="2" name="TextBox 6">
+            <a:extLst>
+              <a:ext uri="{FF2B5EF4-FFF2-40B4-BE49-F238E27FC236}">
+                <a16:creationId xmlns:a16="http://schemas.microsoft.com/office/drawing/2014/main" id="{B1EE6AFE-16D9-F515-5A28-8EBC5CD01ADB}"/>
+              </a:ext>
+            </a:extLst>
+          </p:cNvPr>
+          <p:cNvSpPr/>
+          <p:nvPr/>
+        </p:nvSpPr>
+        <p:spPr>
+          <a:xfrm>
+            <a:off x="1213677" y="5452226"/>
+            <a:ext cx="1870745" cy="367878"/>
+          </a:xfrm>
+          <a:prstGeom prst="rect">
+            <a:avLst/>
+          </a:prstGeom>
+          <a:noFill/>
+          <a:ln w="0">
+            <a:noFill/>
+          </a:ln>
+        </p:spPr>
+        <p:style>
+          <a:lnRef idx="0">
+            <a:scrgbClr r="0" g="0" b="0"/>
+          </a:lnRef>
+          <a:fillRef idx="0">
+            <a:scrgbClr r="0" g="0" b="0"/>
+          </a:fillRef>
+          <a:effectRef idx="0">
+            <a:scrgbClr r="0" g="0" b="0"/>
+          </a:effectRef>
+          <a:fontRef idx="minor"/>
+        </p:style>
+        <p:txBody>
+          <a:bodyPr wrap="square" lIns="90000" tIns="45000" rIns="90000" bIns="45000" anchor="t">
+            <a:spAutoFit/>
+          </a:bodyPr>
+          <a:lstStyle/>
+          <a:p>
+            <a:pPr>
+              <a:lnSpc>
+                <a:spcPct val="100000"/>
+              </a:lnSpc>
+            </a:pPr>
+            <a:r>
+              <a:rPr lang="en-IN" sz="1800" b="0" strike="noStrike" spc="-1" dirty="0">
+                <a:solidFill>
+                  <a:srgbClr val="000000"/>
+                </a:solidFill>
+                <a:highlight>
+                  <a:srgbClr val="00FF00"/>
+                </a:highlight>
+                <a:latin typeface="Calibri"/>
+              </a:rPr>
+              <a:t>MFPT: </a:t>
+            </a:r>
+            <a:r>
+              <a:rPr lang="en-IN" spc="-1" dirty="0">
+                <a:solidFill>
+                  <a:srgbClr val="000000"/>
+                </a:solidFill>
+                <a:highlight>
+                  <a:srgbClr val="00FF00"/>
+                </a:highlight>
+                <a:latin typeface="Calibri"/>
+              </a:rPr>
+              <a:t>Simulation</a:t>
+            </a:r>
+            <a:endParaRPr lang="en-IN" sz="1800" b="0" strike="noStrike" spc="-1" dirty="0">
+              <a:solidFill>
+                <a:srgbClr val="000000"/>
+              </a:solidFill>
+              <a:highlight>
+                <a:srgbClr val="00FF00"/>
+              </a:highlight>
+              <a:latin typeface="Arial"/>
+            </a:endParaRPr>
+          </a:p>
+        </p:txBody>
+      </p:sp>
+      <p:pic>
+        <p:nvPicPr>
+          <p:cNvPr id="4" name="Picture 3">
+            <a:extLst>
+              <a:ext uri="{FF2B5EF4-FFF2-40B4-BE49-F238E27FC236}">
+                <a16:creationId xmlns:a16="http://schemas.microsoft.com/office/drawing/2014/main" id="{F2E6932C-0E89-A896-C9C3-E5A2F6DC03E0}"/>
+              </a:ext>
+            </a:extLst>
+          </p:cNvPr>
+          <p:cNvPicPr>
+            <a:picLocks noChangeAspect="1"/>
+          </p:cNvPicPr>
+          <p:nvPr/>
+        </p:nvPicPr>
+        <p:blipFill>
+          <a:blip r:embed="rId3">
+            <a:extLst>
+              <a:ext uri="{28A0092B-C50C-407E-A947-70E740481C1C}">
+                <a14:useLocalDpi xmlns:a14="http://schemas.microsoft.com/office/drawing/2010/main" val="0"/>
+              </a:ext>
+            </a:extLst>
+          </a:blip>
+          <a:stretch>
+            <a:fillRect/>
+          </a:stretch>
+        </p:blipFill>
+        <p:spPr>
+          <a:xfrm>
+            <a:off x="176693" y="1513601"/>
+            <a:ext cx="4305300" cy="3562350"/>
+          </a:xfrm>
+          <a:prstGeom prst="rect">
+            <a:avLst/>
+          </a:prstGeom>
+        </p:spPr>
+      </p:pic>
+      <p:pic>
+        <p:nvPicPr>
+          <p:cNvPr id="8" name="Picture 7" descr="A graph of different colored lines&#10;&#10;AI-generated content may be incorrect.">
+            <a:extLst>
+              <a:ext uri="{FF2B5EF4-FFF2-40B4-BE49-F238E27FC236}">
+                <a16:creationId xmlns:a16="http://schemas.microsoft.com/office/drawing/2014/main" id="{A088B912-CE42-BC8D-3759-B06C4F2FB5EA}"/>
+              </a:ext>
+            </a:extLst>
+          </p:cNvPr>
+          <p:cNvPicPr>
+            <a:picLocks noChangeAspect="1"/>
+          </p:cNvPicPr>
+          <p:nvPr/>
+        </p:nvPicPr>
+        <p:blipFill>
+          <a:blip r:embed="rId4"/>
+          <a:stretch>
+            <a:fillRect/>
+          </a:stretch>
+        </p:blipFill>
+        <p:spPr>
+          <a:xfrm>
+            <a:off x="4588324" y="1423987"/>
+            <a:ext cx="4114871" cy="3979958"/>
+          </a:xfrm>
+          <a:prstGeom prst="rect">
+            <a:avLst/>
+          </a:prstGeom>
+        </p:spPr>
+      </p:pic>
+      <p:sp>
+        <p:nvSpPr>
+          <p:cNvPr id="9" name="TextBox 6">
+            <a:extLst>
+              <a:ext uri="{FF2B5EF4-FFF2-40B4-BE49-F238E27FC236}">
+                <a16:creationId xmlns:a16="http://schemas.microsoft.com/office/drawing/2014/main" id="{F79311F0-0074-291C-98A5-C9D0C906A4CD}"/>
+              </a:ext>
+            </a:extLst>
+          </p:cNvPr>
+          <p:cNvSpPr/>
+          <p:nvPr/>
+        </p:nvSpPr>
+        <p:spPr>
+          <a:xfrm>
+            <a:off x="5508386" y="5452226"/>
+            <a:ext cx="3194809" cy="367878"/>
+          </a:xfrm>
+          <a:prstGeom prst="rect">
+            <a:avLst/>
+          </a:prstGeom>
+          <a:noFill/>
+          <a:ln w="0">
+            <a:noFill/>
+          </a:ln>
+        </p:spPr>
+        <p:style>
+          <a:lnRef idx="0">
+            <a:scrgbClr r="0" g="0" b="0"/>
+          </a:lnRef>
+          <a:fillRef idx="0">
+            <a:scrgbClr r="0" g="0" b="0"/>
+          </a:fillRef>
+          <a:effectRef idx="0">
+            <a:scrgbClr r="0" g="0" b="0"/>
+          </a:effectRef>
+          <a:fontRef idx="minor"/>
+        </p:style>
+        <p:txBody>
+          <a:bodyPr wrap="square" lIns="90000" tIns="45000" rIns="90000" bIns="45000" anchor="t">
+            <a:spAutoFit/>
+          </a:bodyPr>
+          <a:lstStyle/>
+          <a:p>
+            <a:pPr>
+              <a:lnSpc>
+                <a:spcPct val="100000"/>
+              </a:lnSpc>
+            </a:pPr>
+            <a:r>
+              <a:rPr lang="en-IN" sz="1800" b="0" strike="noStrike" spc="-1" dirty="0">
+                <a:solidFill>
+                  <a:srgbClr val="000000"/>
+                </a:solidFill>
+                <a:highlight>
+                  <a:srgbClr val="00FF00"/>
+                </a:highlight>
+                <a:latin typeface="Calibri"/>
+              </a:rPr>
+              <a:t>Exp + </a:t>
+            </a:r>
+            <a:r>
+              <a:rPr lang="en-IN" sz="1800" b="0" strike="noStrike" spc="-1" dirty="0" err="1">
+                <a:solidFill>
+                  <a:srgbClr val="000000"/>
+                </a:solidFill>
+                <a:highlight>
+                  <a:srgbClr val="00FF00"/>
+                </a:highlight>
+                <a:latin typeface="Calibri"/>
+              </a:rPr>
+              <a:t>Ktime</a:t>
+            </a:r>
+            <a:r>
+              <a:rPr lang="en-IN" sz="1800" b="0" strike="noStrike" spc="-1" dirty="0">
+                <a:solidFill>
+                  <a:srgbClr val="000000"/>
+                </a:solidFill>
+                <a:highlight>
+                  <a:srgbClr val="00FF00"/>
+                </a:highlight>
+                <a:latin typeface="Calibri"/>
+              </a:rPr>
+              <a:t> Analytical Overlap</a:t>
+            </a:r>
+            <a:endParaRPr lang="en-IN" sz="1800" b="0" strike="noStrike" spc="-1" dirty="0">
+              <a:solidFill>
+                <a:srgbClr val="000000"/>
+              </a:solidFill>
+              <a:highlight>
+                <a:srgbClr val="00FF00"/>
+              </a:highlight>
+              <a:latin typeface="Arial"/>
+            </a:endParaRPr>
+          </a:p>
+        </p:txBody>
+      </p:sp>
+      <p:sp>
+        <p:nvSpPr>
+          <p:cNvPr id="12" name="TextBox 11">
+            <a:extLst>
+              <a:ext uri="{FF2B5EF4-FFF2-40B4-BE49-F238E27FC236}">
+                <a16:creationId xmlns:a16="http://schemas.microsoft.com/office/drawing/2014/main" id="{FD308D17-F96E-174C-749E-552D85BDDFCE}"/>
+              </a:ext>
+            </a:extLst>
+          </p:cNvPr>
+          <p:cNvSpPr txBox="1"/>
+          <p:nvPr/>
+        </p:nvSpPr>
+        <p:spPr>
+          <a:xfrm>
+            <a:off x="8809526" y="1591814"/>
+            <a:ext cx="3352659" cy="1477328"/>
+          </a:xfrm>
+          <a:prstGeom prst="rect">
+            <a:avLst/>
+          </a:prstGeom>
+          <a:noFill/>
+        </p:spPr>
+        <p:txBody>
+          <a:bodyPr wrap="square" rtlCol="0">
+            <a:spAutoFit/>
+          </a:bodyPr>
+          <a:lstStyle/>
+          <a:p>
+            <a:r>
+              <a:rPr lang="en-IN" dirty="0">
+                <a:highlight>
+                  <a:srgbClr val="FFFF00"/>
+                </a:highlight>
+              </a:rPr>
+              <a:t>The rho is extracted with the assumption that </a:t>
+            </a:r>
+            <a:r>
+              <a:rPr lang="en-IN" dirty="0" err="1">
+                <a:highlight>
+                  <a:srgbClr val="FFFF00"/>
+                </a:highlight>
+              </a:rPr>
+              <a:t>Ktime</a:t>
+            </a:r>
+            <a:r>
+              <a:rPr lang="en-IN" dirty="0">
+                <a:highlight>
+                  <a:srgbClr val="FFFF00"/>
+                </a:highlight>
+              </a:rPr>
+              <a:t> formula hold valid for BW = 100 kHz,</a:t>
+            </a:r>
+          </a:p>
+          <a:p>
+            <a:r>
+              <a:rPr lang="en-IN" dirty="0">
+                <a:highlight>
+                  <a:srgbClr val="FFFF00"/>
+                </a:highlight>
+              </a:rPr>
+              <a:t>But it’s not! (evident from the MFPT simulation)</a:t>
+            </a:r>
+          </a:p>
+        </p:txBody>
+      </p:sp>
+      <p:sp>
+        <p:nvSpPr>
+          <p:cNvPr id="13" name="TextBox 12">
+            <a:extLst>
+              <a:ext uri="{FF2B5EF4-FFF2-40B4-BE49-F238E27FC236}">
+                <a16:creationId xmlns:a16="http://schemas.microsoft.com/office/drawing/2014/main" id="{BEF63724-272E-1005-AB9E-21F021EDC8C6}"/>
+              </a:ext>
+            </a:extLst>
+          </p:cNvPr>
+          <p:cNvSpPr txBox="1"/>
+          <p:nvPr/>
+        </p:nvSpPr>
+        <p:spPr>
+          <a:xfrm>
+            <a:off x="8925065" y="4943020"/>
+            <a:ext cx="3121579" cy="1754326"/>
+          </a:xfrm>
+          <a:prstGeom prst="rect">
+            <a:avLst/>
+          </a:prstGeom>
+          <a:noFill/>
+        </p:spPr>
+        <p:txBody>
+          <a:bodyPr wrap="square" rtlCol="0">
+            <a:spAutoFit/>
+          </a:bodyPr>
+          <a:lstStyle/>
+          <a:p>
+            <a:r>
+              <a:rPr lang="en-IN" dirty="0">
+                <a:highlight>
+                  <a:srgbClr val="00FFFF"/>
+                </a:highlight>
+              </a:rPr>
+              <a:t>Re-work for future:</a:t>
+            </a:r>
+          </a:p>
+          <a:p>
+            <a:r>
+              <a:rPr lang="en-IN" dirty="0">
+                <a:highlight>
+                  <a:srgbClr val="00FFFF"/>
+                </a:highlight>
+              </a:rPr>
+              <a:t>first find the analytical expression for MFPT with bandlimited noise, use that formula to fit the experiment data</a:t>
+            </a:r>
+          </a:p>
+        </p:txBody>
+      </p:sp>
+    </p:spTree>
+    <p:extLst>
+      <p:ext uri="{BB962C8B-B14F-4D97-AF65-F5344CB8AC3E}">
+        <p14:creationId xmlns:p14="http://schemas.microsoft.com/office/powerpoint/2010/main" val="3700196489"/>
+      </p:ext>
+    </p:extLst>
+  </p:cSld>
+  <p:clrMapOvr>
+    <a:masterClrMapping/>
+  </p:clrMapOvr>
 </p:sld>
 </file>
 
 <file path=ppt/slides/slide2.xml><?xml version="1.0" encoding="utf-8"?>
-<p:sld xmlns:a="http://schemas.openxmlformats.org/drawingml/2006/main" xmlns:p="http://schemas.openxmlformats.org/presentationml/2006/main" xmlns:r="http://schemas.openxmlformats.org/officeDocument/2006/relationships" xmlns:p14="http://schemas.microsoft.com/office/powerpoint/2010/main" xmlns:p15="http://schemas.microsoft.com/office/powerpoint/2012/main" xmlns:mc="http://schemas.openxmlformats.org/markup-compatibility/2006">
+<p:sld xmlns:a="http://schemas.openxmlformats.org/drawingml/2006/main" xmlns:r="http://schemas.openxmlformats.org/officeDocument/2006/relationships" xmlns:p="http://schemas.openxmlformats.org/presentationml/2006/main">
   <p:cSld>
     <p:spTree>
       <p:nvGrpSpPr>
@@ -6342,6 +9729,7 @@
           <a:bodyPr anchor="ctr">
             <a:noAutofit/>
           </a:bodyPr>
+          <a:lstStyle/>
           <a:p>
             <a:pPr indent="0">
               <a:lnSpc>
@@ -6350,7 +9738,7 @@
               <a:buNone/>
             </a:pPr>
             <a:r>
-              <a:rPr b="0" lang="en-IN" sz="4400" spc="-1" strike="noStrike">
+              <a:rPr lang="en-IN" sz="4400" b="0" strike="noStrike" spc="-1">
                 <a:solidFill>
                   <a:srgbClr val="000000"/>
                 </a:solidFill>
@@ -6358,7 +9746,7 @@
               </a:rPr>
               <a:t>Hysteresis Fit IIT PKD</a:t>
             </a:r>
-            <a:endParaRPr b="0" lang="en-US" sz="4400" spc="-1" strike="noStrike">
+            <a:endParaRPr lang="en-US" sz="4400" b="0" strike="noStrike" spc="-1">
               <a:solidFill>
                 <a:srgbClr val="000000"/>
               </a:solidFill>
@@ -6369,12 +9757,12 @@
       </p:sp>
       <p:pic>
         <p:nvPicPr>
-          <p:cNvPr id="85" name="Content Placeholder 4" descr=""/>
+          <p:cNvPr id="85" name="Content Placeholder 4"/>
           <p:cNvPicPr/>
           <p:nvPr/>
         </p:nvPicPr>
         <p:blipFill>
-          <a:blip r:embed="rId1"/>
+          <a:blip r:embed="rId2"/>
           <a:stretch/>
         </p:blipFill>
         <p:spPr>
@@ -6410,15 +9798,22 @@
           </a:ln>
         </p:spPr>
         <p:style>
-          <a:lnRef idx="0"/>
-          <a:fillRef idx="0"/>
-          <a:effectRef idx="0"/>
+          <a:lnRef idx="0">
+            <a:scrgbClr r="0" g="0" b="0"/>
+          </a:lnRef>
+          <a:fillRef idx="0">
+            <a:scrgbClr r="0" g="0" b="0"/>
+          </a:fillRef>
+          <a:effectRef idx="0">
+            <a:scrgbClr r="0" g="0" b="0"/>
+          </a:effectRef>
           <a:fontRef idx="minor"/>
         </p:style>
         <p:txBody>
-          <a:bodyPr lIns="90000" rIns="90000" tIns="45000" bIns="45000" anchor="t">
+          <a:bodyPr lIns="90000" tIns="45000" rIns="90000" bIns="45000" anchor="t">
             <a:spAutoFit/>
           </a:bodyPr>
+          <a:lstStyle/>
           <a:p>
             <a:pPr>
               <a:lnSpc>
@@ -6426,7 +9821,7 @@
               </a:lnSpc>
             </a:pPr>
             <a:r>
-              <a:rPr b="0" lang="en-IN" sz="1800" spc="-1" strike="noStrike">
+              <a:rPr lang="en-IN" sz="1800" b="0" strike="noStrike" spc="-1">
                 <a:solidFill>
                   <a:srgbClr val="000000"/>
                 </a:solidFill>
@@ -6434,7 +9829,7 @@
               </a:rPr>
               <a:t>For 1, 10, 100 Hz the fit is okay. For higher frequency the fit is not good.</a:t>
             </a:r>
-            <a:endParaRPr b="0" lang="en-IN" sz="1800" spc="-1" strike="noStrike">
+            <a:endParaRPr lang="en-IN" sz="1800" b="0" strike="noStrike" spc="-1">
               <a:solidFill>
                 <a:srgbClr val="000000"/>
               </a:solidFill>
@@ -6447,7 +9842,7 @@
                 <a:spcPct val="100000"/>
               </a:lnSpc>
             </a:pPr>
-            <a:endParaRPr b="0" lang="en-IN" sz="1800" spc="-1" strike="noStrike">
+            <a:endParaRPr lang="en-IN" sz="1800" b="0" strike="noStrike" spc="-1">
               <a:solidFill>
                 <a:srgbClr val="000000"/>
               </a:solidFill>
@@ -6461,7 +9856,7 @@
               </a:lnSpc>
             </a:pPr>
             <a:r>
-              <a:rPr b="0" lang="en-IN" sz="1800" spc="-1" strike="noStrike">
+              <a:rPr lang="en-IN" sz="1800" b="0" strike="noStrike" spc="-1">
                 <a:solidFill>
                   <a:srgbClr val="000000"/>
                 </a:solidFill>
@@ -6469,7 +9864,7 @@
               </a:rPr>
               <a:t>Rho possibly a frequency dependent term!</a:t>
             </a:r>
-            <a:endParaRPr b="0" lang="en-IN" sz="1800" spc="-1" strike="noStrike">
+            <a:endParaRPr lang="en-IN" sz="1800" b="0" strike="noStrike" spc="-1">
               <a:solidFill>
                 <a:srgbClr val="000000"/>
               </a:solidFill>
@@ -6482,7 +9877,7 @@
                 <a:spcPct val="100000"/>
               </a:lnSpc>
             </a:pPr>
-            <a:endParaRPr b="0" lang="en-IN" sz="1800" spc="-1" strike="noStrike">
+            <a:endParaRPr lang="en-IN" sz="1800" b="0" strike="noStrike" spc="-1">
               <a:solidFill>
                 <a:srgbClr val="000000"/>
               </a:solidFill>
@@ -6496,15 +9891,15 @@
               </a:lnSpc>
             </a:pPr>
             <a:r>
-              <a:rPr b="0" lang="en-IN" sz="1800" spc="-1" strike="noStrike">
+              <a:rPr lang="en-IN" sz="1800" b="0" strike="noStrike" spc="-1">
                 <a:solidFill>
-                  <a:srgbClr val="ff0000"/>
+                  <a:srgbClr val="FF0000"/>
                 </a:solidFill>
                 <a:latin typeface="Calibri"/>
               </a:rPr>
               <a:t>In paper should we indicate 100Hz loop and fit or 1Hz loop and fit??</a:t>
             </a:r>
-            <a:endParaRPr b="0" lang="en-IN" sz="1800" spc="-1" strike="noStrike">
+            <a:endParaRPr lang="en-IN" sz="1800" b="0" strike="noStrike" spc="-1">
               <a:solidFill>
                 <a:srgbClr val="000000"/>
               </a:solidFill>
@@ -6533,15 +9928,22 @@
           </a:ln>
         </p:spPr>
         <p:style>
-          <a:lnRef idx="0"/>
-          <a:fillRef idx="0"/>
-          <a:effectRef idx="0"/>
+          <a:lnRef idx="0">
+            <a:scrgbClr r="0" g="0" b="0"/>
+          </a:lnRef>
+          <a:fillRef idx="0">
+            <a:scrgbClr r="0" g="0" b="0"/>
+          </a:fillRef>
+          <a:effectRef idx="0">
+            <a:scrgbClr r="0" g="0" b="0"/>
+          </a:effectRef>
           <a:fontRef idx="minor"/>
         </p:style>
         <p:txBody>
-          <a:bodyPr lIns="90000" rIns="90000" tIns="45000" bIns="45000" anchor="t">
+          <a:bodyPr lIns="90000" tIns="45000" rIns="90000" bIns="45000" anchor="t">
             <a:spAutoFit/>
           </a:bodyPr>
+          <a:lstStyle/>
           <a:p>
             <a:pPr>
               <a:lnSpc>
@@ -6549,7 +9951,7 @@
               </a:lnSpc>
             </a:pPr>
             <a:r>
-              <a:rPr b="0" lang="en-IN" sz="1800" spc="-1" strike="noStrike">
+              <a:rPr lang="en-IN" sz="1800" b="0" strike="noStrike" spc="-1">
                 <a:solidFill>
                   <a:srgbClr val="000000"/>
                 </a:solidFill>
@@ -6557,7 +9959,7 @@
               </a:rPr>
               <a:t>For extracting alpha, beta we used 1Hz hysteresis loop</a:t>
             </a:r>
-            <a:endParaRPr b="0" lang="en-IN" sz="1800" spc="-1" strike="noStrike">
+            <a:endParaRPr lang="en-IN" sz="1800" b="0" strike="noStrike" spc="-1">
               <a:solidFill>
                 <a:srgbClr val="000000"/>
               </a:solidFill>
@@ -6568,7 +9970,7 @@
       </p:sp>
       <p:sp>
         <p:nvSpPr>
-          <p:cNvPr id="88" name=""/>
+          <p:cNvPr id="88" name="TextBox 87"/>
           <p:cNvSpPr txBox="1"/>
           <p:nvPr/>
         </p:nvSpPr>
@@ -6586,12 +9988,13 @@
           </a:ln>
         </p:spPr>
         <p:txBody>
-          <a:bodyPr lIns="90000" rIns="90000" tIns="45000" bIns="45000" anchor="t">
+          <a:bodyPr lIns="90000" tIns="45000" rIns="90000" bIns="45000" anchor="t">
             <a:noAutofit/>
           </a:bodyPr>
+          <a:lstStyle/>
           <a:p>
             <a:r>
-              <a:rPr b="0" lang="en-IN" sz="1800" spc="-1" strike="noStrike">
+              <a:rPr lang="en-IN" sz="1800" b="0" strike="noStrike" spc="-1">
                 <a:solidFill>
                   <a:srgbClr val="000000"/>
                 </a:solidFill>
@@ -6599,7 +10002,7 @@
               </a:rPr>
               <a:t>All with rho = 390 ohm m. Note that we have expt data for different freqeuncy as well for IITPKD data</a:t>
             </a:r>
-            <a:endParaRPr b="0" lang="en-IN" sz="1800" spc="-1" strike="noStrike">
+            <a:endParaRPr lang="en-IN" sz="1800" b="0" strike="noStrike" spc="-1">
               <a:solidFill>
                 <a:srgbClr val="000000"/>
               </a:solidFill>
@@ -6607,7 +10010,7 @@
             </a:endParaRPr>
           </a:p>
           <a:p>
-            <a:endParaRPr b="0" lang="en-IN" sz="1800" spc="-1" strike="noStrike">
+            <a:endParaRPr lang="en-IN" sz="1800" b="0" strike="noStrike" spc="-1">
               <a:solidFill>
                 <a:srgbClr val="000000"/>
               </a:solidFill>
@@ -6618,19 +10021,14 @@
       </p:sp>
     </p:spTree>
   </p:cSld>
-  <mc:AlternateContent>
-    <mc:Choice Requires="p14">
-      <p:transition spd="slow" p14:dur="2000"/>
-    </mc:Choice>
-    <mc:Fallback>
-      <p:transition spd="slow"/>
-    </mc:Fallback>
-  </mc:AlternateContent>
+  <p:clrMapOvr>
+    <a:masterClrMapping/>
+  </p:clrMapOvr>
 </p:sld>
 </file>
 
 <file path=ppt/slides/slide3.xml><?xml version="1.0" encoding="utf-8"?>
-<p:sld xmlns:a="http://schemas.openxmlformats.org/drawingml/2006/main" xmlns:p="http://schemas.openxmlformats.org/presentationml/2006/main" xmlns:r="http://schemas.openxmlformats.org/officeDocument/2006/relationships" xmlns:p14="http://schemas.microsoft.com/office/powerpoint/2010/main" xmlns:p15="http://schemas.microsoft.com/office/powerpoint/2012/main" xmlns:mc="http://schemas.openxmlformats.org/markup-compatibility/2006">
+<p:sld xmlns:a="http://schemas.openxmlformats.org/drawingml/2006/main" xmlns:r="http://schemas.openxmlformats.org/officeDocument/2006/relationships" xmlns:p="http://schemas.openxmlformats.org/presentationml/2006/main">
   <p:cSld>
     <p:spTree>
       <p:nvGrpSpPr>
@@ -6648,30 +10046,7 @@
       </p:grpSpPr>
       <p:pic>
         <p:nvPicPr>
-          <p:cNvPr id="89" name="" descr=""/>
-          <p:cNvPicPr/>
-          <p:nvPr/>
-        </p:nvPicPr>
-        <p:blipFill>
-          <a:blip r:embed="rId1"/>
-          <a:stretch/>
-        </p:blipFill>
-        <p:spPr>
-          <a:xfrm>
-            <a:off x="180000" y="1690560"/>
-            <a:ext cx="3745800" cy="2809440"/>
-          </a:xfrm>
-          <a:prstGeom prst="rect">
-            <a:avLst/>
-          </a:prstGeom>
-          <a:ln w="0">
-            <a:noFill/>
-          </a:ln>
-        </p:spPr>
-      </p:pic>
-      <p:pic>
-        <p:nvPicPr>
-          <p:cNvPr id="90" name="" descr=""/>
+          <p:cNvPr id="89" name="Picture 88"/>
           <p:cNvPicPr/>
           <p:nvPr/>
         </p:nvPicPr>
@@ -6681,6 +10056,29 @@
         </p:blipFill>
         <p:spPr>
           <a:xfrm>
+            <a:off x="180000" y="1690560"/>
+            <a:ext cx="3745800" cy="2809440"/>
+          </a:xfrm>
+          <a:prstGeom prst="rect">
+            <a:avLst/>
+          </a:prstGeom>
+          <a:ln w="0">
+            <a:noFill/>
+          </a:ln>
+        </p:spPr>
+      </p:pic>
+      <p:pic>
+        <p:nvPicPr>
+          <p:cNvPr id="90" name="Picture 89"/>
+          <p:cNvPicPr/>
+          <p:nvPr/>
+        </p:nvPicPr>
+        <p:blipFill>
+          <a:blip r:embed="rId3"/>
+          <a:stretch/>
+        </p:blipFill>
+        <p:spPr>
+          <a:xfrm>
             <a:off x="3994200" y="1690560"/>
             <a:ext cx="3745800" cy="2809440"/>
           </a:xfrm>
@@ -6715,6 +10113,7 @@
           <a:bodyPr anchor="ctr">
             <a:noAutofit/>
           </a:bodyPr>
+          <a:lstStyle/>
           <a:p>
             <a:pPr>
               <a:lnSpc>
@@ -6722,7 +10121,7 @@
               </a:lnSpc>
             </a:pPr>
             <a:r>
-              <a:rPr b="0" lang="en-IN" sz="4400" spc="-1" strike="noStrike">
+              <a:rPr lang="en-IN" sz="4400" b="0" strike="noStrike" spc="-1">
                 <a:solidFill>
                   <a:srgbClr val="000000"/>
                 </a:solidFill>
@@ -6730,7 +10129,7 @@
               </a:rPr>
               <a:t>Hysteresis Fit IISc PKD</a:t>
             </a:r>
-            <a:endParaRPr b="0" lang="en-US" sz="4400" spc="-1" strike="noStrike">
+            <a:endParaRPr lang="en-US" sz="4400" b="0" strike="noStrike" spc="-1">
               <a:solidFill>
                 <a:srgbClr val="000000"/>
               </a:solidFill>
@@ -6741,12 +10140,12 @@
       </p:sp>
       <p:pic>
         <p:nvPicPr>
-          <p:cNvPr id="92" name="" descr=""/>
+          <p:cNvPr id="92" name="Picture 91"/>
           <p:cNvPicPr/>
           <p:nvPr/>
         </p:nvPicPr>
         <p:blipFill>
-          <a:blip r:embed="rId3"/>
+          <a:blip r:embed="rId4"/>
           <a:stretch/>
         </p:blipFill>
         <p:spPr>
@@ -6764,7 +10163,7 @@
       </p:pic>
       <p:sp>
         <p:nvSpPr>
-          <p:cNvPr id="93" name=""/>
+          <p:cNvPr id="93" name="TextBox 92"/>
           <p:cNvSpPr txBox="1"/>
           <p:nvPr/>
         </p:nvSpPr>
@@ -6782,29 +10181,21 @@
           </a:ln>
         </p:spPr>
         <p:txBody>
-          <a:bodyPr lIns="90000" rIns="90000" tIns="45000" bIns="45000" anchor="t">
+          <a:bodyPr lIns="90000" tIns="45000" rIns="90000" bIns="45000" anchor="t">
             <a:noAutofit/>
           </a:bodyPr>
+          <a:lstStyle/>
           <a:p>
             <a:r>
-              <a:rPr b="0" lang="en-IN" sz="1800" spc="-1" strike="noStrike">
+              <a:rPr lang="en-IN" sz="1800" b="0" strike="noStrike" spc="-1">
                 <a:solidFill>
                   <a:srgbClr val="000000"/>
                 </a:solidFill>
                 <a:latin typeface="Calibri"/>
               </a:rPr>
-              <a:t> </a:t>
+              <a:t> Note that we have expt data for only for 1kHz for IISc data</a:t>
             </a:r>
-            <a:r>
-              <a:rPr b="0" lang="en-IN" sz="1800" spc="-1" strike="noStrike">
-                <a:solidFill>
-                  <a:srgbClr val="000000"/>
-                </a:solidFill>
-                <a:latin typeface="Calibri"/>
-              </a:rPr>
-              <a:t>Note that we have expt data for only for 1kHz for IISc data</a:t>
-            </a:r>
-            <a:endParaRPr b="0" lang="en-IN" sz="1800" spc="-1" strike="noStrike">
+            <a:endParaRPr lang="en-IN" sz="1800" b="0" strike="noStrike" spc="-1">
               <a:solidFill>
                 <a:srgbClr val="000000"/>
               </a:solidFill>
@@ -6812,7 +10203,7 @@
             </a:endParaRPr>
           </a:p>
           <a:p>
-            <a:endParaRPr b="0" lang="en-IN" sz="1800" spc="-1" strike="noStrike">
+            <a:endParaRPr lang="en-IN" sz="1800" b="0" strike="noStrike" spc="-1">
               <a:solidFill>
                 <a:srgbClr val="000000"/>
               </a:solidFill>
@@ -6823,19 +10214,14 @@
       </p:sp>
     </p:spTree>
   </p:cSld>
-  <mc:AlternateContent>
-    <mc:Choice Requires="p14">
-      <p:transition spd="slow" p14:dur="2000"/>
-    </mc:Choice>
-    <mc:Fallback>
-      <p:transition spd="slow"/>
-    </mc:Fallback>
-  </mc:AlternateContent>
+  <p:clrMapOvr>
+    <a:masterClrMapping/>
+  </p:clrMapOvr>
 </p:sld>
 </file>
 
 <file path=ppt/slides/slide4.xml><?xml version="1.0" encoding="utf-8"?>
-<p:sld xmlns:a="http://schemas.openxmlformats.org/drawingml/2006/main" xmlns:p="http://schemas.openxmlformats.org/presentationml/2006/main" xmlns:r="http://schemas.openxmlformats.org/officeDocument/2006/relationships" xmlns:p14="http://schemas.microsoft.com/office/powerpoint/2010/main" xmlns:p15="http://schemas.microsoft.com/office/powerpoint/2012/main" xmlns:mc="http://schemas.openxmlformats.org/markup-compatibility/2006">
+<p:sld xmlns:a="http://schemas.openxmlformats.org/drawingml/2006/main" xmlns:r="http://schemas.openxmlformats.org/officeDocument/2006/relationships" xmlns:p="http://schemas.openxmlformats.org/presentationml/2006/main">
   <p:cSld>
     <p:spTree>
       <p:nvGrpSpPr>
@@ -6874,6 +10260,7 @@
           <a:bodyPr anchor="ctr">
             <a:noAutofit/>
           </a:bodyPr>
+          <a:lstStyle/>
           <a:p>
             <a:pPr>
               <a:lnSpc>
@@ -6881,7 +10268,7 @@
               </a:lnSpc>
             </a:pPr>
             <a:r>
-              <a:rPr b="0" lang="en-IN" sz="4400" spc="-1" strike="noStrike">
+              <a:rPr lang="en-IN" sz="4400" b="0" strike="noStrike" spc="-1">
                 <a:solidFill>
                   <a:srgbClr val="000000"/>
                 </a:solidFill>
@@ -6889,7 +10276,7 @@
               </a:rPr>
               <a:t>Hysteresis Fit IISc PKD</a:t>
             </a:r>
-            <a:endParaRPr b="0" lang="en-US" sz="4400" spc="-1" strike="noStrike">
+            <a:endParaRPr lang="en-US" sz="4400" b="0" strike="noStrike" spc="-1">
               <a:solidFill>
                 <a:srgbClr val="000000"/>
               </a:solidFill>
@@ -6900,30 +10287,7 @@
       </p:sp>
       <p:pic>
         <p:nvPicPr>
-          <p:cNvPr id="95" name="" descr=""/>
-          <p:cNvPicPr/>
-          <p:nvPr/>
-        </p:nvPicPr>
-        <p:blipFill>
-          <a:blip r:embed="rId1"/>
-          <a:stretch/>
-        </p:blipFill>
-        <p:spPr>
-          <a:xfrm>
-            <a:off x="0" y="1620000"/>
-            <a:ext cx="3840120" cy="2880000"/>
-          </a:xfrm>
-          <a:prstGeom prst="rect">
-            <a:avLst/>
-          </a:prstGeom>
-          <a:ln w="0">
-            <a:noFill/>
-          </a:ln>
-        </p:spPr>
-      </p:pic>
-      <p:pic>
-        <p:nvPicPr>
-          <p:cNvPr id="96" name="" descr=""/>
+          <p:cNvPr id="95" name="Picture 94"/>
           <p:cNvPicPr/>
           <p:nvPr/>
         </p:nvPicPr>
@@ -6933,8 +10297,8 @@
         </p:blipFill>
         <p:spPr>
           <a:xfrm>
-            <a:off x="7740000" y="1575000"/>
-            <a:ext cx="4140000" cy="3105000"/>
+            <a:off x="0" y="1620000"/>
+            <a:ext cx="3840120" cy="2880000"/>
           </a:xfrm>
           <a:prstGeom prst="rect">
             <a:avLst/>
@@ -6946,7 +10310,7 @@
       </p:pic>
       <p:pic>
         <p:nvPicPr>
-          <p:cNvPr id="97" name="" descr=""/>
+          <p:cNvPr id="96" name="Picture 95"/>
           <p:cNvPicPr/>
           <p:nvPr/>
         </p:nvPicPr>
@@ -6956,6 +10320,29 @@
         </p:blipFill>
         <p:spPr>
           <a:xfrm>
+            <a:off x="7740000" y="1575000"/>
+            <a:ext cx="4140000" cy="3105000"/>
+          </a:xfrm>
+          <a:prstGeom prst="rect">
+            <a:avLst/>
+          </a:prstGeom>
+          <a:ln w="0">
+            <a:noFill/>
+          </a:ln>
+        </p:spPr>
+      </p:pic>
+      <p:pic>
+        <p:nvPicPr>
+          <p:cNvPr id="97" name="Picture 96"/>
+          <p:cNvPicPr/>
+          <p:nvPr/>
+        </p:nvPicPr>
+        <p:blipFill>
+          <a:blip r:embed="rId4"/>
+          <a:stretch/>
+        </p:blipFill>
+        <p:spPr>
+          <a:xfrm>
             <a:off x="3771360" y="1595880"/>
             <a:ext cx="3960000" cy="2970000"/>
           </a:xfrm>
@@ -6969,7 +10356,7 @@
       </p:pic>
       <p:sp>
         <p:nvSpPr>
-          <p:cNvPr id="98" name=""/>
+          <p:cNvPr id="98" name="TextBox 97"/>
           <p:cNvSpPr txBox="1"/>
           <p:nvPr/>
         </p:nvSpPr>
@@ -6987,29 +10374,21 @@
           </a:ln>
         </p:spPr>
         <p:txBody>
-          <a:bodyPr lIns="90000" rIns="90000" tIns="45000" bIns="45000" anchor="t">
+          <a:bodyPr lIns="90000" tIns="45000" rIns="90000" bIns="45000" anchor="t">
             <a:noAutofit/>
           </a:bodyPr>
+          <a:lstStyle/>
           <a:p>
             <a:r>
-              <a:rPr b="0" lang="en-IN" sz="1800" spc="-1" strike="noStrike">
+              <a:rPr lang="en-IN" sz="1800" b="0" strike="noStrike" spc="-1">
                 <a:solidFill>
                   <a:srgbClr val="000000"/>
                 </a:solidFill>
                 <a:latin typeface="Calibri"/>
               </a:rPr>
-              <a:t> </a:t>
+              <a:t> Note that we have expt data for only for 1kHz for IISc data</a:t>
             </a:r>
-            <a:r>
-              <a:rPr b="0" lang="en-IN" sz="1800" spc="-1" strike="noStrike">
-                <a:solidFill>
-                  <a:srgbClr val="000000"/>
-                </a:solidFill>
-                <a:latin typeface="Calibri"/>
-              </a:rPr>
-              <a:t>Note that we have expt data for only for 1kHz for IISc data</a:t>
-            </a:r>
-            <a:endParaRPr b="0" lang="en-IN" sz="1800" spc="-1" strike="noStrike">
+            <a:endParaRPr lang="en-IN" sz="1800" b="0" strike="noStrike" spc="-1">
               <a:solidFill>
                 <a:srgbClr val="000000"/>
               </a:solidFill>
@@ -7017,7 +10396,7 @@
             </a:endParaRPr>
           </a:p>
           <a:p>
-            <a:endParaRPr b="0" lang="en-IN" sz="1800" spc="-1" strike="noStrike">
+            <a:endParaRPr lang="en-IN" sz="1800" b="0" strike="noStrike" spc="-1">
               <a:solidFill>
                 <a:srgbClr val="000000"/>
               </a:solidFill>
@@ -7028,7 +10407,7 @@
       </p:sp>
       <p:sp>
         <p:nvSpPr>
-          <p:cNvPr id="99" name=""/>
+          <p:cNvPr id="99" name="TextBox 98"/>
           <p:cNvSpPr txBox="1"/>
           <p:nvPr/>
         </p:nvSpPr>
@@ -7046,12 +10425,13 @@
           </a:ln>
         </p:spPr>
         <p:txBody>
-          <a:bodyPr lIns="90000" rIns="90000" tIns="45000" bIns="45000" anchor="t">
+          <a:bodyPr lIns="90000" tIns="45000" rIns="90000" bIns="45000" anchor="t">
             <a:noAutofit/>
           </a:bodyPr>
+          <a:lstStyle/>
           <a:p>
             <a:r>
-              <a:rPr b="0" lang="en-IN" sz="1800" spc="-1" strike="noStrike">
+              <a:rPr lang="en-IN" sz="1800" b="0" strike="noStrike" spc="-1">
                 <a:solidFill>
                   <a:srgbClr val="000000"/>
                 </a:solidFill>
@@ -7059,7 +10439,7 @@
               </a:rPr>
               <a:t>We are going ahead with rho = 1367 ohm m (but not giving any figures in the paper). This value seems to fit the SR results  best. Maybe the sample has degraded between the meaurement of hysterisis and meausrment of SR.</a:t>
             </a:r>
-            <a:endParaRPr b="0" lang="en-IN" sz="1800" spc="-1" strike="noStrike">
+            <a:endParaRPr lang="en-IN" sz="1800" b="0" strike="noStrike" spc="-1">
               <a:solidFill>
                 <a:srgbClr val="000000"/>
               </a:solidFill>
@@ -7067,7 +10447,7 @@
             </a:endParaRPr>
           </a:p>
           <a:p>
-            <a:endParaRPr b="0" lang="en-IN" sz="1800" spc="-1" strike="noStrike">
+            <a:endParaRPr lang="en-IN" sz="1800" b="0" strike="noStrike" spc="-1">
               <a:solidFill>
                 <a:srgbClr val="000000"/>
               </a:solidFill>
@@ -7078,19 +10458,14 @@
       </p:sp>
     </p:spTree>
   </p:cSld>
-  <mc:AlternateContent>
-    <mc:Choice Requires="p14">
-      <p:transition spd="slow" p14:dur="2000"/>
-    </mc:Choice>
-    <mc:Fallback>
-      <p:transition spd="slow"/>
-    </mc:Fallback>
-  </mc:AlternateContent>
+  <p:clrMapOvr>
+    <a:masterClrMapping/>
+  </p:clrMapOvr>
 </p:sld>
 </file>
 
 <file path=ppt/slides/slide5.xml><?xml version="1.0" encoding="utf-8"?>
-<p:sld xmlns:a="http://schemas.openxmlformats.org/drawingml/2006/main" xmlns:p="http://schemas.openxmlformats.org/presentationml/2006/main" xmlns:r="http://schemas.openxmlformats.org/officeDocument/2006/relationships" xmlns:p14="http://schemas.microsoft.com/office/powerpoint/2010/main" xmlns:p15="http://schemas.microsoft.com/office/powerpoint/2012/main" xmlns:mc="http://schemas.openxmlformats.org/markup-compatibility/2006">
+<p:sld xmlns:a="http://schemas.openxmlformats.org/drawingml/2006/main" xmlns:r="http://schemas.openxmlformats.org/officeDocument/2006/relationships" xmlns:p="http://schemas.openxmlformats.org/presentationml/2006/main">
   <p:cSld>
     <p:spTree>
       <p:nvGrpSpPr>
@@ -7133,6 +10508,7 @@
           <a:bodyPr anchor="ctr">
             <a:noAutofit/>
           </a:bodyPr>
+          <a:lstStyle/>
           <a:p>
             <a:pPr indent="0">
               <a:lnSpc>
@@ -7141,7 +10517,7 @@
               <a:buNone/>
             </a:pPr>
             <a:r>
-              <a:rPr b="0" lang="en-IN" sz="4400" spc="-1" strike="noStrike">
+              <a:rPr lang="en-IN" sz="4400" b="0" strike="noStrike" spc="-1">
                 <a:solidFill>
                   <a:srgbClr val="000000"/>
                 </a:solidFill>
@@ -7149,7 +10525,7 @@
               </a:rPr>
               <a:t>Free energy density value</a:t>
             </a:r>
-            <a:endParaRPr b="0" lang="en-US" sz="4400" spc="-1" strike="noStrike">
+            <a:endParaRPr lang="en-US" sz="4400" b="0" strike="noStrike" spc="-1">
               <a:solidFill>
                 <a:srgbClr val="000000"/>
               </a:solidFill>
@@ -7160,12 +10536,12 @@
       </p:sp>
       <p:pic>
         <p:nvPicPr>
-          <p:cNvPr id="101" name="Content Placeholder 4" descr=""/>
+          <p:cNvPr id="101" name="Content Placeholder 4"/>
           <p:cNvPicPr/>
           <p:nvPr/>
         </p:nvPicPr>
         <p:blipFill>
-          <a:blip r:embed="rId1"/>
+          <a:blip r:embed="rId2"/>
           <a:stretch/>
         </p:blipFill>
         <p:spPr>
@@ -7201,15 +10577,22 @@
           </a:ln>
         </p:spPr>
         <p:style>
-          <a:lnRef idx="0"/>
-          <a:fillRef idx="0"/>
-          <a:effectRef idx="0"/>
+          <a:lnRef idx="0">
+            <a:scrgbClr r="0" g="0" b="0"/>
+          </a:lnRef>
+          <a:fillRef idx="0">
+            <a:scrgbClr r="0" g="0" b="0"/>
+          </a:fillRef>
+          <a:effectRef idx="0">
+            <a:scrgbClr r="0" g="0" b="0"/>
+          </a:effectRef>
           <a:fontRef idx="minor"/>
         </p:style>
         <p:txBody>
-          <a:bodyPr lIns="90000" rIns="90000" tIns="45000" bIns="45000" anchor="t">
+          <a:bodyPr lIns="90000" tIns="45000" rIns="90000" bIns="45000" anchor="t">
             <a:spAutoFit/>
           </a:bodyPr>
+          <a:lstStyle/>
           <a:p>
             <a:pPr>
               <a:lnSpc>
@@ -7217,7 +10600,7 @@
               </a:lnSpc>
             </a:pPr>
             <a:r>
-              <a:rPr b="0" lang="en-IN" sz="1800" spc="-1" strike="noStrike">
+              <a:rPr lang="en-IN" sz="1800" b="0" strike="noStrike" spc="-1">
                 <a:solidFill>
                   <a:srgbClr val="000000"/>
                 </a:solidFill>
@@ -7225,7 +10608,7 @@
               </a:rPr>
               <a:t>Order of magnitude check!</a:t>
             </a:r>
-            <a:endParaRPr b="0" lang="en-IN" sz="1800" spc="-1" strike="noStrike">
+            <a:endParaRPr lang="en-IN" sz="1800" b="0" strike="noStrike" spc="-1">
               <a:solidFill>
                 <a:srgbClr val="000000"/>
               </a:solidFill>
@@ -7236,19 +10619,14 @@
       </p:sp>
     </p:spTree>
   </p:cSld>
-  <mc:AlternateContent>
-    <mc:Choice Requires="p14">
-      <p:transition spd="slow" p14:dur="2000"/>
-    </mc:Choice>
-    <mc:Fallback>
-      <p:transition spd="slow"/>
-    </mc:Fallback>
-  </mc:AlternateContent>
+  <p:clrMapOvr>
+    <a:masterClrMapping/>
+  </p:clrMapOvr>
 </p:sld>
 </file>
 
 <file path=ppt/slides/slide6.xml><?xml version="1.0" encoding="utf-8"?>
-<p:sld xmlns:a="http://schemas.openxmlformats.org/drawingml/2006/main" xmlns:p="http://schemas.openxmlformats.org/presentationml/2006/main" xmlns:r="http://schemas.openxmlformats.org/officeDocument/2006/relationships" xmlns:p14="http://schemas.microsoft.com/office/powerpoint/2010/main" xmlns:p15="http://schemas.microsoft.com/office/powerpoint/2012/main" xmlns:mc="http://schemas.openxmlformats.org/markup-compatibility/2006">
+<p:sld xmlns:a="http://schemas.openxmlformats.org/drawingml/2006/main" xmlns:r="http://schemas.openxmlformats.org/officeDocument/2006/relationships" xmlns:p="http://schemas.openxmlformats.org/presentationml/2006/main">
   <p:cSld>
     <p:spTree>
       <p:nvGrpSpPr>
@@ -7291,6 +10669,7 @@
           <a:bodyPr anchor="ctr">
             <a:noAutofit/>
           </a:bodyPr>
+          <a:lstStyle/>
           <a:p>
             <a:pPr indent="0">
               <a:lnSpc>
@@ -7299,7 +10678,7 @@
               <a:buNone/>
             </a:pPr>
             <a:r>
-              <a:rPr b="0" lang="en-US" sz="4400" spc="-1" strike="noStrike">
+              <a:rPr lang="en-US" sz="4400" b="0" strike="noStrike" spc="-1">
                 <a:solidFill>
                   <a:srgbClr val="000000"/>
                 </a:solidFill>
@@ -7307,7 +10686,7 @@
               </a:rPr>
               <a:t>Time series data Exp vs Num</a:t>
             </a:r>
-            <a:endParaRPr b="0" lang="en-US" sz="4400" spc="-1" strike="noStrike">
+            <a:endParaRPr lang="en-US" sz="4400" b="0" strike="noStrike" spc="-1">
               <a:solidFill>
                 <a:srgbClr val="000000"/>
               </a:solidFill>
@@ -7318,12 +10697,12 @@
       </p:sp>
       <p:pic>
         <p:nvPicPr>
-          <p:cNvPr id="104" name="Content Placeholder 4" descr=""/>
+          <p:cNvPr id="104" name="Content Placeholder 4"/>
           <p:cNvPicPr/>
           <p:nvPr/>
         </p:nvPicPr>
         <p:blipFill>
-          <a:blip r:embed="rId1"/>
+          <a:blip r:embed="rId2"/>
           <a:stretch/>
         </p:blipFill>
         <p:spPr>
@@ -7359,15 +10738,22 @@
           </a:ln>
         </p:spPr>
         <p:style>
-          <a:lnRef idx="0"/>
-          <a:fillRef idx="0"/>
-          <a:effectRef idx="0"/>
+          <a:lnRef idx="0">
+            <a:scrgbClr r="0" g="0" b="0"/>
+          </a:lnRef>
+          <a:fillRef idx="0">
+            <a:scrgbClr r="0" g="0" b="0"/>
+          </a:fillRef>
+          <a:effectRef idx="0">
+            <a:scrgbClr r="0" g="0" b="0"/>
+          </a:effectRef>
           <a:fontRef idx="minor"/>
         </p:style>
         <p:txBody>
-          <a:bodyPr lIns="90000" rIns="90000" tIns="45000" bIns="45000" anchor="t">
+          <a:bodyPr lIns="90000" tIns="45000" rIns="90000" bIns="45000" anchor="t">
             <a:spAutoFit/>
           </a:bodyPr>
+          <a:lstStyle/>
           <a:p>
             <a:pPr>
               <a:lnSpc>
@@ -7375,15 +10761,33 @@
               </a:lnSpc>
             </a:pPr>
             <a:r>
-              <a:rPr b="0" lang="en-IN" sz="1800" spc="-1" strike="noStrike">
+              <a:rPr lang="en-IN" sz="1800" b="0" strike="noStrike" spc="-1" dirty="0">
                 <a:solidFill>
                   <a:srgbClr val="000000"/>
                 </a:solidFill>
                 <a:latin typeface="Calibri"/>
               </a:rPr>
-              <a:t>In numerical simulation the polarization value is bounded near to the Pr value</a:t>
+              <a:t>In numerical simulation the polarization value is bounded near to the </a:t>
             </a:r>
-            <a:endParaRPr b="0" lang="en-IN" sz="1800" spc="-1" strike="noStrike">
+            <a:r>
+              <a:rPr lang="en-IN" sz="1800" b="0" strike="noStrike" spc="-1" dirty="0" err="1">
+                <a:solidFill>
+                  <a:srgbClr val="000000"/>
+                </a:solidFill>
+                <a:latin typeface="Calibri"/>
+              </a:rPr>
+              <a:t>Pr</a:t>
+            </a:r>
+            <a:r>
+              <a:rPr lang="en-IN" sz="1800" b="0" strike="noStrike" spc="-1" dirty="0">
+                <a:solidFill>
+                  <a:srgbClr val="000000"/>
+                </a:solidFill>
+                <a:latin typeface="Calibri"/>
+              </a:rPr>
+              <a:t> value</a:t>
+            </a:r>
+            <a:endParaRPr lang="en-IN" sz="1800" b="0" strike="noStrike" spc="-1" dirty="0">
               <a:solidFill>
                 <a:srgbClr val="000000"/>
               </a:solidFill>
@@ -7412,15 +10816,22 @@
           </a:ln>
         </p:spPr>
         <p:style>
-          <a:lnRef idx="0"/>
-          <a:fillRef idx="0"/>
-          <a:effectRef idx="0"/>
+          <a:lnRef idx="0">
+            <a:scrgbClr r="0" g="0" b="0"/>
+          </a:lnRef>
+          <a:fillRef idx="0">
+            <a:scrgbClr r="0" g="0" b="0"/>
+          </a:fillRef>
+          <a:effectRef idx="0">
+            <a:scrgbClr r="0" g="0" b="0"/>
+          </a:effectRef>
           <a:fontRef idx="minor"/>
         </p:style>
         <p:txBody>
-          <a:bodyPr lIns="90000" rIns="90000" tIns="45000" bIns="45000" anchor="t">
+          <a:bodyPr lIns="90000" tIns="45000" rIns="90000" bIns="45000" anchor="t">
             <a:spAutoFit/>
           </a:bodyPr>
+          <a:lstStyle/>
           <a:p>
             <a:pPr>
               <a:lnSpc>
@@ -7428,7 +10839,7 @@
               </a:lnSpc>
             </a:pPr>
             <a:r>
-              <a:rPr b="0" lang="en-IN" sz="1800" spc="-1" strike="noStrike">
+              <a:rPr lang="en-IN" sz="1800" b="0" strike="noStrike" spc="-1">
                 <a:solidFill>
                   <a:srgbClr val="000000"/>
                 </a:solidFill>
@@ -7436,7 +10847,7 @@
               </a:rPr>
               <a:t>In Experiment the polarization sometimes crosses the bound and goes to higher value compared to the Pr value</a:t>
             </a:r>
-            <a:endParaRPr b="0" lang="en-IN" sz="1800" spc="-1" strike="noStrike">
+            <a:endParaRPr lang="en-IN" sz="1800" b="0" strike="noStrike" spc="-1">
               <a:solidFill>
                 <a:srgbClr val="000000"/>
               </a:solidFill>
@@ -7447,12 +10858,12 @@
       </p:sp>
       <p:pic>
         <p:nvPicPr>
-          <p:cNvPr id="107" name="Picture 10" descr=""/>
+          <p:cNvPr id="107" name="Picture 10"/>
           <p:cNvPicPr/>
           <p:nvPr/>
         </p:nvPicPr>
         <p:blipFill>
-          <a:blip r:embed="rId2"/>
+          <a:blip r:embed="rId3"/>
           <a:stretch/>
         </p:blipFill>
         <p:spPr>
@@ -7484,9 +10895,9 @@
           </a:prstGeom>
           <a:ln>
             <a:solidFill>
-              <a:srgbClr val="4472c4"/>
+              <a:srgbClr val="4472C4"/>
             </a:solidFill>
-            <a:tailEnd len="med" type="triangle" w="med"/>
+            <a:tailEnd type="triangle" w="med" len="med"/>
           </a:ln>
         </p:spPr>
       </p:cxnSp>
@@ -7506,9 +10917,9 @@
           </a:prstGeom>
           <a:ln>
             <a:solidFill>
-              <a:srgbClr val="4472c4"/>
+              <a:srgbClr val="4472C4"/>
             </a:solidFill>
-            <a:tailEnd len="med" type="triangle" w="med"/>
+            <a:tailEnd type="triangle" w="med" len="med"/>
           </a:ln>
         </p:spPr>
       </p:cxnSp>
@@ -7532,15 +10943,22 @@
           </a:ln>
         </p:spPr>
         <p:style>
-          <a:lnRef idx="0"/>
-          <a:fillRef idx="0"/>
-          <a:effectRef idx="0"/>
+          <a:lnRef idx="0">
+            <a:scrgbClr r="0" g="0" b="0"/>
+          </a:lnRef>
+          <a:fillRef idx="0">
+            <a:scrgbClr r="0" g="0" b="0"/>
+          </a:fillRef>
+          <a:effectRef idx="0">
+            <a:scrgbClr r="0" g="0" b="0"/>
+          </a:effectRef>
           <a:fontRef idx="minor"/>
         </p:style>
         <p:txBody>
-          <a:bodyPr lIns="90000" rIns="90000" tIns="45000" bIns="45000" anchor="t">
+          <a:bodyPr lIns="90000" tIns="45000" rIns="90000" bIns="45000" anchor="t">
             <a:spAutoFit/>
           </a:bodyPr>
+          <a:lstStyle/>
           <a:p>
             <a:pPr>
               <a:lnSpc>
@@ -7548,7 +10966,7 @@
               </a:lnSpc>
             </a:pPr>
             <a:r>
-              <a:rPr b="0" lang="en-IN" sz="1800" spc="-1" strike="noStrike">
+              <a:rPr lang="en-IN" sz="1800" b="0" strike="noStrike" spc="-1">
                 <a:solidFill>
                   <a:srgbClr val="000000"/>
                 </a:solidFill>
@@ -7556,7 +10974,7 @@
               </a:rPr>
               <a:t>Reason: the fit is not capturing the dielectric loss</a:t>
             </a:r>
-            <a:endParaRPr b="0" lang="en-IN" sz="1800" spc="-1" strike="noStrike">
+            <a:endParaRPr lang="en-IN" sz="1800" b="0" strike="noStrike" spc="-1">
               <a:solidFill>
                 <a:srgbClr val="000000"/>
               </a:solidFill>
@@ -7567,19 +10985,14 @@
       </p:sp>
     </p:spTree>
   </p:cSld>
-  <mc:AlternateContent>
-    <mc:Choice Requires="p14">
-      <p:transition spd="slow" p14:dur="2000"/>
-    </mc:Choice>
-    <mc:Fallback>
-      <p:transition spd="slow"/>
-    </mc:Fallback>
-  </mc:AlternateContent>
+  <p:clrMapOvr>
+    <a:masterClrMapping/>
+  </p:clrMapOvr>
 </p:sld>
 </file>
 
 <file path=ppt/slides/slide7.xml><?xml version="1.0" encoding="utf-8"?>
-<p:sld xmlns:a="http://schemas.openxmlformats.org/drawingml/2006/main" xmlns:p="http://schemas.openxmlformats.org/presentationml/2006/main" xmlns:r="http://schemas.openxmlformats.org/officeDocument/2006/relationships" xmlns:p14="http://schemas.microsoft.com/office/powerpoint/2010/main" xmlns:p15="http://schemas.microsoft.com/office/powerpoint/2012/main" xmlns:mc="http://schemas.openxmlformats.org/markup-compatibility/2006">
+<p:sld xmlns:a="http://schemas.openxmlformats.org/drawingml/2006/main" xmlns:r="http://schemas.openxmlformats.org/officeDocument/2006/relationships" xmlns:p="http://schemas.openxmlformats.org/presentationml/2006/main">
   <p:cSld>
     <p:spTree>
       <p:nvGrpSpPr>
@@ -7622,6 +11035,7 @@
           <a:bodyPr anchor="ctr">
             <a:noAutofit/>
           </a:bodyPr>
+          <a:lstStyle/>
           <a:p>
             <a:pPr indent="0">
               <a:lnSpc>
@@ -7630,7 +11044,7 @@
               <a:buNone/>
             </a:pPr>
             <a:r>
-              <a:rPr b="0" lang="en-US" sz="4400" spc="-1" strike="noStrike">
+              <a:rPr lang="en-US" sz="4400" b="0" strike="noStrike" spc="-1">
                 <a:solidFill>
                   <a:srgbClr val="000000"/>
                 </a:solidFill>
@@ -7638,7 +11052,7 @@
               </a:rPr>
               <a:t>FSK SNR of the signal improves or not?</a:t>
             </a:r>
-            <a:endParaRPr b="0" lang="en-US" sz="4400" spc="-1" strike="noStrike">
+            <a:endParaRPr lang="en-US" sz="4400" b="0" strike="noStrike" spc="-1">
               <a:solidFill>
                 <a:srgbClr val="000000"/>
               </a:solidFill>
@@ -7649,12 +11063,12 @@
       </p:sp>
       <p:pic>
         <p:nvPicPr>
-          <p:cNvPr id="112" name="Content Placeholder 4" descr=""/>
+          <p:cNvPr id="112" name="Content Placeholder 4"/>
           <p:cNvPicPr/>
           <p:nvPr/>
         </p:nvPicPr>
         <p:blipFill>
-          <a:blip r:embed="rId1"/>
+          <a:blip r:embed="rId2"/>
           <a:stretch/>
         </p:blipFill>
         <p:spPr>
@@ -7672,14 +11086,753 @@
       </p:pic>
     </p:spTree>
   </p:cSld>
-  <mc:AlternateContent>
-    <mc:Choice Requires="p14">
-      <p:transition spd="slow" p14:dur="2000"/>
-    </mc:Choice>
-    <mc:Fallback>
-      <p:transition spd="slow"/>
-    </mc:Fallback>
-  </mc:AlternateContent>
+  <p:clrMapOvr>
+    <a:masterClrMapping/>
+  </p:clrMapOvr>
+</p:sld>
+</file>
+
+<file path=ppt/slides/slide8.xml><?xml version="1.0" encoding="utf-8"?>
+<p:sld xmlns:a="http://schemas.openxmlformats.org/drawingml/2006/main" xmlns:r="http://schemas.openxmlformats.org/officeDocument/2006/relationships" xmlns:p="http://schemas.openxmlformats.org/presentationml/2006/main">
+  <p:cSld>
+    <p:spTree>
+      <p:nvGrpSpPr>
+        <p:cNvPr id="1" name="">
+          <a:extLst>
+            <a:ext uri="{FF2B5EF4-FFF2-40B4-BE49-F238E27FC236}">
+              <a16:creationId xmlns:a16="http://schemas.microsoft.com/office/drawing/2014/main" id="{D186C0B3-2DAB-BF01-6478-FD5C7C03212D}"/>
+            </a:ext>
+          </a:extLst>
+        </p:cNvPr>
+        <p:cNvGrpSpPr/>
+        <p:nvPr/>
+      </p:nvGrpSpPr>
+      <p:grpSpPr>
+        <a:xfrm>
+          <a:off x="0" y="0"/>
+          <a:ext cx="0" cy="0"/>
+          <a:chOff x="0" y="0"/>
+          <a:chExt cx="0" cy="0"/>
+        </a:xfrm>
+      </p:grpSpPr>
+      <p:pic>
+        <p:nvPicPr>
+          <p:cNvPr id="6" name="Picture 5" descr="A graph of a graph&#10;&#10;AI-generated content may be incorrect.">
+            <a:extLst>
+              <a:ext uri="{FF2B5EF4-FFF2-40B4-BE49-F238E27FC236}">
+                <a16:creationId xmlns:a16="http://schemas.microsoft.com/office/drawing/2014/main" id="{27B9F6D2-ECFD-FCED-F5FB-CE5836E02361}"/>
+              </a:ext>
+            </a:extLst>
+          </p:cNvPr>
+          <p:cNvPicPr>
+            <a:picLocks noChangeAspect="1"/>
+          </p:cNvPicPr>
+          <p:nvPr/>
+        </p:nvPicPr>
+        <p:blipFill>
+          <a:blip r:embed="rId3"/>
+          <a:stretch>
+            <a:fillRect/>
+          </a:stretch>
+        </p:blipFill>
+        <p:spPr>
+          <a:xfrm>
+            <a:off x="163349" y="1336189"/>
+            <a:ext cx="8139420" cy="2219842"/>
+          </a:xfrm>
+          <a:prstGeom prst="rect">
+            <a:avLst/>
+          </a:prstGeom>
+        </p:spPr>
+      </p:pic>
+      <p:sp>
+        <p:nvSpPr>
+          <p:cNvPr id="111" name="PlaceHolder 1">
+            <a:extLst>
+              <a:ext uri="{FF2B5EF4-FFF2-40B4-BE49-F238E27FC236}">
+                <a16:creationId xmlns:a16="http://schemas.microsoft.com/office/drawing/2014/main" id="{68A170A3-B327-AAC3-139B-100AF2EDB045}"/>
+              </a:ext>
+            </a:extLst>
+          </p:cNvPr>
+          <p:cNvSpPr>
+            <a:spLocks noGrp="1"/>
+          </p:cNvSpPr>
+          <p:nvPr>
+            <p:ph type="title"/>
+          </p:nvPr>
+        </p:nvSpPr>
+        <p:spPr>
+          <a:xfrm>
+            <a:off x="594799" y="98827"/>
+            <a:ext cx="10515240" cy="1325160"/>
+          </a:xfrm>
+          <a:prstGeom prst="rect">
+            <a:avLst/>
+          </a:prstGeom>
+          <a:noFill/>
+          <a:ln w="0">
+            <a:noFill/>
+          </a:ln>
+        </p:spPr>
+        <p:txBody>
+          <a:bodyPr anchor="ctr">
+            <a:noAutofit/>
+          </a:bodyPr>
+          <a:lstStyle/>
+          <a:p>
+            <a:pPr indent="0">
+              <a:lnSpc>
+                <a:spcPct val="90000"/>
+              </a:lnSpc>
+              <a:buNone/>
+            </a:pPr>
+            <a:r>
+              <a:rPr lang="en-US" spc="-1" dirty="0">
+                <a:solidFill>
+                  <a:srgbClr val="000000"/>
+                </a:solidFill>
+                <a:latin typeface="Calibri Light"/>
+              </a:rPr>
+              <a:t>Effect of rho in SR</a:t>
+            </a:r>
+            <a:endParaRPr lang="en-US" sz="4400" b="0" strike="noStrike" spc="-1" dirty="0">
+              <a:solidFill>
+                <a:srgbClr val="000000"/>
+              </a:solidFill>
+              <a:latin typeface="Calibri"/>
+            </a:endParaRPr>
+          </a:p>
+        </p:txBody>
+      </p:sp>
+      <p:pic>
+        <p:nvPicPr>
+          <p:cNvPr id="3" name="Picture 2">
+            <a:extLst>
+              <a:ext uri="{FF2B5EF4-FFF2-40B4-BE49-F238E27FC236}">
+                <a16:creationId xmlns:a16="http://schemas.microsoft.com/office/drawing/2014/main" id="{86E9330C-D487-EB1E-D503-A75CC2E83099}"/>
+              </a:ext>
+            </a:extLst>
+          </p:cNvPr>
+          <p:cNvPicPr>
+            <a:picLocks noChangeAspect="1"/>
+          </p:cNvPicPr>
+          <p:nvPr/>
+        </p:nvPicPr>
+        <p:blipFill>
+          <a:blip r:embed="rId4" cstate="print">
+            <a:extLst>
+              <a:ext uri="{28A0092B-C50C-407E-A947-70E740481C1C}">
+                <a14:useLocalDpi xmlns:a14="http://schemas.microsoft.com/office/drawing/2010/main" val="0"/>
+              </a:ext>
+            </a:extLst>
+          </a:blip>
+          <a:stretch>
+            <a:fillRect/>
+          </a:stretch>
+        </p:blipFill>
+        <p:spPr>
+          <a:xfrm>
+            <a:off x="8053212" y="1577666"/>
+            <a:ext cx="3975439" cy="1791432"/>
+          </a:xfrm>
+          <a:prstGeom prst="rect">
+            <a:avLst/>
+          </a:prstGeom>
+        </p:spPr>
+      </p:pic>
+      <p:sp>
+        <p:nvSpPr>
+          <p:cNvPr id="4" name="TextBox 3">
+            <a:extLst>
+              <a:ext uri="{FF2B5EF4-FFF2-40B4-BE49-F238E27FC236}">
+                <a16:creationId xmlns:a16="http://schemas.microsoft.com/office/drawing/2014/main" id="{BC95A842-2C25-C086-BECD-29E942C83EE9}"/>
+              </a:ext>
+            </a:extLst>
+          </p:cNvPr>
+          <p:cNvSpPr txBox="1"/>
+          <p:nvPr/>
+        </p:nvSpPr>
+        <p:spPr>
+          <a:xfrm>
+            <a:off x="8270384" y="3335843"/>
+            <a:ext cx="3758267" cy="923330"/>
+          </a:xfrm>
+          <a:prstGeom prst="rect">
+            <a:avLst/>
+          </a:prstGeom>
+          <a:noFill/>
+        </p:spPr>
+        <p:txBody>
+          <a:bodyPr wrap="square" rtlCol="0">
+            <a:spAutoFit/>
+          </a:bodyPr>
+          <a:lstStyle/>
+          <a:p>
+            <a:r>
+              <a:rPr lang="en-IN" dirty="0"/>
+              <a:t>Re-arranging </a:t>
+            </a:r>
+            <a:r>
+              <a:rPr lang="en-IN" dirty="0" err="1"/>
+              <a:t>Ktime</a:t>
+            </a:r>
+            <a:r>
+              <a:rPr lang="en-IN" dirty="0"/>
+              <a:t> formula, rho dependency is very less when indicated in terms of </a:t>
+            </a:r>
+            <a:r>
+              <a:rPr lang="en-IN" dirty="0" err="1"/>
+              <a:t>Dext</a:t>
+            </a:r>
+            <a:r>
+              <a:rPr lang="en-IN" dirty="0"/>
+              <a:t>/</a:t>
+            </a:r>
+            <a:r>
+              <a:rPr lang="en-IN" dirty="0" err="1"/>
+              <a:t>DelF</a:t>
+            </a:r>
+            <a:endParaRPr lang="en-IN" dirty="0"/>
+          </a:p>
+        </p:txBody>
+      </p:sp>
+      <p:pic>
+        <p:nvPicPr>
+          <p:cNvPr id="8" name="Picture 7" descr="A graph of a number of numbers&#10;&#10;AI-generated content may be incorrect.">
+            <a:extLst>
+              <a:ext uri="{FF2B5EF4-FFF2-40B4-BE49-F238E27FC236}">
+                <a16:creationId xmlns:a16="http://schemas.microsoft.com/office/drawing/2014/main" id="{8E60BF65-654A-26F3-856E-BA46180806F2}"/>
+              </a:ext>
+            </a:extLst>
+          </p:cNvPr>
+          <p:cNvPicPr>
+            <a:picLocks noChangeAspect="1"/>
+          </p:cNvPicPr>
+          <p:nvPr/>
+        </p:nvPicPr>
+        <p:blipFill>
+          <a:blip r:embed="rId5"/>
+          <a:stretch>
+            <a:fillRect/>
+          </a:stretch>
+        </p:blipFill>
+        <p:spPr>
+          <a:xfrm>
+            <a:off x="0" y="3556031"/>
+            <a:ext cx="8139420" cy="2247198"/>
+          </a:xfrm>
+          <a:prstGeom prst="rect">
+            <a:avLst/>
+          </a:prstGeom>
+        </p:spPr>
+      </p:pic>
+      <p:sp>
+        <p:nvSpPr>
+          <p:cNvPr id="9" name="TextBox 8">
+            <a:extLst>
+              <a:ext uri="{FF2B5EF4-FFF2-40B4-BE49-F238E27FC236}">
+                <a16:creationId xmlns:a16="http://schemas.microsoft.com/office/drawing/2014/main" id="{B232D41C-F299-0F73-3F0E-5BDFC8EF54D2}"/>
+              </a:ext>
+            </a:extLst>
+          </p:cNvPr>
+          <p:cNvSpPr txBox="1"/>
+          <p:nvPr/>
+        </p:nvSpPr>
+        <p:spPr>
+          <a:xfrm>
+            <a:off x="5577388" y="5775873"/>
+            <a:ext cx="3758267" cy="646331"/>
+          </a:xfrm>
+          <a:prstGeom prst="rect">
+            <a:avLst/>
+          </a:prstGeom>
+          <a:noFill/>
+        </p:spPr>
+        <p:txBody>
+          <a:bodyPr wrap="square" rtlCol="0">
+            <a:spAutoFit/>
+          </a:bodyPr>
+          <a:lstStyle/>
+          <a:p>
+            <a:r>
+              <a:rPr lang="en-IN" dirty="0">
+                <a:highlight>
+                  <a:srgbClr val="FFFF00"/>
+                </a:highlight>
+              </a:rPr>
+              <a:t>Difference is visible when shown in terms of </a:t>
+            </a:r>
+            <a:r>
+              <a:rPr lang="en-IN" dirty="0" err="1">
+                <a:highlight>
+                  <a:srgbClr val="FFFF00"/>
+                </a:highlight>
+              </a:rPr>
+              <a:t>Vrms</a:t>
+            </a:r>
+            <a:r>
+              <a:rPr lang="en-IN" dirty="0">
+                <a:highlight>
+                  <a:srgbClr val="FFFF00"/>
+                </a:highlight>
+              </a:rPr>
+              <a:t> (SD)</a:t>
+            </a:r>
+          </a:p>
+        </p:txBody>
+      </p:sp>
+    </p:spTree>
+    <p:extLst>
+      <p:ext uri="{BB962C8B-B14F-4D97-AF65-F5344CB8AC3E}">
+        <p14:creationId xmlns:p14="http://schemas.microsoft.com/office/powerpoint/2010/main" val="802177587"/>
+      </p:ext>
+    </p:extLst>
+  </p:cSld>
+  <p:clrMapOvr>
+    <a:masterClrMapping/>
+  </p:clrMapOvr>
+</p:sld>
+</file>
+
+<file path=ppt/slides/slide9.xml><?xml version="1.0" encoding="utf-8"?>
+<p:sld xmlns:a="http://schemas.openxmlformats.org/drawingml/2006/main" xmlns:r="http://schemas.openxmlformats.org/officeDocument/2006/relationships" xmlns:p="http://schemas.openxmlformats.org/presentationml/2006/main">
+  <p:cSld>
+    <p:spTree>
+      <p:nvGrpSpPr>
+        <p:cNvPr id="1" name="">
+          <a:extLst>
+            <a:ext uri="{FF2B5EF4-FFF2-40B4-BE49-F238E27FC236}">
+              <a16:creationId xmlns:a16="http://schemas.microsoft.com/office/drawing/2014/main" id="{F1EA8ACB-4327-8999-3D1D-D27C824C015F}"/>
+            </a:ext>
+          </a:extLst>
+        </p:cNvPr>
+        <p:cNvGrpSpPr/>
+        <p:nvPr/>
+      </p:nvGrpSpPr>
+      <p:grpSpPr>
+        <a:xfrm>
+          <a:off x="0" y="0"/>
+          <a:ext cx="0" cy="0"/>
+          <a:chOff x="0" y="0"/>
+          <a:chExt cx="0" cy="0"/>
+        </a:xfrm>
+      </p:grpSpPr>
+      <p:sp>
+        <p:nvSpPr>
+          <p:cNvPr id="111" name="PlaceHolder 1">
+            <a:extLst>
+              <a:ext uri="{FF2B5EF4-FFF2-40B4-BE49-F238E27FC236}">
+                <a16:creationId xmlns:a16="http://schemas.microsoft.com/office/drawing/2014/main" id="{CD143C91-351B-2E2A-F1EB-0C77434B6376}"/>
+              </a:ext>
+            </a:extLst>
+          </p:cNvPr>
+          <p:cNvSpPr>
+            <a:spLocks noGrp="1"/>
+          </p:cNvSpPr>
+          <p:nvPr>
+            <p:ph type="title"/>
+          </p:nvPr>
+        </p:nvSpPr>
+        <p:spPr>
+          <a:xfrm>
+            <a:off x="594799" y="98827"/>
+            <a:ext cx="10515240" cy="1325160"/>
+          </a:xfrm>
+          <a:prstGeom prst="rect">
+            <a:avLst/>
+          </a:prstGeom>
+          <a:noFill/>
+          <a:ln w="0">
+            <a:noFill/>
+          </a:ln>
+        </p:spPr>
+        <p:txBody>
+          <a:bodyPr anchor="ctr">
+            <a:noAutofit/>
+          </a:bodyPr>
+          <a:lstStyle/>
+          <a:p>
+            <a:pPr indent="0">
+              <a:lnSpc>
+                <a:spcPct val="90000"/>
+              </a:lnSpc>
+              <a:buNone/>
+            </a:pPr>
+            <a:r>
+              <a:rPr lang="en-US" spc="-1" dirty="0">
+                <a:solidFill>
+                  <a:srgbClr val="000000"/>
+                </a:solidFill>
+                <a:latin typeface="Calibri Light"/>
+              </a:rPr>
+              <a:t>Noise Characterization</a:t>
+            </a:r>
+            <a:endParaRPr lang="en-US" sz="4400" b="0" strike="noStrike" spc="-1" dirty="0">
+              <a:solidFill>
+                <a:srgbClr val="000000"/>
+              </a:solidFill>
+              <a:latin typeface="Calibri"/>
+            </a:endParaRPr>
+          </a:p>
+        </p:txBody>
+      </p:sp>
+      <p:pic>
+        <p:nvPicPr>
+          <p:cNvPr id="5" name="Picture 4">
+            <a:extLst>
+              <a:ext uri="{FF2B5EF4-FFF2-40B4-BE49-F238E27FC236}">
+                <a16:creationId xmlns:a16="http://schemas.microsoft.com/office/drawing/2014/main" id="{FB7529B9-5EDD-CBAB-D649-6B49A2B21A00}"/>
+              </a:ext>
+            </a:extLst>
+          </p:cNvPr>
+          <p:cNvPicPr>
+            <a:picLocks noChangeAspect="1"/>
+          </p:cNvPicPr>
+          <p:nvPr/>
+        </p:nvPicPr>
+        <p:blipFill>
+          <a:blip r:embed="rId3">
+            <a:extLst>
+              <a:ext uri="{28A0092B-C50C-407E-A947-70E740481C1C}">
+                <a14:useLocalDpi xmlns:a14="http://schemas.microsoft.com/office/drawing/2010/main" val="0"/>
+              </a:ext>
+            </a:extLst>
+          </a:blip>
+          <a:stretch>
+            <a:fillRect/>
+          </a:stretch>
+        </p:blipFill>
+        <p:spPr>
+          <a:xfrm>
+            <a:off x="1385930" y="2123294"/>
+            <a:ext cx="9420139" cy="2918582"/>
+          </a:xfrm>
+          <a:prstGeom prst="rect">
+            <a:avLst/>
+          </a:prstGeom>
+        </p:spPr>
+      </p:pic>
+      <p:sp>
+        <p:nvSpPr>
+          <p:cNvPr id="7" name="TextBox 6">
+            <a:extLst>
+              <a:ext uri="{FF2B5EF4-FFF2-40B4-BE49-F238E27FC236}">
+                <a16:creationId xmlns:a16="http://schemas.microsoft.com/office/drawing/2014/main" id="{DF5CAB8E-F92F-F766-D374-E0A593D22EE0}"/>
+              </a:ext>
+            </a:extLst>
+          </p:cNvPr>
+          <p:cNvSpPr txBox="1"/>
+          <p:nvPr/>
+        </p:nvSpPr>
+        <p:spPr>
+          <a:xfrm>
+            <a:off x="1861066" y="5002519"/>
+            <a:ext cx="3080050" cy="1477328"/>
+          </a:xfrm>
+          <a:prstGeom prst="rect">
+            <a:avLst/>
+          </a:prstGeom>
+          <a:noFill/>
+        </p:spPr>
+        <p:txBody>
+          <a:bodyPr wrap="square" rtlCol="0">
+            <a:spAutoFit/>
+          </a:bodyPr>
+          <a:lstStyle/>
+          <a:p>
+            <a:r>
+              <a:rPr lang="en-IN" dirty="0">
+                <a:highlight>
+                  <a:srgbClr val="FFFF00"/>
+                </a:highlight>
+              </a:rPr>
+              <a:t>Note: 3dB BW is not exactly 10 kHz, it is close to 5kHz. But in calculation we are going with the assumption that BW is same as 1/dt</a:t>
+            </a:r>
+          </a:p>
+        </p:txBody>
+      </p:sp>
+      <p:sp>
+        <p:nvSpPr>
+          <p:cNvPr id="10" name="TextBox 9">
+            <a:extLst>
+              <a:ext uri="{FF2B5EF4-FFF2-40B4-BE49-F238E27FC236}">
+                <a16:creationId xmlns:a16="http://schemas.microsoft.com/office/drawing/2014/main" id="{8BF20551-61EC-BA19-CD68-772E4400D42F}"/>
+              </a:ext>
+            </a:extLst>
+          </p:cNvPr>
+          <p:cNvSpPr txBox="1"/>
+          <p:nvPr/>
+        </p:nvSpPr>
+        <p:spPr>
+          <a:xfrm>
+            <a:off x="4999946" y="5002519"/>
+            <a:ext cx="2768260" cy="923330"/>
+          </a:xfrm>
+          <a:prstGeom prst="rect">
+            <a:avLst/>
+          </a:prstGeom>
+          <a:noFill/>
+        </p:spPr>
+        <p:txBody>
+          <a:bodyPr wrap="square" rtlCol="0">
+            <a:spAutoFit/>
+          </a:bodyPr>
+          <a:lstStyle/>
+          <a:p>
+            <a:r>
+              <a:rPr lang="en-IN" dirty="0">
+                <a:highlight>
+                  <a:srgbClr val="FFFF00"/>
+                </a:highlight>
+              </a:rPr>
+              <a:t>Only the corrected SD will match the amplitude distribution</a:t>
+            </a:r>
+          </a:p>
+        </p:txBody>
+      </p:sp>
+      <p:sp>
+        <p:nvSpPr>
+          <p:cNvPr id="11" name="TextBox 10">
+            <a:extLst>
+              <a:ext uri="{FF2B5EF4-FFF2-40B4-BE49-F238E27FC236}">
+                <a16:creationId xmlns:a16="http://schemas.microsoft.com/office/drawing/2014/main" id="{8CFFDBC7-728A-795D-1963-B031FBBE5849}"/>
+              </a:ext>
+            </a:extLst>
+          </p:cNvPr>
+          <p:cNvSpPr txBox="1"/>
+          <p:nvPr/>
+        </p:nvSpPr>
+        <p:spPr>
+          <a:xfrm>
+            <a:off x="741136" y="1199964"/>
+            <a:ext cx="2239860" cy="923330"/>
+          </a:xfrm>
+          <a:prstGeom prst="rect">
+            <a:avLst/>
+          </a:prstGeom>
+          <a:noFill/>
+        </p:spPr>
+        <p:txBody>
+          <a:bodyPr wrap="square" rtlCol="0">
+            <a:spAutoFit/>
+          </a:bodyPr>
+          <a:lstStyle/>
+          <a:p>
+            <a:r>
+              <a:rPr lang="en-IN" dirty="0"/>
+              <a:t>How noise is generated for simulation ?</a:t>
+            </a:r>
+          </a:p>
+        </p:txBody>
+      </p:sp>
+      <p:sp>
+        <p:nvSpPr>
+          <p:cNvPr id="12" name="Rectangle: Rounded Corners 11">
+            <a:extLst>
+              <a:ext uri="{FF2B5EF4-FFF2-40B4-BE49-F238E27FC236}">
+                <a16:creationId xmlns:a16="http://schemas.microsoft.com/office/drawing/2014/main" id="{E26CEC10-E105-7F76-5484-E48972F34E07}"/>
+              </a:ext>
+            </a:extLst>
+          </p:cNvPr>
+          <p:cNvSpPr/>
+          <p:nvPr/>
+        </p:nvSpPr>
+        <p:spPr>
+          <a:xfrm>
+            <a:off x="2533476" y="1239321"/>
+            <a:ext cx="1501629" cy="782426"/>
+          </a:xfrm>
+          <a:prstGeom prst="roundRect">
+            <a:avLst/>
+          </a:prstGeom>
+          <a:solidFill>
+            <a:srgbClr val="00B050"/>
+          </a:solidFill>
+          <a:ln>
+            <a:noFill/>
+          </a:ln>
+        </p:spPr>
+        <p:style>
+          <a:lnRef idx="2">
+            <a:schemeClr val="accent1">
+              <a:shade val="15000"/>
+            </a:schemeClr>
+          </a:lnRef>
+          <a:fillRef idx="1">
+            <a:schemeClr val="accent1"/>
+          </a:fillRef>
+          <a:effectRef idx="0">
+            <a:schemeClr val="accent1"/>
+          </a:effectRef>
+          <a:fontRef idx="minor">
+            <a:schemeClr val="lt1"/>
+          </a:fontRef>
+        </p:style>
+        <p:txBody>
+          <a:bodyPr rtlCol="0" anchor="ctr"/>
+          <a:lstStyle/>
+          <a:p>
+            <a:pPr algn="ctr"/>
+            <a:r>
+              <a:rPr lang="en-IN" sz="1200" dirty="0"/>
+              <a:t>N samples from</a:t>
+            </a:r>
+          </a:p>
+          <a:p>
+            <a:pPr algn="ctr"/>
+            <a:r>
+              <a:rPr lang="en-IN" sz="1200" dirty="0"/>
+              <a:t>WGD</a:t>
+            </a:r>
+          </a:p>
+        </p:txBody>
+      </p:sp>
+      <p:sp>
+        <p:nvSpPr>
+          <p:cNvPr id="13" name="Rectangle: Rounded Corners 12">
+            <a:extLst>
+              <a:ext uri="{FF2B5EF4-FFF2-40B4-BE49-F238E27FC236}">
+                <a16:creationId xmlns:a16="http://schemas.microsoft.com/office/drawing/2014/main" id="{B189354B-0BE1-D983-2E85-C0ED1473CBB0}"/>
+              </a:ext>
+            </a:extLst>
+          </p:cNvPr>
+          <p:cNvSpPr/>
+          <p:nvPr/>
+        </p:nvSpPr>
+        <p:spPr>
+          <a:xfrm>
+            <a:off x="4610293" y="1239321"/>
+            <a:ext cx="2045515" cy="782426"/>
+          </a:xfrm>
+          <a:prstGeom prst="roundRect">
+            <a:avLst/>
+          </a:prstGeom>
+          <a:solidFill>
+            <a:srgbClr val="00B050"/>
+          </a:solidFill>
+          <a:ln>
+            <a:noFill/>
+          </a:ln>
+        </p:spPr>
+        <p:style>
+          <a:lnRef idx="2">
+            <a:schemeClr val="accent1">
+              <a:shade val="15000"/>
+            </a:schemeClr>
+          </a:lnRef>
+          <a:fillRef idx="1">
+            <a:schemeClr val="accent1"/>
+          </a:fillRef>
+          <a:effectRef idx="0">
+            <a:schemeClr val="accent1"/>
+          </a:effectRef>
+          <a:fontRef idx="minor">
+            <a:schemeClr val="lt1"/>
+          </a:fontRef>
+        </p:style>
+        <p:txBody>
+          <a:bodyPr rtlCol="0" anchor="ctr"/>
+          <a:lstStyle/>
+          <a:p>
+            <a:pPr algn="ctr"/>
+            <a:r>
+              <a:rPr lang="en-IN" sz="1200" dirty="0"/>
+              <a:t>Zero hold interpolation for (Sample rate/ simulation time step)</a:t>
+            </a:r>
+          </a:p>
+        </p:txBody>
+      </p:sp>
+      <p:cxnSp>
+        <p:nvCxnSpPr>
+          <p:cNvPr id="15" name="Straight Arrow Connector 14">
+            <a:extLst>
+              <a:ext uri="{FF2B5EF4-FFF2-40B4-BE49-F238E27FC236}">
+                <a16:creationId xmlns:a16="http://schemas.microsoft.com/office/drawing/2014/main" id="{8CDFA636-2B4A-6CEE-14C2-0D83654ADCEF}"/>
+              </a:ext>
+            </a:extLst>
+          </p:cNvPr>
+          <p:cNvCxnSpPr>
+            <a:stCxn id="12" idx="3"/>
+            <a:endCxn id="13" idx="1"/>
+          </p:cNvCxnSpPr>
+          <p:nvPr/>
+        </p:nvCxnSpPr>
+        <p:spPr>
+          <a:xfrm>
+            <a:off x="4035105" y="1630534"/>
+            <a:ext cx="575188" cy="0"/>
+          </a:xfrm>
+          <a:prstGeom prst="straightConnector1">
+            <a:avLst/>
+          </a:prstGeom>
+          <a:ln>
+            <a:tailEnd type="triangle"/>
+          </a:ln>
+        </p:spPr>
+        <p:style>
+          <a:lnRef idx="1">
+            <a:schemeClr val="accent1"/>
+          </a:lnRef>
+          <a:fillRef idx="0">
+            <a:schemeClr val="accent1"/>
+          </a:fillRef>
+          <a:effectRef idx="0">
+            <a:schemeClr val="accent1"/>
+          </a:effectRef>
+          <a:fontRef idx="minor">
+            <a:schemeClr val="tx1"/>
+          </a:fontRef>
+        </p:style>
+      </p:cxnSp>
+      <p:sp>
+        <p:nvSpPr>
+          <p:cNvPr id="17" name="TextBox 16">
+            <a:extLst>
+              <a:ext uri="{FF2B5EF4-FFF2-40B4-BE49-F238E27FC236}">
+                <a16:creationId xmlns:a16="http://schemas.microsoft.com/office/drawing/2014/main" id="{3C9FDC9E-16C3-9FB4-EADA-43FF0F202DFF}"/>
+              </a:ext>
+            </a:extLst>
+          </p:cNvPr>
+          <p:cNvSpPr txBox="1"/>
+          <p:nvPr/>
+        </p:nvSpPr>
+        <p:spPr>
+          <a:xfrm>
+            <a:off x="7762993" y="1168869"/>
+            <a:ext cx="4518490" cy="923330"/>
+          </a:xfrm>
+          <a:prstGeom prst="rect">
+            <a:avLst/>
+          </a:prstGeom>
+          <a:noFill/>
+        </p:spPr>
+        <p:txBody>
+          <a:bodyPr wrap="square" rtlCol="0">
+            <a:spAutoFit/>
+          </a:bodyPr>
+          <a:lstStyle/>
+          <a:p>
+            <a:r>
+              <a:rPr lang="en-IN" dirty="0">
+                <a:highlight>
+                  <a:srgbClr val="FFFF00"/>
+                </a:highlight>
+              </a:rPr>
+              <a:t>This is not an ideal white noise, we are following this methodology to reproduce the experimental conditions </a:t>
+            </a:r>
+          </a:p>
+        </p:txBody>
+      </p:sp>
+    </p:spTree>
+    <p:extLst>
+      <p:ext uri="{BB962C8B-B14F-4D97-AF65-F5344CB8AC3E}">
+        <p14:creationId xmlns:p14="http://schemas.microsoft.com/office/powerpoint/2010/main" val="161625138"/>
+      </p:ext>
+    </p:extLst>
+  </p:cSld>
+  <p:clrMapOvr>
+    <a:masterClrMapping/>
+  </p:clrMapOvr>
 </p:sld>
 </file>
 
@@ -7691,37 +11844,37 @@
         <a:srgbClr val="000000"/>
       </a:dk1>
       <a:lt1>
-        <a:srgbClr val="ffffff"/>
+        <a:srgbClr val="FFFFFF"/>
       </a:lt1>
       <a:dk2>
-        <a:srgbClr val="44546a"/>
+        <a:srgbClr val="44546A"/>
       </a:dk2>
       <a:lt2>
-        <a:srgbClr val="e7e6e6"/>
+        <a:srgbClr val="E7E6E6"/>
       </a:lt2>
       <a:accent1>
-        <a:srgbClr val="4472c4"/>
+        <a:srgbClr val="4472C4"/>
       </a:accent1>
       <a:accent2>
-        <a:srgbClr val="ed7d31"/>
+        <a:srgbClr val="ED7D31"/>
       </a:accent2>
       <a:accent3>
-        <a:srgbClr val="a5a5a5"/>
+        <a:srgbClr val="A5A5A5"/>
       </a:accent3>
       <a:accent4>
-        <a:srgbClr val="ffc000"/>
+        <a:srgbClr val="FFC000"/>
       </a:accent4>
       <a:accent5>
-        <a:srgbClr val="5b9bd5"/>
+        <a:srgbClr val="5B9BD5"/>
       </a:accent5>
       <a:accent6>
-        <a:srgbClr val="70ad47"/>
+        <a:srgbClr val="70AD47"/>
       </a:accent6>
       <a:hlink>
-        <a:srgbClr val="0563c1"/>
+        <a:srgbClr val="0563C1"/>
       </a:hlink>
       <a:folHlink>
-        <a:srgbClr val="954f72"/>
+        <a:srgbClr val="954F72"/>
       </a:folHlink>
     </a:clrScheme>
     <a:fontScheme name="Office">
@@ -7894,6 +12047,8 @@
       </a:bgFillStyleLst>
     </a:fmtScheme>
   </a:themeElements>
+  <a:objectDefaults/>
+  <a:extraClrSchemeLst/>
 </a:theme>
 </file>
 
@@ -7905,37 +12060,37 @@
         <a:srgbClr val="000000"/>
       </a:dk1>
       <a:lt1>
-        <a:srgbClr val="ffffff"/>
+        <a:srgbClr val="FFFFFF"/>
       </a:lt1>
       <a:dk2>
-        <a:srgbClr val="44546a"/>
+        <a:srgbClr val="44546A"/>
       </a:dk2>
       <a:lt2>
-        <a:srgbClr val="e7e6e6"/>
+        <a:srgbClr val="E7E6E6"/>
       </a:lt2>
       <a:accent1>
-        <a:srgbClr val="4472c4"/>
+        <a:srgbClr val="4472C4"/>
       </a:accent1>
       <a:accent2>
-        <a:srgbClr val="ed7d31"/>
+        <a:srgbClr val="ED7D31"/>
       </a:accent2>
       <a:accent3>
-        <a:srgbClr val="a5a5a5"/>
+        <a:srgbClr val="A5A5A5"/>
       </a:accent3>
       <a:accent4>
-        <a:srgbClr val="ffc000"/>
+        <a:srgbClr val="FFC000"/>
       </a:accent4>
       <a:accent5>
-        <a:srgbClr val="5b9bd5"/>
+        <a:srgbClr val="5B9BD5"/>
       </a:accent5>
       <a:accent6>
-        <a:srgbClr val="70ad47"/>
+        <a:srgbClr val="70AD47"/>
       </a:accent6>
       <a:hlink>
-        <a:srgbClr val="0563c1"/>
+        <a:srgbClr val="0563C1"/>
       </a:hlink>
       <a:folHlink>
-        <a:srgbClr val="954f72"/>
+        <a:srgbClr val="954F72"/>
       </a:folHlink>
     </a:clrScheme>
     <a:fontScheme name="Office">
@@ -8108,5 +12263,302 @@
       </a:bgFillStyleLst>
     </a:fmtScheme>
   </a:themeElements>
+  <a:objectDefaults/>
+  <a:extraClrSchemeLst/>
+</a:theme>
+</file>
+
+<file path=ppt/theme/theme3.xml><?xml version="1.0" encoding="utf-8"?>
+<a:theme xmlns:a="http://schemas.openxmlformats.org/drawingml/2006/main" name="Office Theme">
+  <a:themeElements>
+    <a:clrScheme name="Office">
+      <a:dk1>
+        <a:sysClr val="windowText" lastClr="000000"/>
+      </a:dk1>
+      <a:lt1>
+        <a:sysClr val="window" lastClr="FFFFFF"/>
+      </a:lt1>
+      <a:dk2>
+        <a:srgbClr val="44546A"/>
+      </a:dk2>
+      <a:lt2>
+        <a:srgbClr val="E7E6E6"/>
+      </a:lt2>
+      <a:accent1>
+        <a:srgbClr val="4472C4"/>
+      </a:accent1>
+      <a:accent2>
+        <a:srgbClr val="ED7D31"/>
+      </a:accent2>
+      <a:accent3>
+        <a:srgbClr val="A5A5A5"/>
+      </a:accent3>
+      <a:accent4>
+        <a:srgbClr val="FFC000"/>
+      </a:accent4>
+      <a:accent5>
+        <a:srgbClr val="5B9BD5"/>
+      </a:accent5>
+      <a:accent6>
+        <a:srgbClr val="70AD47"/>
+      </a:accent6>
+      <a:hlink>
+        <a:srgbClr val="0563C1"/>
+      </a:hlink>
+      <a:folHlink>
+        <a:srgbClr val="954F72"/>
+      </a:folHlink>
+    </a:clrScheme>
+    <a:fontScheme name="Office">
+      <a:majorFont>
+        <a:latin typeface="Calibri Light" panose="020F0302020204030204"/>
+        <a:ea typeface=""/>
+        <a:cs typeface=""/>
+        <a:font script="Jpan" typeface="游ゴシック Light"/>
+        <a:font script="Hang" typeface="맑은 고딕"/>
+        <a:font script="Hans" typeface="等线 Light"/>
+        <a:font script="Hant" typeface="新細明體"/>
+        <a:font script="Arab" typeface="Times New Roman"/>
+        <a:font script="Hebr" typeface="Times New Roman"/>
+        <a:font script="Thai" typeface="Angsana New"/>
+        <a:font script="Ethi" typeface="Nyala"/>
+        <a:font script="Beng" typeface="Vrinda"/>
+        <a:font script="Gujr" typeface="Shruti"/>
+        <a:font script="Khmr" typeface="MoolBoran"/>
+        <a:font script="Knda" typeface="Tunga"/>
+        <a:font script="Guru" typeface="Raavi"/>
+        <a:font script="Cans" typeface="Euphemia"/>
+        <a:font script="Cher" typeface="Plantagenet Cherokee"/>
+        <a:font script="Yiii" typeface="Microsoft Yi Baiti"/>
+        <a:font script="Tibt" typeface="Microsoft Himalaya"/>
+        <a:font script="Thaa" typeface="MV Boli"/>
+        <a:font script="Deva" typeface="Mangal"/>
+        <a:font script="Telu" typeface="Gautami"/>
+        <a:font script="Taml" typeface="Latha"/>
+        <a:font script="Syrc" typeface="Estrangelo Edessa"/>
+        <a:font script="Orya" typeface="Kalinga"/>
+        <a:font script="Mlym" typeface="Kartika"/>
+        <a:font script="Laoo" typeface="DokChampa"/>
+        <a:font script="Sinh" typeface="Iskoola Pota"/>
+        <a:font script="Mong" typeface="Mongolian Baiti"/>
+        <a:font script="Viet" typeface="Times New Roman"/>
+        <a:font script="Uigh" typeface="Microsoft Uighur"/>
+        <a:font script="Geor" typeface="Sylfaen"/>
+        <a:font script="Armn" typeface="Arial"/>
+        <a:font script="Bugi" typeface="Leelawadee UI"/>
+        <a:font script="Bopo" typeface="Microsoft JhengHei"/>
+        <a:font script="Java" typeface="Javanese Text"/>
+        <a:font script="Lisu" typeface="Segoe UI"/>
+        <a:font script="Mymr" typeface="Myanmar Text"/>
+        <a:font script="Nkoo" typeface="Ebrima"/>
+        <a:font script="Olck" typeface="Nirmala UI"/>
+        <a:font script="Osma" typeface="Ebrima"/>
+        <a:font script="Phag" typeface="Phagspa"/>
+        <a:font script="Syrn" typeface="Estrangelo Edessa"/>
+        <a:font script="Syrj" typeface="Estrangelo Edessa"/>
+        <a:font script="Syre" typeface="Estrangelo Edessa"/>
+        <a:font script="Sora" typeface="Nirmala UI"/>
+        <a:font script="Tale" typeface="Microsoft Tai Le"/>
+        <a:font script="Talu" typeface="Microsoft New Tai Lue"/>
+        <a:font script="Tfng" typeface="Ebrima"/>
+      </a:majorFont>
+      <a:minorFont>
+        <a:latin typeface="Calibri" panose="020F0502020204030204"/>
+        <a:ea typeface=""/>
+        <a:cs typeface=""/>
+        <a:font script="Jpan" typeface="游ゴシック"/>
+        <a:font script="Hang" typeface="맑은 고딕"/>
+        <a:font script="Hans" typeface="等线"/>
+        <a:font script="Hant" typeface="新細明體"/>
+        <a:font script="Arab" typeface="Arial"/>
+        <a:font script="Hebr" typeface="Arial"/>
+        <a:font script="Thai" typeface="Cordia New"/>
+        <a:font script="Ethi" typeface="Nyala"/>
+        <a:font script="Beng" typeface="Vrinda"/>
+        <a:font script="Gujr" typeface="Shruti"/>
+        <a:font script="Khmr" typeface="DaunPenh"/>
+        <a:font script="Knda" typeface="Tunga"/>
+        <a:font script="Guru" typeface="Raavi"/>
+        <a:font script="Cans" typeface="Euphemia"/>
+        <a:font script="Cher" typeface="Plantagenet Cherokee"/>
+        <a:font script="Yiii" typeface="Microsoft Yi Baiti"/>
+        <a:font script="Tibt" typeface="Microsoft Himalaya"/>
+        <a:font script="Thaa" typeface="MV Boli"/>
+        <a:font script="Deva" typeface="Mangal"/>
+        <a:font script="Telu" typeface="Gautami"/>
+        <a:font script="Taml" typeface="Latha"/>
+        <a:font script="Syrc" typeface="Estrangelo Edessa"/>
+        <a:font script="Orya" typeface="Kalinga"/>
+        <a:font script="Mlym" typeface="Kartika"/>
+        <a:font script="Laoo" typeface="DokChampa"/>
+        <a:font script="Sinh" typeface="Iskoola Pota"/>
+        <a:font script="Mong" typeface="Mongolian Baiti"/>
+        <a:font script="Viet" typeface="Arial"/>
+        <a:font script="Uigh" typeface="Microsoft Uighur"/>
+        <a:font script="Geor" typeface="Sylfaen"/>
+        <a:font script="Armn" typeface="Arial"/>
+        <a:font script="Bugi" typeface="Leelawadee UI"/>
+        <a:font script="Bopo" typeface="Microsoft JhengHei"/>
+        <a:font script="Java" typeface="Javanese Text"/>
+        <a:font script="Lisu" typeface="Segoe UI"/>
+        <a:font script="Mymr" typeface="Myanmar Text"/>
+        <a:font script="Nkoo" typeface="Ebrima"/>
+        <a:font script="Olck" typeface="Nirmala UI"/>
+        <a:font script="Osma" typeface="Ebrima"/>
+        <a:font script="Phag" typeface="Phagspa"/>
+        <a:font script="Syrn" typeface="Estrangelo Edessa"/>
+        <a:font script="Syrj" typeface="Estrangelo Edessa"/>
+        <a:font script="Syre" typeface="Estrangelo Edessa"/>
+        <a:font script="Sora" typeface="Nirmala UI"/>
+        <a:font script="Tale" typeface="Microsoft Tai Le"/>
+        <a:font script="Talu" typeface="Microsoft New Tai Lue"/>
+        <a:font script="Tfng" typeface="Ebrima"/>
+      </a:minorFont>
+    </a:fontScheme>
+    <a:fmtScheme name="Office">
+      <a:fillStyleLst>
+        <a:solidFill>
+          <a:schemeClr val="phClr"/>
+        </a:solidFill>
+        <a:gradFill rotWithShape="1">
+          <a:gsLst>
+            <a:gs pos="0">
+              <a:schemeClr val="phClr">
+                <a:lumMod val="110000"/>
+                <a:satMod val="105000"/>
+                <a:tint val="67000"/>
+              </a:schemeClr>
+            </a:gs>
+            <a:gs pos="50000">
+              <a:schemeClr val="phClr">
+                <a:lumMod val="105000"/>
+                <a:satMod val="103000"/>
+                <a:tint val="73000"/>
+              </a:schemeClr>
+            </a:gs>
+            <a:gs pos="100000">
+              <a:schemeClr val="phClr">
+                <a:lumMod val="105000"/>
+                <a:satMod val="109000"/>
+                <a:tint val="81000"/>
+              </a:schemeClr>
+            </a:gs>
+          </a:gsLst>
+          <a:lin ang="5400000" scaled="0"/>
+        </a:gradFill>
+        <a:gradFill rotWithShape="1">
+          <a:gsLst>
+            <a:gs pos="0">
+              <a:schemeClr val="phClr">
+                <a:satMod val="103000"/>
+                <a:lumMod val="102000"/>
+                <a:tint val="94000"/>
+              </a:schemeClr>
+            </a:gs>
+            <a:gs pos="50000">
+              <a:schemeClr val="phClr">
+                <a:satMod val="110000"/>
+                <a:lumMod val="100000"/>
+                <a:shade val="100000"/>
+              </a:schemeClr>
+            </a:gs>
+            <a:gs pos="100000">
+              <a:schemeClr val="phClr">
+                <a:lumMod val="99000"/>
+                <a:satMod val="120000"/>
+                <a:shade val="78000"/>
+              </a:schemeClr>
+            </a:gs>
+          </a:gsLst>
+          <a:lin ang="5400000" scaled="0"/>
+        </a:gradFill>
+      </a:fillStyleLst>
+      <a:lnStyleLst>
+        <a:ln w="6350" cap="flat" cmpd="sng" algn="ctr">
+          <a:solidFill>
+            <a:schemeClr val="phClr"/>
+          </a:solidFill>
+          <a:prstDash val="solid"/>
+          <a:miter lim="800000"/>
+        </a:ln>
+        <a:ln w="12700" cap="flat" cmpd="sng" algn="ctr">
+          <a:solidFill>
+            <a:schemeClr val="phClr"/>
+          </a:solidFill>
+          <a:prstDash val="solid"/>
+          <a:miter lim="800000"/>
+        </a:ln>
+        <a:ln w="19050" cap="flat" cmpd="sng" algn="ctr">
+          <a:solidFill>
+            <a:schemeClr val="phClr"/>
+          </a:solidFill>
+          <a:prstDash val="solid"/>
+          <a:miter lim="800000"/>
+        </a:ln>
+      </a:lnStyleLst>
+      <a:effectStyleLst>
+        <a:effectStyle>
+          <a:effectLst/>
+        </a:effectStyle>
+        <a:effectStyle>
+          <a:effectLst/>
+        </a:effectStyle>
+        <a:effectStyle>
+          <a:effectLst>
+            <a:outerShdw blurRad="57150" dist="19050" dir="5400000" algn="ctr" rotWithShape="0">
+              <a:srgbClr val="000000">
+                <a:alpha val="63000"/>
+              </a:srgbClr>
+            </a:outerShdw>
+          </a:effectLst>
+        </a:effectStyle>
+      </a:effectStyleLst>
+      <a:bgFillStyleLst>
+        <a:solidFill>
+          <a:schemeClr val="phClr"/>
+        </a:solidFill>
+        <a:solidFill>
+          <a:schemeClr val="phClr">
+            <a:tint val="95000"/>
+            <a:satMod val="170000"/>
+          </a:schemeClr>
+        </a:solidFill>
+        <a:gradFill rotWithShape="1">
+          <a:gsLst>
+            <a:gs pos="0">
+              <a:schemeClr val="phClr">
+                <a:tint val="93000"/>
+                <a:satMod val="150000"/>
+                <a:shade val="98000"/>
+                <a:lumMod val="102000"/>
+              </a:schemeClr>
+            </a:gs>
+            <a:gs pos="50000">
+              <a:schemeClr val="phClr">
+                <a:tint val="98000"/>
+                <a:satMod val="130000"/>
+                <a:shade val="90000"/>
+                <a:lumMod val="103000"/>
+              </a:schemeClr>
+            </a:gs>
+            <a:gs pos="100000">
+              <a:schemeClr val="phClr">
+                <a:shade val="63000"/>
+                <a:satMod val="120000"/>
+              </a:schemeClr>
+            </a:gs>
+          </a:gsLst>
+          <a:lin ang="5400000" scaled="0"/>
+        </a:gradFill>
+      </a:bgFillStyleLst>
+    </a:fmtScheme>
+  </a:themeElements>
+  <a:objectDefaults/>
+  <a:extraClrSchemeLst/>
+  <a:extLst>
+    <a:ext uri="{05A4C25C-085E-4340-85A3-A5531E510DB2}">
+      <thm15:themeFamily xmlns:thm15="http://schemas.microsoft.com/office/thememl/2012/main" name="Office Theme" id="{62F939B6-93AF-4DB8-9C6B-D6C7DFDC589F}" vid="{4A3C46E8-61CC-4603-A589-7422A47A8E4A}"/>
+    </a:ext>
+  </a:extLst>
 </a:theme>
 </file>